--- a/output/Informatica_to_Fabric_Migration_Tool.pptx
+++ b/output/Informatica_to_Fabric_Migration_Tool.pptx
@@ -18,6 +18,7 @@
     <p:sldId id="266" r:id="rId17"/>
     <p:sldId id="267" r:id="rId18"/>
     <p:sldId id="268" r:id="rId19"/>
+    <p:sldId id="269" r:id="rId20"/>
   </p:sldIdLst>
   <p:sldSz cx="12191695" cy="6858000" type="screen4x3"/>
   <p:notesSz cx="6858000" cy="9144000"/>
@@ -3184,8 +3185,8 @@
         </p:nvSpPr>
         <p:spPr>
           <a:xfrm>
-            <a:off x="1005840" y="3657600"/>
-            <a:ext cx="2377440" cy="1371600"/>
+            <a:off x="1371600" y="3657600"/>
+            <a:ext cx="2011680" cy="1371600"/>
           </a:xfrm>
           <a:prstGeom prst="roundRect">
             <a:avLst/>
@@ -3228,8 +3229,8 @@
         </p:nvSpPr>
         <p:spPr>
           <a:xfrm>
-            <a:off x="1097280" y="3794760"/>
-            <a:ext cx="2194560" cy="731520"/>
+            <a:off x="1417320" y="3794760"/>
+            <a:ext cx="1920240" cy="731520"/>
           </a:xfrm>
           <a:prstGeom prst="rect">
             <a:avLst/>
@@ -3244,7 +3245,7 @@
           <a:p>
             <a:pPr algn="ctr"/>
             <a:r>
-              <a:rPr sz="3600" b="1">
+              <a:rPr sz="3200" b="1">
                 <a:solidFill>
                   <a:srgbClr val="FFFFFF"/>
                 </a:solidFill>
@@ -3262,8 +3263,8 @@
         </p:nvSpPr>
         <p:spPr>
           <a:xfrm>
-            <a:off x="1097280" y="4434840"/>
-            <a:ext cx="2194560" cy="457200"/>
+            <a:off x="1417320" y="4434840"/>
+            <a:ext cx="1920240" cy="457200"/>
           </a:xfrm>
           <a:prstGeom prst="rect">
             <a:avLst/>
@@ -3278,7 +3279,7 @@
           <a:p>
             <a:pPr algn="ctr"/>
             <a:r>
-              <a:rPr sz="1300" b="0">
+              <a:rPr sz="1200" b="0">
                 <a:solidFill>
                   <a:srgbClr val="FFFFFF"/>
                 </a:solidFill>
@@ -3296,8 +3297,8 @@
         </p:nvSpPr>
         <p:spPr>
           <a:xfrm>
-            <a:off x="3703320" y="3657600"/>
-            <a:ext cx="2377440" cy="1371600"/>
+            <a:off x="3749040" y="3657600"/>
+            <a:ext cx="2011680" cy="1371600"/>
           </a:xfrm>
           <a:prstGeom prst="roundRect">
             <a:avLst/>
@@ -3341,7 +3342,7 @@
         <p:spPr>
           <a:xfrm>
             <a:off x="3794760" y="3794760"/>
-            <a:ext cx="2194560" cy="731520"/>
+            <a:ext cx="1920240" cy="731520"/>
           </a:xfrm>
           <a:prstGeom prst="rect">
             <a:avLst/>
@@ -3356,7 +3357,7 @@
           <a:p>
             <a:pPr algn="ctr"/>
             <a:r>
-              <a:rPr sz="3600" b="1">
+              <a:rPr sz="3200" b="1">
                 <a:solidFill>
                   <a:srgbClr val="FFFFFF"/>
                 </a:solidFill>
@@ -3375,7 +3376,7 @@
         <p:spPr>
           <a:xfrm>
             <a:off x="3794760" y="4434840"/>
-            <a:ext cx="2194560" cy="457200"/>
+            <a:ext cx="1920240" cy="457200"/>
           </a:xfrm>
           <a:prstGeom prst="rect">
             <a:avLst/>
@@ -3390,7 +3391,7 @@
           <a:p>
             <a:pPr algn="ctr"/>
             <a:r>
-              <a:rPr sz="1300" b="0">
+              <a:rPr sz="1200" b="0">
                 <a:solidFill>
                   <a:srgbClr val="FFFFFF"/>
                 </a:solidFill>
@@ -3408,8 +3409,8 @@
         </p:nvSpPr>
         <p:spPr>
           <a:xfrm>
-            <a:off x="6400800" y="3657600"/>
-            <a:ext cx="2377440" cy="1371600"/>
+            <a:off x="6126480" y="3657600"/>
+            <a:ext cx="2011680" cy="1371600"/>
           </a:xfrm>
           <a:prstGeom prst="roundRect">
             <a:avLst/>
@@ -3452,8 +3453,8 @@
         </p:nvSpPr>
         <p:spPr>
           <a:xfrm>
-            <a:off x="6492240" y="3794760"/>
-            <a:ext cx="2194560" cy="731520"/>
+            <a:off x="6172200" y="3794760"/>
+            <a:ext cx="1920240" cy="731520"/>
           </a:xfrm>
           <a:prstGeom prst="rect">
             <a:avLst/>
@@ -3468,7 +3469,7 @@
           <a:p>
             <a:pPr algn="ctr"/>
             <a:r>
-              <a:rPr sz="3600" b="1">
+              <a:rPr sz="3200" b="1">
                 <a:solidFill>
                   <a:srgbClr val="FFFFFF"/>
                 </a:solidFill>
@@ -3486,8 +3487,8 @@
         </p:nvSpPr>
         <p:spPr>
           <a:xfrm>
-            <a:off x="6492240" y="4434840"/>
-            <a:ext cx="2194560" cy="457200"/>
+            <a:off x="6172200" y="4434840"/>
+            <a:ext cx="1920240" cy="457200"/>
           </a:xfrm>
           <a:prstGeom prst="rect">
             <a:avLst/>
@@ -3502,7 +3503,7 @@
           <a:p>
             <a:pPr algn="ctr"/>
             <a:r>
-              <a:rPr sz="1300" b="0">
+              <a:rPr sz="1200" b="0">
                 <a:solidFill>
                   <a:srgbClr val="FFFFFF"/>
                 </a:solidFill>
@@ -3520,8 +3521,8 @@
         </p:nvSpPr>
         <p:spPr>
           <a:xfrm>
-            <a:off x="9098280" y="3657600"/>
-            <a:ext cx="2377440" cy="1371600"/>
+            <a:off x="8503920" y="3657600"/>
+            <a:ext cx="2011680" cy="1371600"/>
           </a:xfrm>
           <a:prstGeom prst="roundRect">
             <a:avLst/>
@@ -3564,8 +3565,8 @@
         </p:nvSpPr>
         <p:spPr>
           <a:xfrm>
-            <a:off x="9189720" y="3794760"/>
-            <a:ext cx="2194560" cy="731520"/>
+            <a:off x="8549640" y="3794760"/>
+            <a:ext cx="1920240" cy="731520"/>
           </a:xfrm>
           <a:prstGeom prst="rect">
             <a:avLst/>
@@ -3580,7 +3581,7 @@
           <a:p>
             <a:pPr algn="ctr"/>
             <a:r>
-              <a:rPr sz="3600" b="1">
+              <a:rPr sz="3200" b="1">
                 <a:solidFill>
                   <a:srgbClr val="FFFFFF"/>
                 </a:solidFill>
@@ -3598,8 +3599,8 @@
         </p:nvSpPr>
         <p:spPr>
           <a:xfrm>
-            <a:off x="9189720" y="4434840"/>
-            <a:ext cx="2194560" cy="457200"/>
+            <a:off x="8549640" y="4434840"/>
+            <a:ext cx="1920240" cy="457200"/>
           </a:xfrm>
           <a:prstGeom prst="rect">
             <a:avLst/>
@@ -3614,7 +3615,7 @@
           <a:p>
             <a:pPr algn="ctr"/>
             <a:r>
-              <a:rPr sz="1300" b="0">
+              <a:rPr sz="1200" b="0">
                 <a:solidFill>
                   <a:srgbClr val="FFFFFF"/>
                 </a:solidFill>
@@ -4462,8 +4463,8 @@
         </p:nvSpPr>
         <p:spPr>
           <a:xfrm>
-            <a:off x="7772400" y="3931920"/>
-            <a:ext cx="3931920" cy="2286000"/>
+            <a:off x="8778240" y="3931920"/>
+            <a:ext cx="3108960" cy="2286000"/>
           </a:xfrm>
           <a:prstGeom prst="roundRect">
             <a:avLst/>
@@ -4496,7 +4497,7 @@
           <a:p>
             <a:pPr algn="ctr"/>
             <a:r>
-              <a:rPr sz="1600" b="0">
+              <a:rPr sz="1500" b="0">
                 <a:solidFill>
                   <a:srgbClr val="FFFFFF"/>
                 </a:solidFill>
@@ -4610,7 +4611,7 @@
                   <a:srgbClr val="FFFFFF"/>
                 </a:solidFill>
               </a:rPr>
-              <a:t>Enterprise Scenarios &amp; Scale</a:t>
+              <a:t>Detailed Time &amp; Cost Savings Estimate</a:t>
             </a:r>
           </a:p>
         </p:txBody>
@@ -4644,7 +4645,7 @@
                   <a:srgbClr val="BDC3C7"/>
                 </a:solidFill>
               </a:rPr>
-              <a:t>Real-world migration complexity handled</a:t>
+              <a:t>Per-task breakdown — 200 mappings, 50 workflows, 3 DB types, AutoSys</a:t>
             </a:r>
           </a:p>
         </p:txBody>
@@ -4657,8 +4658,5084 @@
         </p:nvSpPr>
         <p:spPr>
           <a:xfrm>
-            <a:off x="457200" y="1371600"/>
-            <a:ext cx="3474720" cy="548640"/>
+            <a:off x="274320" y="1417320"/>
+            <a:ext cx="2194560" cy="502920"/>
+          </a:xfrm>
+          <a:prstGeom prst="roundRect">
+            <a:avLst/>
+          </a:prstGeom>
+          <a:solidFill>
+            <a:srgbClr val="003C6E"/>
+          </a:solidFill>
+          <a:ln>
+            <a:noFill/>
+          </a:ln>
+          <a:effectLst/>
+        </p:spPr>
+        <p:style>
+          <a:lnRef idx="1">
+            <a:schemeClr val="accent1"/>
+          </a:lnRef>
+          <a:fillRef idx="3">
+            <a:schemeClr val="accent1"/>
+          </a:fillRef>
+          <a:effectRef idx="2">
+            <a:schemeClr val="accent1"/>
+          </a:effectRef>
+          <a:fontRef idx="minor">
+            <a:schemeClr val="lt1"/>
+          </a:fontRef>
+        </p:style>
+        <p:txBody>
+          <a:bodyPr rtlCol="0" anchor="ctr" wrap="square"/>
+          <a:lstStyle/>
+          <a:p>
+            <a:pPr algn="ctr"/>
+            <a:r>
+              <a:rPr sz="1000" b="1">
+                <a:solidFill>
+                  <a:srgbClr val="FFFFFF"/>
+                </a:solidFill>
+              </a:rPr>
+              <a:t>Migration Task</a:t>
+            </a:r>
+          </a:p>
+        </p:txBody>
+      </p:sp>
+      <p:sp>
+        <p:nvSpPr>
+          <p:cNvPr id="6" name="Rounded Rectangle 5"/>
+          <p:cNvSpPr/>
+          <p:nvPr/>
+        </p:nvSpPr>
+        <p:spPr>
+          <a:xfrm>
+            <a:off x="2468880" y="1417320"/>
+            <a:ext cx="822960" cy="502920"/>
+          </a:xfrm>
+          <a:prstGeom prst="roundRect">
+            <a:avLst/>
+          </a:prstGeom>
+          <a:solidFill>
+            <a:srgbClr val="003C6E"/>
+          </a:solidFill>
+          <a:ln>
+            <a:noFill/>
+          </a:ln>
+          <a:effectLst/>
+        </p:spPr>
+        <p:style>
+          <a:lnRef idx="1">
+            <a:schemeClr val="accent1"/>
+          </a:lnRef>
+          <a:fillRef idx="3">
+            <a:schemeClr val="accent1"/>
+          </a:fillRef>
+          <a:effectRef idx="2">
+            <a:schemeClr val="accent1"/>
+          </a:effectRef>
+          <a:fontRef idx="minor">
+            <a:schemeClr val="lt1"/>
+          </a:fontRef>
+        </p:style>
+        <p:txBody>
+          <a:bodyPr rtlCol="0" anchor="ctr" wrap="square"/>
+          <a:lstStyle/>
+          <a:p>
+            <a:pPr algn="ctr"/>
+            <a:r>
+              <a:rPr sz="1000" b="1">
+                <a:solidFill>
+                  <a:srgbClr val="FFFFFF"/>
+                </a:solidFill>
+              </a:rPr>
+              <a:t>Manual
+(h/item)</a:t>
+            </a:r>
+          </a:p>
+        </p:txBody>
+      </p:sp>
+      <p:sp>
+        <p:nvSpPr>
+          <p:cNvPr id="7" name="Rounded Rectangle 6"/>
+          <p:cNvSpPr/>
+          <p:nvPr/>
+        </p:nvSpPr>
+        <p:spPr>
+          <a:xfrm>
+            <a:off x="3291840" y="1417320"/>
+            <a:ext cx="822960" cy="502920"/>
+          </a:xfrm>
+          <a:prstGeom prst="roundRect">
+            <a:avLst/>
+          </a:prstGeom>
+          <a:solidFill>
+            <a:srgbClr val="003C6E"/>
+          </a:solidFill>
+          <a:ln>
+            <a:noFill/>
+          </a:ln>
+          <a:effectLst/>
+        </p:spPr>
+        <p:style>
+          <a:lnRef idx="1">
+            <a:schemeClr val="accent1"/>
+          </a:lnRef>
+          <a:fillRef idx="3">
+            <a:schemeClr val="accent1"/>
+          </a:fillRef>
+          <a:effectRef idx="2">
+            <a:schemeClr val="accent1"/>
+          </a:effectRef>
+          <a:fontRef idx="minor">
+            <a:schemeClr val="lt1"/>
+          </a:fontRef>
+        </p:style>
+        <p:txBody>
+          <a:bodyPr rtlCol="0" anchor="ctr" wrap="square"/>
+          <a:lstStyle/>
+          <a:p>
+            <a:pPr algn="ctr"/>
+            <a:r>
+              <a:rPr sz="1000" b="1">
+                <a:solidFill>
+                  <a:srgbClr val="FFFFFF"/>
+                </a:solidFill>
+              </a:rPr>
+              <a:t>Auto
+(h/item)</a:t>
+            </a:r>
+          </a:p>
+        </p:txBody>
+      </p:sp>
+      <p:sp>
+        <p:nvSpPr>
+          <p:cNvPr id="8" name="Rounded Rectangle 7"/>
+          <p:cNvSpPr/>
+          <p:nvPr/>
+        </p:nvSpPr>
+        <p:spPr>
+          <a:xfrm>
+            <a:off x="4114800" y="1417320"/>
+            <a:ext cx="548640" cy="502920"/>
+          </a:xfrm>
+          <a:prstGeom prst="roundRect">
+            <a:avLst/>
+          </a:prstGeom>
+          <a:solidFill>
+            <a:srgbClr val="003C6E"/>
+          </a:solidFill>
+          <a:ln>
+            <a:noFill/>
+          </a:ln>
+          <a:effectLst/>
+        </p:spPr>
+        <p:style>
+          <a:lnRef idx="1">
+            <a:schemeClr val="accent1"/>
+          </a:lnRef>
+          <a:fillRef idx="3">
+            <a:schemeClr val="accent1"/>
+          </a:fillRef>
+          <a:effectRef idx="2">
+            <a:schemeClr val="accent1"/>
+          </a:effectRef>
+          <a:fontRef idx="minor">
+            <a:schemeClr val="lt1"/>
+          </a:fontRef>
+        </p:style>
+        <p:txBody>
+          <a:bodyPr rtlCol="0" anchor="ctr" wrap="square"/>
+          <a:lstStyle/>
+          <a:p>
+            <a:pPr algn="ctr"/>
+            <a:r>
+              <a:rPr sz="1000" b="1">
+                <a:solidFill>
+                  <a:srgbClr val="FFFFFF"/>
+                </a:solidFill>
+              </a:rPr>
+              <a:t>Items</a:t>
+            </a:r>
+          </a:p>
+        </p:txBody>
+      </p:sp>
+      <p:sp>
+        <p:nvSpPr>
+          <p:cNvPr id="9" name="Rounded Rectangle 8"/>
+          <p:cNvSpPr/>
+          <p:nvPr/>
+        </p:nvSpPr>
+        <p:spPr>
+          <a:xfrm>
+            <a:off x="4663440" y="1417320"/>
+            <a:ext cx="960120" cy="502920"/>
+          </a:xfrm>
+          <a:prstGeom prst="roundRect">
+            <a:avLst/>
+          </a:prstGeom>
+          <a:solidFill>
+            <a:srgbClr val="003C6E"/>
+          </a:solidFill>
+          <a:ln>
+            <a:noFill/>
+          </a:ln>
+          <a:effectLst/>
+        </p:spPr>
+        <p:style>
+          <a:lnRef idx="1">
+            <a:schemeClr val="accent1"/>
+          </a:lnRef>
+          <a:fillRef idx="3">
+            <a:schemeClr val="accent1"/>
+          </a:fillRef>
+          <a:effectRef idx="2">
+            <a:schemeClr val="accent1"/>
+          </a:effectRef>
+          <a:fontRef idx="minor">
+            <a:schemeClr val="lt1"/>
+          </a:fontRef>
+        </p:style>
+        <p:txBody>
+          <a:bodyPr rtlCol="0" anchor="ctr" wrap="square"/>
+          <a:lstStyle/>
+          <a:p>
+            <a:pPr algn="ctr"/>
+            <a:r>
+              <a:rPr sz="1000" b="1">
+                <a:solidFill>
+                  <a:srgbClr val="FFFFFF"/>
+                </a:solidFill>
+              </a:rPr>
+              <a:t>Manual
+Total (h)</a:t>
+            </a:r>
+          </a:p>
+        </p:txBody>
+      </p:sp>
+      <p:sp>
+        <p:nvSpPr>
+          <p:cNvPr id="10" name="Rounded Rectangle 9"/>
+          <p:cNvSpPr/>
+          <p:nvPr/>
+        </p:nvSpPr>
+        <p:spPr>
+          <a:xfrm>
+            <a:off x="5623560" y="1417320"/>
+            <a:ext cx="960120" cy="502920"/>
+          </a:xfrm>
+          <a:prstGeom prst="roundRect">
+            <a:avLst/>
+          </a:prstGeom>
+          <a:solidFill>
+            <a:srgbClr val="003C6E"/>
+          </a:solidFill>
+          <a:ln>
+            <a:noFill/>
+          </a:ln>
+          <a:effectLst/>
+        </p:spPr>
+        <p:style>
+          <a:lnRef idx="1">
+            <a:schemeClr val="accent1"/>
+          </a:lnRef>
+          <a:fillRef idx="3">
+            <a:schemeClr val="accent1"/>
+          </a:fillRef>
+          <a:effectRef idx="2">
+            <a:schemeClr val="accent1"/>
+          </a:effectRef>
+          <a:fontRef idx="minor">
+            <a:schemeClr val="lt1"/>
+          </a:fontRef>
+        </p:style>
+        <p:txBody>
+          <a:bodyPr rtlCol="0" anchor="ctr" wrap="square"/>
+          <a:lstStyle/>
+          <a:p>
+            <a:pPr algn="ctr"/>
+            <a:r>
+              <a:rPr sz="1000" b="1">
+                <a:solidFill>
+                  <a:srgbClr val="FFFFFF"/>
+                </a:solidFill>
+              </a:rPr>
+              <a:t>Auto
+Total (h)</a:t>
+            </a:r>
+          </a:p>
+        </p:txBody>
+      </p:sp>
+      <p:sp>
+        <p:nvSpPr>
+          <p:cNvPr id="11" name="Rounded Rectangle 10"/>
+          <p:cNvSpPr/>
+          <p:nvPr/>
+        </p:nvSpPr>
+        <p:spPr>
+          <a:xfrm>
+            <a:off x="6583680" y="1417320"/>
+            <a:ext cx="777240" cy="502920"/>
+          </a:xfrm>
+          <a:prstGeom prst="roundRect">
+            <a:avLst/>
+          </a:prstGeom>
+          <a:solidFill>
+            <a:srgbClr val="003C6E"/>
+          </a:solidFill>
+          <a:ln>
+            <a:noFill/>
+          </a:ln>
+          <a:effectLst/>
+        </p:spPr>
+        <p:style>
+          <a:lnRef idx="1">
+            <a:schemeClr val="accent1"/>
+          </a:lnRef>
+          <a:fillRef idx="3">
+            <a:schemeClr val="accent1"/>
+          </a:fillRef>
+          <a:effectRef idx="2">
+            <a:schemeClr val="accent1"/>
+          </a:effectRef>
+          <a:fontRef idx="minor">
+            <a:schemeClr val="lt1"/>
+          </a:fontRef>
+        </p:style>
+        <p:txBody>
+          <a:bodyPr rtlCol="0" anchor="ctr" wrap="square"/>
+          <a:lstStyle/>
+          <a:p>
+            <a:pPr algn="ctr"/>
+            <a:r>
+              <a:rPr sz="1000" b="1">
+                <a:solidFill>
+                  <a:srgbClr val="FFFFFF"/>
+                </a:solidFill>
+              </a:rPr>
+              <a:t>Saved</a:t>
+            </a:r>
+          </a:p>
+        </p:txBody>
+      </p:sp>
+      <p:sp>
+        <p:nvSpPr>
+          <p:cNvPr id="12" name="Rounded Rectangle 11"/>
+          <p:cNvSpPr/>
+          <p:nvPr/>
+        </p:nvSpPr>
+        <p:spPr>
+          <a:xfrm>
+            <a:off x="274320" y="1801368"/>
+            <a:ext cx="2194560" cy="347472"/>
+          </a:xfrm>
+          <a:prstGeom prst="roundRect">
+            <a:avLst/>
+          </a:prstGeom>
+          <a:solidFill>
+            <a:srgbClr val="ECF0F1"/>
+          </a:solidFill>
+          <a:ln>
+            <a:noFill/>
+          </a:ln>
+          <a:effectLst/>
+        </p:spPr>
+        <p:style>
+          <a:lnRef idx="1">
+            <a:schemeClr val="accent1"/>
+          </a:lnRef>
+          <a:fillRef idx="3">
+            <a:schemeClr val="accent1"/>
+          </a:fillRef>
+          <a:effectRef idx="2">
+            <a:schemeClr val="accent1"/>
+          </a:effectRef>
+          <a:fontRef idx="minor">
+            <a:schemeClr val="lt1"/>
+          </a:fontRef>
+        </p:style>
+        <p:txBody>
+          <a:bodyPr rtlCol="0" anchor="ctr" wrap="square"/>
+          <a:lstStyle/>
+          <a:p>
+            <a:pPr algn="l"/>
+            <a:r>
+              <a:rPr sz="1000" b="0">
+                <a:solidFill>
+                  <a:srgbClr val="2C3E50"/>
+                </a:solidFill>
+              </a:rPr>
+              <a:t>Assessment &amp; Inventory</a:t>
+            </a:r>
+          </a:p>
+        </p:txBody>
+      </p:sp>
+      <p:sp>
+        <p:nvSpPr>
+          <p:cNvPr id="13" name="Rounded Rectangle 12"/>
+          <p:cNvSpPr/>
+          <p:nvPr/>
+        </p:nvSpPr>
+        <p:spPr>
+          <a:xfrm>
+            <a:off x="2468880" y="1801368"/>
+            <a:ext cx="822960" cy="347472"/>
+          </a:xfrm>
+          <a:prstGeom prst="roundRect">
+            <a:avLst/>
+          </a:prstGeom>
+          <a:solidFill>
+            <a:srgbClr val="ECF0F1"/>
+          </a:solidFill>
+          <a:ln>
+            <a:noFill/>
+          </a:ln>
+          <a:effectLst/>
+        </p:spPr>
+        <p:style>
+          <a:lnRef idx="1">
+            <a:schemeClr val="accent1"/>
+          </a:lnRef>
+          <a:fillRef idx="3">
+            <a:schemeClr val="accent1"/>
+          </a:fillRef>
+          <a:effectRef idx="2">
+            <a:schemeClr val="accent1"/>
+          </a:effectRef>
+          <a:fontRef idx="minor">
+            <a:schemeClr val="lt1"/>
+          </a:fontRef>
+        </p:style>
+        <p:txBody>
+          <a:bodyPr rtlCol="0" anchor="ctr" wrap="square"/>
+          <a:lstStyle/>
+          <a:p>
+            <a:pPr algn="ctr"/>
+            <a:r>
+              <a:rPr sz="1000" b="0">
+                <a:solidFill>
+                  <a:srgbClr val="2C3E50"/>
+                </a:solidFill>
+              </a:rPr>
+              <a:t>8</a:t>
+            </a:r>
+          </a:p>
+        </p:txBody>
+      </p:sp>
+      <p:sp>
+        <p:nvSpPr>
+          <p:cNvPr id="14" name="Rounded Rectangle 13"/>
+          <p:cNvSpPr/>
+          <p:nvPr/>
+        </p:nvSpPr>
+        <p:spPr>
+          <a:xfrm>
+            <a:off x="3291840" y="1801368"/>
+            <a:ext cx="822960" cy="347472"/>
+          </a:xfrm>
+          <a:prstGeom prst="roundRect">
+            <a:avLst/>
+          </a:prstGeom>
+          <a:solidFill>
+            <a:srgbClr val="ECF0F1"/>
+          </a:solidFill>
+          <a:ln>
+            <a:noFill/>
+          </a:ln>
+          <a:effectLst/>
+        </p:spPr>
+        <p:style>
+          <a:lnRef idx="1">
+            <a:schemeClr val="accent1"/>
+          </a:lnRef>
+          <a:fillRef idx="3">
+            <a:schemeClr val="accent1"/>
+          </a:fillRef>
+          <a:effectRef idx="2">
+            <a:schemeClr val="accent1"/>
+          </a:effectRef>
+          <a:fontRef idx="minor">
+            <a:schemeClr val="lt1"/>
+          </a:fontRef>
+        </p:style>
+        <p:txBody>
+          <a:bodyPr rtlCol="0" anchor="ctr" wrap="square"/>
+          <a:lstStyle/>
+          <a:p>
+            <a:pPr algn="ctr"/>
+            <a:r>
+              <a:rPr sz="1000" b="0">
+                <a:solidFill>
+                  <a:srgbClr val="2C3E50"/>
+                </a:solidFill>
+              </a:rPr>
+              <a:t>0.1</a:t>
+            </a:r>
+          </a:p>
+        </p:txBody>
+      </p:sp>
+      <p:sp>
+        <p:nvSpPr>
+          <p:cNvPr id="15" name="Rounded Rectangle 14"/>
+          <p:cNvSpPr/>
+          <p:nvPr/>
+        </p:nvSpPr>
+        <p:spPr>
+          <a:xfrm>
+            <a:off x="4114800" y="1801368"/>
+            <a:ext cx="548640" cy="347472"/>
+          </a:xfrm>
+          <a:prstGeom prst="roundRect">
+            <a:avLst/>
+          </a:prstGeom>
+          <a:solidFill>
+            <a:srgbClr val="ECF0F1"/>
+          </a:solidFill>
+          <a:ln>
+            <a:noFill/>
+          </a:ln>
+          <a:effectLst/>
+        </p:spPr>
+        <p:style>
+          <a:lnRef idx="1">
+            <a:schemeClr val="accent1"/>
+          </a:lnRef>
+          <a:fillRef idx="3">
+            <a:schemeClr val="accent1"/>
+          </a:fillRef>
+          <a:effectRef idx="2">
+            <a:schemeClr val="accent1"/>
+          </a:effectRef>
+          <a:fontRef idx="minor">
+            <a:schemeClr val="lt1"/>
+          </a:fontRef>
+        </p:style>
+        <p:txBody>
+          <a:bodyPr rtlCol="0" anchor="ctr" wrap="square"/>
+          <a:lstStyle/>
+          <a:p>
+            <a:pPr algn="ctr"/>
+            <a:r>
+              <a:rPr sz="1000" b="0">
+                <a:solidFill>
+                  <a:srgbClr val="2C3E50"/>
+                </a:solidFill>
+              </a:rPr>
+              <a:t>200</a:t>
+            </a:r>
+          </a:p>
+        </p:txBody>
+      </p:sp>
+      <p:sp>
+        <p:nvSpPr>
+          <p:cNvPr id="16" name="Rounded Rectangle 15"/>
+          <p:cNvSpPr/>
+          <p:nvPr/>
+        </p:nvSpPr>
+        <p:spPr>
+          <a:xfrm>
+            <a:off x="4663440" y="1801368"/>
+            <a:ext cx="960120" cy="347472"/>
+          </a:xfrm>
+          <a:prstGeom prst="roundRect">
+            <a:avLst/>
+          </a:prstGeom>
+          <a:solidFill>
+            <a:srgbClr val="ECF0F1"/>
+          </a:solidFill>
+          <a:ln>
+            <a:noFill/>
+          </a:ln>
+          <a:effectLst/>
+        </p:spPr>
+        <p:style>
+          <a:lnRef idx="1">
+            <a:schemeClr val="accent1"/>
+          </a:lnRef>
+          <a:fillRef idx="3">
+            <a:schemeClr val="accent1"/>
+          </a:fillRef>
+          <a:effectRef idx="2">
+            <a:schemeClr val="accent1"/>
+          </a:effectRef>
+          <a:fontRef idx="minor">
+            <a:schemeClr val="lt1"/>
+          </a:fontRef>
+        </p:style>
+        <p:txBody>
+          <a:bodyPr rtlCol="0" anchor="ctr" wrap="square"/>
+          <a:lstStyle/>
+          <a:p>
+            <a:pPr algn="ctr"/>
+            <a:r>
+              <a:rPr sz="1000" b="0">
+                <a:solidFill>
+                  <a:srgbClr val="2C3E50"/>
+                </a:solidFill>
+              </a:rPr>
+              <a:t>1,600</a:t>
+            </a:r>
+          </a:p>
+        </p:txBody>
+      </p:sp>
+      <p:sp>
+        <p:nvSpPr>
+          <p:cNvPr id="17" name="Rounded Rectangle 16"/>
+          <p:cNvSpPr/>
+          <p:nvPr/>
+        </p:nvSpPr>
+        <p:spPr>
+          <a:xfrm>
+            <a:off x="5623560" y="1801368"/>
+            <a:ext cx="960120" cy="347472"/>
+          </a:xfrm>
+          <a:prstGeom prst="roundRect">
+            <a:avLst/>
+          </a:prstGeom>
+          <a:solidFill>
+            <a:srgbClr val="ECF0F1"/>
+          </a:solidFill>
+          <a:ln>
+            <a:noFill/>
+          </a:ln>
+          <a:effectLst/>
+        </p:spPr>
+        <p:style>
+          <a:lnRef idx="1">
+            <a:schemeClr val="accent1"/>
+          </a:lnRef>
+          <a:fillRef idx="3">
+            <a:schemeClr val="accent1"/>
+          </a:fillRef>
+          <a:effectRef idx="2">
+            <a:schemeClr val="accent1"/>
+          </a:effectRef>
+          <a:fontRef idx="minor">
+            <a:schemeClr val="lt1"/>
+          </a:fontRef>
+        </p:style>
+        <p:txBody>
+          <a:bodyPr rtlCol="0" anchor="ctr" wrap="square"/>
+          <a:lstStyle/>
+          <a:p>
+            <a:pPr algn="ctr"/>
+            <a:r>
+              <a:rPr sz="1000" b="0">
+                <a:solidFill>
+                  <a:srgbClr val="2C3E50"/>
+                </a:solidFill>
+              </a:rPr>
+              <a:t>20</a:t>
+            </a:r>
+          </a:p>
+        </p:txBody>
+      </p:sp>
+      <p:sp>
+        <p:nvSpPr>
+          <p:cNvPr id="18" name="Rounded Rectangle 17"/>
+          <p:cNvSpPr/>
+          <p:nvPr/>
+        </p:nvSpPr>
+        <p:spPr>
+          <a:xfrm>
+            <a:off x="6583680" y="1801368"/>
+            <a:ext cx="777240" cy="347472"/>
+          </a:xfrm>
+          <a:prstGeom prst="roundRect">
+            <a:avLst/>
+          </a:prstGeom>
+          <a:solidFill>
+            <a:srgbClr val="27AE60"/>
+          </a:solidFill>
+          <a:ln>
+            <a:noFill/>
+          </a:ln>
+          <a:effectLst/>
+        </p:spPr>
+        <p:style>
+          <a:lnRef idx="1">
+            <a:schemeClr val="accent1"/>
+          </a:lnRef>
+          <a:fillRef idx="3">
+            <a:schemeClr val="accent1"/>
+          </a:fillRef>
+          <a:effectRef idx="2">
+            <a:schemeClr val="accent1"/>
+          </a:effectRef>
+          <a:fontRef idx="minor">
+            <a:schemeClr val="lt1"/>
+          </a:fontRef>
+        </p:style>
+        <p:txBody>
+          <a:bodyPr rtlCol="0" anchor="ctr" wrap="square"/>
+          <a:lstStyle/>
+          <a:p>
+            <a:pPr algn="ctr"/>
+            <a:r>
+              <a:rPr sz="1000" b="0">
+                <a:solidFill>
+                  <a:srgbClr val="FFFFFF"/>
+                </a:solidFill>
+              </a:rPr>
+              <a:t>99%</a:t>
+            </a:r>
+          </a:p>
+        </p:txBody>
+      </p:sp>
+      <p:sp>
+        <p:nvSpPr>
+          <p:cNvPr id="19" name="Rounded Rectangle 18"/>
+          <p:cNvSpPr/>
+          <p:nvPr/>
+        </p:nvSpPr>
+        <p:spPr>
+          <a:xfrm>
+            <a:off x="274320" y="2185416"/>
+            <a:ext cx="2194560" cy="347472"/>
+          </a:xfrm>
+          <a:prstGeom prst="roundRect">
+            <a:avLst/>
+          </a:prstGeom>
+          <a:solidFill>
+            <a:srgbClr val="FFFFFF"/>
+          </a:solidFill>
+          <a:ln>
+            <a:noFill/>
+          </a:ln>
+          <a:effectLst/>
+        </p:spPr>
+        <p:style>
+          <a:lnRef idx="1">
+            <a:schemeClr val="accent1"/>
+          </a:lnRef>
+          <a:fillRef idx="3">
+            <a:schemeClr val="accent1"/>
+          </a:fillRef>
+          <a:effectRef idx="2">
+            <a:schemeClr val="accent1"/>
+          </a:effectRef>
+          <a:fontRef idx="minor">
+            <a:schemeClr val="lt1"/>
+          </a:fontRef>
+        </p:style>
+        <p:txBody>
+          <a:bodyPr rtlCol="0" anchor="ctr" wrap="square"/>
+          <a:lstStyle/>
+          <a:p>
+            <a:pPr algn="l"/>
+            <a:r>
+              <a:rPr sz="1000" b="0">
+                <a:solidFill>
+                  <a:srgbClr val="2C3E50"/>
+                </a:solidFill>
+              </a:rPr>
+              <a:t>SQL Override Conversion</a:t>
+            </a:r>
+          </a:p>
+        </p:txBody>
+      </p:sp>
+      <p:sp>
+        <p:nvSpPr>
+          <p:cNvPr id="20" name="Rounded Rectangle 19"/>
+          <p:cNvSpPr/>
+          <p:nvPr/>
+        </p:nvSpPr>
+        <p:spPr>
+          <a:xfrm>
+            <a:off x="2468880" y="2185416"/>
+            <a:ext cx="822960" cy="347472"/>
+          </a:xfrm>
+          <a:prstGeom prst="roundRect">
+            <a:avLst/>
+          </a:prstGeom>
+          <a:solidFill>
+            <a:srgbClr val="FFFFFF"/>
+          </a:solidFill>
+          <a:ln>
+            <a:noFill/>
+          </a:ln>
+          <a:effectLst/>
+        </p:spPr>
+        <p:style>
+          <a:lnRef idx="1">
+            <a:schemeClr val="accent1"/>
+          </a:lnRef>
+          <a:fillRef idx="3">
+            <a:schemeClr val="accent1"/>
+          </a:fillRef>
+          <a:effectRef idx="2">
+            <a:schemeClr val="accent1"/>
+          </a:effectRef>
+          <a:fontRef idx="minor">
+            <a:schemeClr val="lt1"/>
+          </a:fontRef>
+        </p:style>
+        <p:txBody>
+          <a:bodyPr rtlCol="0" anchor="ctr" wrap="square"/>
+          <a:lstStyle/>
+          <a:p>
+            <a:pPr algn="ctr"/>
+            <a:r>
+              <a:rPr sz="1000" b="0">
+                <a:solidFill>
+                  <a:srgbClr val="2C3E50"/>
+                </a:solidFill>
+              </a:rPr>
+              <a:t>12</a:t>
+            </a:r>
+          </a:p>
+        </p:txBody>
+      </p:sp>
+      <p:sp>
+        <p:nvSpPr>
+          <p:cNvPr id="21" name="Rounded Rectangle 20"/>
+          <p:cNvSpPr/>
+          <p:nvPr/>
+        </p:nvSpPr>
+        <p:spPr>
+          <a:xfrm>
+            <a:off x="3291840" y="2185416"/>
+            <a:ext cx="822960" cy="347472"/>
+          </a:xfrm>
+          <a:prstGeom prst="roundRect">
+            <a:avLst/>
+          </a:prstGeom>
+          <a:solidFill>
+            <a:srgbClr val="FFFFFF"/>
+          </a:solidFill>
+          <a:ln>
+            <a:noFill/>
+          </a:ln>
+          <a:effectLst/>
+        </p:spPr>
+        <p:style>
+          <a:lnRef idx="1">
+            <a:schemeClr val="accent1"/>
+          </a:lnRef>
+          <a:fillRef idx="3">
+            <a:schemeClr val="accent1"/>
+          </a:fillRef>
+          <a:effectRef idx="2">
+            <a:schemeClr val="accent1"/>
+          </a:effectRef>
+          <a:fontRef idx="minor">
+            <a:schemeClr val="lt1"/>
+          </a:fontRef>
+        </p:style>
+        <p:txBody>
+          <a:bodyPr rtlCol="0" anchor="ctr" wrap="square"/>
+          <a:lstStyle/>
+          <a:p>
+            <a:pPr algn="ctr"/>
+            <a:r>
+              <a:rPr sz="1000" b="0">
+                <a:solidFill>
+                  <a:srgbClr val="2C3E50"/>
+                </a:solidFill>
+              </a:rPr>
+              <a:t>0.1</a:t>
+            </a:r>
+          </a:p>
+        </p:txBody>
+      </p:sp>
+      <p:sp>
+        <p:nvSpPr>
+          <p:cNvPr id="22" name="Rounded Rectangle 21"/>
+          <p:cNvSpPr/>
+          <p:nvPr/>
+        </p:nvSpPr>
+        <p:spPr>
+          <a:xfrm>
+            <a:off x="4114800" y="2185416"/>
+            <a:ext cx="548640" cy="347472"/>
+          </a:xfrm>
+          <a:prstGeom prst="roundRect">
+            <a:avLst/>
+          </a:prstGeom>
+          <a:solidFill>
+            <a:srgbClr val="FFFFFF"/>
+          </a:solidFill>
+          <a:ln>
+            <a:noFill/>
+          </a:ln>
+          <a:effectLst/>
+        </p:spPr>
+        <p:style>
+          <a:lnRef idx="1">
+            <a:schemeClr val="accent1"/>
+          </a:lnRef>
+          <a:fillRef idx="3">
+            <a:schemeClr val="accent1"/>
+          </a:fillRef>
+          <a:effectRef idx="2">
+            <a:schemeClr val="accent1"/>
+          </a:effectRef>
+          <a:fontRef idx="minor">
+            <a:schemeClr val="lt1"/>
+          </a:fontRef>
+        </p:style>
+        <p:txBody>
+          <a:bodyPr rtlCol="0" anchor="ctr" wrap="square"/>
+          <a:lstStyle/>
+          <a:p>
+            <a:pPr algn="ctr"/>
+            <a:r>
+              <a:rPr sz="1000" b="0">
+                <a:solidFill>
+                  <a:srgbClr val="2C3E50"/>
+                </a:solidFill>
+              </a:rPr>
+              <a:t>120</a:t>
+            </a:r>
+          </a:p>
+        </p:txBody>
+      </p:sp>
+      <p:sp>
+        <p:nvSpPr>
+          <p:cNvPr id="23" name="Rounded Rectangle 22"/>
+          <p:cNvSpPr/>
+          <p:nvPr/>
+        </p:nvSpPr>
+        <p:spPr>
+          <a:xfrm>
+            <a:off x="4663440" y="2185416"/>
+            <a:ext cx="960120" cy="347472"/>
+          </a:xfrm>
+          <a:prstGeom prst="roundRect">
+            <a:avLst/>
+          </a:prstGeom>
+          <a:solidFill>
+            <a:srgbClr val="FFFFFF"/>
+          </a:solidFill>
+          <a:ln>
+            <a:noFill/>
+          </a:ln>
+          <a:effectLst/>
+        </p:spPr>
+        <p:style>
+          <a:lnRef idx="1">
+            <a:schemeClr val="accent1"/>
+          </a:lnRef>
+          <a:fillRef idx="3">
+            <a:schemeClr val="accent1"/>
+          </a:fillRef>
+          <a:effectRef idx="2">
+            <a:schemeClr val="accent1"/>
+          </a:effectRef>
+          <a:fontRef idx="minor">
+            <a:schemeClr val="lt1"/>
+          </a:fontRef>
+        </p:style>
+        <p:txBody>
+          <a:bodyPr rtlCol="0" anchor="ctr" wrap="square"/>
+          <a:lstStyle/>
+          <a:p>
+            <a:pPr algn="ctr"/>
+            <a:r>
+              <a:rPr sz="1000" b="0">
+                <a:solidFill>
+                  <a:srgbClr val="2C3E50"/>
+                </a:solidFill>
+              </a:rPr>
+              <a:t>1,440</a:t>
+            </a:r>
+          </a:p>
+        </p:txBody>
+      </p:sp>
+      <p:sp>
+        <p:nvSpPr>
+          <p:cNvPr id="24" name="Rounded Rectangle 23"/>
+          <p:cNvSpPr/>
+          <p:nvPr/>
+        </p:nvSpPr>
+        <p:spPr>
+          <a:xfrm>
+            <a:off x="5623560" y="2185416"/>
+            <a:ext cx="960120" cy="347472"/>
+          </a:xfrm>
+          <a:prstGeom prst="roundRect">
+            <a:avLst/>
+          </a:prstGeom>
+          <a:solidFill>
+            <a:srgbClr val="FFFFFF"/>
+          </a:solidFill>
+          <a:ln>
+            <a:noFill/>
+          </a:ln>
+          <a:effectLst/>
+        </p:spPr>
+        <p:style>
+          <a:lnRef idx="1">
+            <a:schemeClr val="accent1"/>
+          </a:lnRef>
+          <a:fillRef idx="3">
+            <a:schemeClr val="accent1"/>
+          </a:fillRef>
+          <a:effectRef idx="2">
+            <a:schemeClr val="accent1"/>
+          </a:effectRef>
+          <a:fontRef idx="minor">
+            <a:schemeClr val="lt1"/>
+          </a:fontRef>
+        </p:style>
+        <p:txBody>
+          <a:bodyPr rtlCol="0" anchor="ctr" wrap="square"/>
+          <a:lstStyle/>
+          <a:p>
+            <a:pPr algn="ctr"/>
+            <a:r>
+              <a:rPr sz="1000" b="0">
+                <a:solidFill>
+                  <a:srgbClr val="2C3E50"/>
+                </a:solidFill>
+              </a:rPr>
+              <a:t>12</a:t>
+            </a:r>
+          </a:p>
+        </p:txBody>
+      </p:sp>
+      <p:sp>
+        <p:nvSpPr>
+          <p:cNvPr id="25" name="Rounded Rectangle 24"/>
+          <p:cNvSpPr/>
+          <p:nvPr/>
+        </p:nvSpPr>
+        <p:spPr>
+          <a:xfrm>
+            <a:off x="6583680" y="2185416"/>
+            <a:ext cx="777240" cy="347472"/>
+          </a:xfrm>
+          <a:prstGeom prst="roundRect">
+            <a:avLst/>
+          </a:prstGeom>
+          <a:solidFill>
+            <a:srgbClr val="27AE60"/>
+          </a:solidFill>
+          <a:ln>
+            <a:noFill/>
+          </a:ln>
+          <a:effectLst/>
+        </p:spPr>
+        <p:style>
+          <a:lnRef idx="1">
+            <a:schemeClr val="accent1"/>
+          </a:lnRef>
+          <a:fillRef idx="3">
+            <a:schemeClr val="accent1"/>
+          </a:fillRef>
+          <a:effectRef idx="2">
+            <a:schemeClr val="accent1"/>
+          </a:effectRef>
+          <a:fontRef idx="minor">
+            <a:schemeClr val="lt1"/>
+          </a:fontRef>
+        </p:style>
+        <p:txBody>
+          <a:bodyPr rtlCol="0" anchor="ctr" wrap="square"/>
+          <a:lstStyle/>
+          <a:p>
+            <a:pPr algn="ctr"/>
+            <a:r>
+              <a:rPr sz="1000" b="0">
+                <a:solidFill>
+                  <a:srgbClr val="FFFFFF"/>
+                </a:solidFill>
+              </a:rPr>
+              <a:t>99%</a:t>
+            </a:r>
+          </a:p>
+        </p:txBody>
+      </p:sp>
+      <p:sp>
+        <p:nvSpPr>
+          <p:cNvPr id="26" name="Rounded Rectangle 25"/>
+          <p:cNvSpPr/>
+          <p:nvPr/>
+        </p:nvSpPr>
+        <p:spPr>
+          <a:xfrm>
+            <a:off x="274320" y="2569464"/>
+            <a:ext cx="2194560" cy="347472"/>
+          </a:xfrm>
+          <a:prstGeom prst="roundRect">
+            <a:avLst/>
+          </a:prstGeom>
+          <a:solidFill>
+            <a:srgbClr val="ECF0F1"/>
+          </a:solidFill>
+          <a:ln>
+            <a:noFill/>
+          </a:ln>
+          <a:effectLst/>
+        </p:spPr>
+        <p:style>
+          <a:lnRef idx="1">
+            <a:schemeClr val="accent1"/>
+          </a:lnRef>
+          <a:fillRef idx="3">
+            <a:schemeClr val="accent1"/>
+          </a:fillRef>
+          <a:effectRef idx="2">
+            <a:schemeClr val="accent1"/>
+          </a:effectRef>
+          <a:fontRef idx="minor">
+            <a:schemeClr val="lt1"/>
+          </a:fontRef>
+        </p:style>
+        <p:txBody>
+          <a:bodyPr rtlCol="0" anchor="ctr" wrap="square"/>
+          <a:lstStyle/>
+          <a:p>
+            <a:pPr algn="l"/>
+            <a:r>
+              <a:rPr sz="1000" b="0">
+                <a:solidFill>
+                  <a:srgbClr val="2C3E50"/>
+                </a:solidFill>
+              </a:rPr>
+              <a:t>Stored Procedure Conversion</a:t>
+            </a:r>
+          </a:p>
+        </p:txBody>
+      </p:sp>
+      <p:sp>
+        <p:nvSpPr>
+          <p:cNvPr id="27" name="Rounded Rectangle 26"/>
+          <p:cNvSpPr/>
+          <p:nvPr/>
+        </p:nvSpPr>
+        <p:spPr>
+          <a:xfrm>
+            <a:off x="2468880" y="2569464"/>
+            <a:ext cx="822960" cy="347472"/>
+          </a:xfrm>
+          <a:prstGeom prst="roundRect">
+            <a:avLst/>
+          </a:prstGeom>
+          <a:solidFill>
+            <a:srgbClr val="ECF0F1"/>
+          </a:solidFill>
+          <a:ln>
+            <a:noFill/>
+          </a:ln>
+          <a:effectLst/>
+        </p:spPr>
+        <p:style>
+          <a:lnRef idx="1">
+            <a:schemeClr val="accent1"/>
+          </a:lnRef>
+          <a:fillRef idx="3">
+            <a:schemeClr val="accent1"/>
+          </a:fillRef>
+          <a:effectRef idx="2">
+            <a:schemeClr val="accent1"/>
+          </a:effectRef>
+          <a:fontRef idx="minor">
+            <a:schemeClr val="lt1"/>
+          </a:fontRef>
+        </p:style>
+        <p:txBody>
+          <a:bodyPr rtlCol="0" anchor="ctr" wrap="square"/>
+          <a:lstStyle/>
+          <a:p>
+            <a:pPr algn="ctr"/>
+            <a:r>
+              <a:rPr sz="1000" b="0">
+                <a:solidFill>
+                  <a:srgbClr val="2C3E50"/>
+                </a:solidFill>
+              </a:rPr>
+              <a:t>24</a:t>
+            </a:r>
+          </a:p>
+        </p:txBody>
+      </p:sp>
+      <p:sp>
+        <p:nvSpPr>
+          <p:cNvPr id="28" name="Rounded Rectangle 27"/>
+          <p:cNvSpPr/>
+          <p:nvPr/>
+        </p:nvSpPr>
+        <p:spPr>
+          <a:xfrm>
+            <a:off x="3291840" y="2569464"/>
+            <a:ext cx="822960" cy="347472"/>
+          </a:xfrm>
+          <a:prstGeom prst="roundRect">
+            <a:avLst/>
+          </a:prstGeom>
+          <a:solidFill>
+            <a:srgbClr val="ECF0F1"/>
+          </a:solidFill>
+          <a:ln>
+            <a:noFill/>
+          </a:ln>
+          <a:effectLst/>
+        </p:spPr>
+        <p:style>
+          <a:lnRef idx="1">
+            <a:schemeClr val="accent1"/>
+          </a:lnRef>
+          <a:fillRef idx="3">
+            <a:schemeClr val="accent1"/>
+          </a:fillRef>
+          <a:effectRef idx="2">
+            <a:schemeClr val="accent1"/>
+          </a:effectRef>
+          <a:fontRef idx="minor">
+            <a:schemeClr val="lt1"/>
+          </a:fontRef>
+        </p:style>
+        <p:txBody>
+          <a:bodyPr rtlCol="0" anchor="ctr" wrap="square"/>
+          <a:lstStyle/>
+          <a:p>
+            <a:pPr algn="ctr"/>
+            <a:r>
+              <a:rPr sz="1000" b="0">
+                <a:solidFill>
+                  <a:srgbClr val="2C3E50"/>
+                </a:solidFill>
+              </a:rPr>
+              <a:t>0.5</a:t>
+            </a:r>
+          </a:p>
+        </p:txBody>
+      </p:sp>
+      <p:sp>
+        <p:nvSpPr>
+          <p:cNvPr id="29" name="Rounded Rectangle 28"/>
+          <p:cNvSpPr/>
+          <p:nvPr/>
+        </p:nvSpPr>
+        <p:spPr>
+          <a:xfrm>
+            <a:off x="4114800" y="2569464"/>
+            <a:ext cx="548640" cy="347472"/>
+          </a:xfrm>
+          <a:prstGeom prst="roundRect">
+            <a:avLst/>
+          </a:prstGeom>
+          <a:solidFill>
+            <a:srgbClr val="ECF0F1"/>
+          </a:solidFill>
+          <a:ln>
+            <a:noFill/>
+          </a:ln>
+          <a:effectLst/>
+        </p:spPr>
+        <p:style>
+          <a:lnRef idx="1">
+            <a:schemeClr val="accent1"/>
+          </a:lnRef>
+          <a:fillRef idx="3">
+            <a:schemeClr val="accent1"/>
+          </a:fillRef>
+          <a:effectRef idx="2">
+            <a:schemeClr val="accent1"/>
+          </a:effectRef>
+          <a:fontRef idx="minor">
+            <a:schemeClr val="lt1"/>
+          </a:fontRef>
+        </p:style>
+        <p:txBody>
+          <a:bodyPr rtlCol="0" anchor="ctr" wrap="square"/>
+          <a:lstStyle/>
+          <a:p>
+            <a:pPr algn="ctr"/>
+            <a:r>
+              <a:rPr sz="1000" b="0">
+                <a:solidFill>
+                  <a:srgbClr val="2C3E50"/>
+                </a:solidFill>
+              </a:rPr>
+              <a:t>30</a:t>
+            </a:r>
+          </a:p>
+        </p:txBody>
+      </p:sp>
+      <p:sp>
+        <p:nvSpPr>
+          <p:cNvPr id="30" name="Rounded Rectangle 29"/>
+          <p:cNvSpPr/>
+          <p:nvPr/>
+        </p:nvSpPr>
+        <p:spPr>
+          <a:xfrm>
+            <a:off x="4663440" y="2569464"/>
+            <a:ext cx="960120" cy="347472"/>
+          </a:xfrm>
+          <a:prstGeom prst="roundRect">
+            <a:avLst/>
+          </a:prstGeom>
+          <a:solidFill>
+            <a:srgbClr val="ECF0F1"/>
+          </a:solidFill>
+          <a:ln>
+            <a:noFill/>
+          </a:ln>
+          <a:effectLst/>
+        </p:spPr>
+        <p:style>
+          <a:lnRef idx="1">
+            <a:schemeClr val="accent1"/>
+          </a:lnRef>
+          <a:fillRef idx="3">
+            <a:schemeClr val="accent1"/>
+          </a:fillRef>
+          <a:effectRef idx="2">
+            <a:schemeClr val="accent1"/>
+          </a:effectRef>
+          <a:fontRef idx="minor">
+            <a:schemeClr val="lt1"/>
+          </a:fontRef>
+        </p:style>
+        <p:txBody>
+          <a:bodyPr rtlCol="0" anchor="ctr" wrap="square"/>
+          <a:lstStyle/>
+          <a:p>
+            <a:pPr algn="ctr"/>
+            <a:r>
+              <a:rPr sz="1000" b="0">
+                <a:solidFill>
+                  <a:srgbClr val="2C3E50"/>
+                </a:solidFill>
+              </a:rPr>
+              <a:t>720</a:t>
+            </a:r>
+          </a:p>
+        </p:txBody>
+      </p:sp>
+      <p:sp>
+        <p:nvSpPr>
+          <p:cNvPr id="31" name="Rounded Rectangle 30"/>
+          <p:cNvSpPr/>
+          <p:nvPr/>
+        </p:nvSpPr>
+        <p:spPr>
+          <a:xfrm>
+            <a:off x="5623560" y="2569464"/>
+            <a:ext cx="960120" cy="347472"/>
+          </a:xfrm>
+          <a:prstGeom prst="roundRect">
+            <a:avLst/>
+          </a:prstGeom>
+          <a:solidFill>
+            <a:srgbClr val="ECF0F1"/>
+          </a:solidFill>
+          <a:ln>
+            <a:noFill/>
+          </a:ln>
+          <a:effectLst/>
+        </p:spPr>
+        <p:style>
+          <a:lnRef idx="1">
+            <a:schemeClr val="accent1"/>
+          </a:lnRef>
+          <a:fillRef idx="3">
+            <a:schemeClr val="accent1"/>
+          </a:fillRef>
+          <a:effectRef idx="2">
+            <a:schemeClr val="accent1"/>
+          </a:effectRef>
+          <a:fontRef idx="minor">
+            <a:schemeClr val="lt1"/>
+          </a:fontRef>
+        </p:style>
+        <p:txBody>
+          <a:bodyPr rtlCol="0" anchor="ctr" wrap="square"/>
+          <a:lstStyle/>
+          <a:p>
+            <a:pPr algn="ctr"/>
+            <a:r>
+              <a:rPr sz="1000" b="0">
+                <a:solidFill>
+                  <a:srgbClr val="2C3E50"/>
+                </a:solidFill>
+              </a:rPr>
+              <a:t>15</a:t>
+            </a:r>
+          </a:p>
+        </p:txBody>
+      </p:sp>
+      <p:sp>
+        <p:nvSpPr>
+          <p:cNvPr id="32" name="Rounded Rectangle 31"/>
+          <p:cNvSpPr/>
+          <p:nvPr/>
+        </p:nvSpPr>
+        <p:spPr>
+          <a:xfrm>
+            <a:off x="6583680" y="2569464"/>
+            <a:ext cx="777240" cy="347472"/>
+          </a:xfrm>
+          <a:prstGeom prst="roundRect">
+            <a:avLst/>
+          </a:prstGeom>
+          <a:solidFill>
+            <a:srgbClr val="27AE60"/>
+          </a:solidFill>
+          <a:ln>
+            <a:noFill/>
+          </a:ln>
+          <a:effectLst/>
+        </p:spPr>
+        <p:style>
+          <a:lnRef idx="1">
+            <a:schemeClr val="accent1"/>
+          </a:lnRef>
+          <a:fillRef idx="3">
+            <a:schemeClr val="accent1"/>
+          </a:fillRef>
+          <a:effectRef idx="2">
+            <a:schemeClr val="accent1"/>
+          </a:effectRef>
+          <a:fontRef idx="minor">
+            <a:schemeClr val="lt1"/>
+          </a:fontRef>
+        </p:style>
+        <p:txBody>
+          <a:bodyPr rtlCol="0" anchor="ctr" wrap="square"/>
+          <a:lstStyle/>
+          <a:p>
+            <a:pPr algn="ctr"/>
+            <a:r>
+              <a:rPr sz="1000" b="0">
+                <a:solidFill>
+                  <a:srgbClr val="FFFFFF"/>
+                </a:solidFill>
+              </a:rPr>
+              <a:t>98%</a:t>
+            </a:r>
+          </a:p>
+        </p:txBody>
+      </p:sp>
+      <p:sp>
+        <p:nvSpPr>
+          <p:cNvPr id="33" name="Rounded Rectangle 32"/>
+          <p:cNvSpPr/>
+          <p:nvPr/>
+        </p:nvSpPr>
+        <p:spPr>
+          <a:xfrm>
+            <a:off x="274320" y="2953512"/>
+            <a:ext cx="2194560" cy="347472"/>
+          </a:xfrm>
+          <a:prstGeom prst="roundRect">
+            <a:avLst/>
+          </a:prstGeom>
+          <a:solidFill>
+            <a:srgbClr val="FFFFFF"/>
+          </a:solidFill>
+          <a:ln>
+            <a:noFill/>
+          </a:ln>
+          <a:effectLst/>
+        </p:spPr>
+        <p:style>
+          <a:lnRef idx="1">
+            <a:schemeClr val="accent1"/>
+          </a:lnRef>
+          <a:fillRef idx="3">
+            <a:schemeClr val="accent1"/>
+          </a:fillRef>
+          <a:effectRef idx="2">
+            <a:schemeClr val="accent1"/>
+          </a:effectRef>
+          <a:fontRef idx="minor">
+            <a:schemeClr val="lt1"/>
+          </a:fontRef>
+        </p:style>
+        <p:txBody>
+          <a:bodyPr rtlCol="0" anchor="ctr" wrap="square"/>
+          <a:lstStyle/>
+          <a:p>
+            <a:pPr algn="l"/>
+            <a:r>
+              <a:rPr sz="1000" b="0">
+                <a:solidFill>
+                  <a:srgbClr val="2C3E50"/>
+                </a:solidFill>
+              </a:rPr>
+              <a:t>Mapping → PySpark Notebook</a:t>
+            </a:r>
+          </a:p>
+        </p:txBody>
+      </p:sp>
+      <p:sp>
+        <p:nvSpPr>
+          <p:cNvPr id="34" name="Rounded Rectangle 33"/>
+          <p:cNvSpPr/>
+          <p:nvPr/>
+        </p:nvSpPr>
+        <p:spPr>
+          <a:xfrm>
+            <a:off x="2468880" y="2953512"/>
+            <a:ext cx="822960" cy="347472"/>
+          </a:xfrm>
+          <a:prstGeom prst="roundRect">
+            <a:avLst/>
+          </a:prstGeom>
+          <a:solidFill>
+            <a:srgbClr val="FFFFFF"/>
+          </a:solidFill>
+          <a:ln>
+            <a:noFill/>
+          </a:ln>
+          <a:effectLst/>
+        </p:spPr>
+        <p:style>
+          <a:lnRef idx="1">
+            <a:schemeClr val="accent1"/>
+          </a:lnRef>
+          <a:fillRef idx="3">
+            <a:schemeClr val="accent1"/>
+          </a:fillRef>
+          <a:effectRef idx="2">
+            <a:schemeClr val="accent1"/>
+          </a:effectRef>
+          <a:fontRef idx="minor">
+            <a:schemeClr val="lt1"/>
+          </a:fontRef>
+        </p:style>
+        <p:txBody>
+          <a:bodyPr rtlCol="0" anchor="ctr" wrap="square"/>
+          <a:lstStyle/>
+          <a:p>
+            <a:pPr algn="ctr"/>
+            <a:r>
+              <a:rPr sz="1000" b="0">
+                <a:solidFill>
+                  <a:srgbClr val="2C3E50"/>
+                </a:solidFill>
+              </a:rPr>
+              <a:t>16</a:t>
+            </a:r>
+          </a:p>
+        </p:txBody>
+      </p:sp>
+      <p:sp>
+        <p:nvSpPr>
+          <p:cNvPr id="35" name="Rounded Rectangle 34"/>
+          <p:cNvSpPr/>
+          <p:nvPr/>
+        </p:nvSpPr>
+        <p:spPr>
+          <a:xfrm>
+            <a:off x="3291840" y="2953512"/>
+            <a:ext cx="822960" cy="347472"/>
+          </a:xfrm>
+          <a:prstGeom prst="roundRect">
+            <a:avLst/>
+          </a:prstGeom>
+          <a:solidFill>
+            <a:srgbClr val="FFFFFF"/>
+          </a:solidFill>
+          <a:ln>
+            <a:noFill/>
+          </a:ln>
+          <a:effectLst/>
+        </p:spPr>
+        <p:style>
+          <a:lnRef idx="1">
+            <a:schemeClr val="accent1"/>
+          </a:lnRef>
+          <a:fillRef idx="3">
+            <a:schemeClr val="accent1"/>
+          </a:fillRef>
+          <a:effectRef idx="2">
+            <a:schemeClr val="accent1"/>
+          </a:effectRef>
+          <a:fontRef idx="minor">
+            <a:schemeClr val="lt1"/>
+          </a:fontRef>
+        </p:style>
+        <p:txBody>
+          <a:bodyPr rtlCol="0" anchor="ctr" wrap="square"/>
+          <a:lstStyle/>
+          <a:p>
+            <a:pPr algn="ctr"/>
+            <a:r>
+              <a:rPr sz="1000" b="0">
+                <a:solidFill>
+                  <a:srgbClr val="2C3E50"/>
+                </a:solidFill>
+              </a:rPr>
+              <a:t>0.2</a:t>
+            </a:r>
+          </a:p>
+        </p:txBody>
+      </p:sp>
+      <p:sp>
+        <p:nvSpPr>
+          <p:cNvPr id="36" name="Rounded Rectangle 35"/>
+          <p:cNvSpPr/>
+          <p:nvPr/>
+        </p:nvSpPr>
+        <p:spPr>
+          <a:xfrm>
+            <a:off x="4114800" y="2953512"/>
+            <a:ext cx="548640" cy="347472"/>
+          </a:xfrm>
+          <a:prstGeom prst="roundRect">
+            <a:avLst/>
+          </a:prstGeom>
+          <a:solidFill>
+            <a:srgbClr val="FFFFFF"/>
+          </a:solidFill>
+          <a:ln>
+            <a:noFill/>
+          </a:ln>
+          <a:effectLst/>
+        </p:spPr>
+        <p:style>
+          <a:lnRef idx="1">
+            <a:schemeClr val="accent1"/>
+          </a:lnRef>
+          <a:fillRef idx="3">
+            <a:schemeClr val="accent1"/>
+          </a:fillRef>
+          <a:effectRef idx="2">
+            <a:schemeClr val="accent1"/>
+          </a:effectRef>
+          <a:fontRef idx="minor">
+            <a:schemeClr val="lt1"/>
+          </a:fontRef>
+        </p:style>
+        <p:txBody>
+          <a:bodyPr rtlCol="0" anchor="ctr" wrap="square"/>
+          <a:lstStyle/>
+          <a:p>
+            <a:pPr algn="ctr"/>
+            <a:r>
+              <a:rPr sz="1000" b="0">
+                <a:solidFill>
+                  <a:srgbClr val="2C3E50"/>
+                </a:solidFill>
+              </a:rPr>
+              <a:t>200</a:t>
+            </a:r>
+          </a:p>
+        </p:txBody>
+      </p:sp>
+      <p:sp>
+        <p:nvSpPr>
+          <p:cNvPr id="37" name="Rounded Rectangle 36"/>
+          <p:cNvSpPr/>
+          <p:nvPr/>
+        </p:nvSpPr>
+        <p:spPr>
+          <a:xfrm>
+            <a:off x="4663440" y="2953512"/>
+            <a:ext cx="960120" cy="347472"/>
+          </a:xfrm>
+          <a:prstGeom prst="roundRect">
+            <a:avLst/>
+          </a:prstGeom>
+          <a:solidFill>
+            <a:srgbClr val="FFFFFF"/>
+          </a:solidFill>
+          <a:ln>
+            <a:noFill/>
+          </a:ln>
+          <a:effectLst/>
+        </p:spPr>
+        <p:style>
+          <a:lnRef idx="1">
+            <a:schemeClr val="accent1"/>
+          </a:lnRef>
+          <a:fillRef idx="3">
+            <a:schemeClr val="accent1"/>
+          </a:fillRef>
+          <a:effectRef idx="2">
+            <a:schemeClr val="accent1"/>
+          </a:effectRef>
+          <a:fontRef idx="minor">
+            <a:schemeClr val="lt1"/>
+          </a:fontRef>
+        </p:style>
+        <p:txBody>
+          <a:bodyPr rtlCol="0" anchor="ctr" wrap="square"/>
+          <a:lstStyle/>
+          <a:p>
+            <a:pPr algn="ctr"/>
+            <a:r>
+              <a:rPr sz="1000" b="0">
+                <a:solidFill>
+                  <a:srgbClr val="2C3E50"/>
+                </a:solidFill>
+              </a:rPr>
+              <a:t>3,200</a:t>
+            </a:r>
+          </a:p>
+        </p:txBody>
+      </p:sp>
+      <p:sp>
+        <p:nvSpPr>
+          <p:cNvPr id="38" name="Rounded Rectangle 37"/>
+          <p:cNvSpPr/>
+          <p:nvPr/>
+        </p:nvSpPr>
+        <p:spPr>
+          <a:xfrm>
+            <a:off x="5623560" y="2953512"/>
+            <a:ext cx="960120" cy="347472"/>
+          </a:xfrm>
+          <a:prstGeom prst="roundRect">
+            <a:avLst/>
+          </a:prstGeom>
+          <a:solidFill>
+            <a:srgbClr val="FFFFFF"/>
+          </a:solidFill>
+          <a:ln>
+            <a:noFill/>
+          </a:ln>
+          <a:effectLst/>
+        </p:spPr>
+        <p:style>
+          <a:lnRef idx="1">
+            <a:schemeClr val="accent1"/>
+          </a:lnRef>
+          <a:fillRef idx="3">
+            <a:schemeClr val="accent1"/>
+          </a:fillRef>
+          <a:effectRef idx="2">
+            <a:schemeClr val="accent1"/>
+          </a:effectRef>
+          <a:fontRef idx="minor">
+            <a:schemeClr val="lt1"/>
+          </a:fontRef>
+        </p:style>
+        <p:txBody>
+          <a:bodyPr rtlCol="0" anchor="ctr" wrap="square"/>
+          <a:lstStyle/>
+          <a:p>
+            <a:pPr algn="ctr"/>
+            <a:r>
+              <a:rPr sz="1000" b="0">
+                <a:solidFill>
+                  <a:srgbClr val="2C3E50"/>
+                </a:solidFill>
+              </a:rPr>
+              <a:t>40</a:t>
+            </a:r>
+          </a:p>
+        </p:txBody>
+      </p:sp>
+      <p:sp>
+        <p:nvSpPr>
+          <p:cNvPr id="39" name="Rounded Rectangle 38"/>
+          <p:cNvSpPr/>
+          <p:nvPr/>
+        </p:nvSpPr>
+        <p:spPr>
+          <a:xfrm>
+            <a:off x="6583680" y="2953512"/>
+            <a:ext cx="777240" cy="347472"/>
+          </a:xfrm>
+          <a:prstGeom prst="roundRect">
+            <a:avLst/>
+          </a:prstGeom>
+          <a:solidFill>
+            <a:srgbClr val="27AE60"/>
+          </a:solidFill>
+          <a:ln>
+            <a:noFill/>
+          </a:ln>
+          <a:effectLst/>
+        </p:spPr>
+        <p:style>
+          <a:lnRef idx="1">
+            <a:schemeClr val="accent1"/>
+          </a:lnRef>
+          <a:fillRef idx="3">
+            <a:schemeClr val="accent1"/>
+          </a:fillRef>
+          <a:effectRef idx="2">
+            <a:schemeClr val="accent1"/>
+          </a:effectRef>
+          <a:fontRef idx="minor">
+            <a:schemeClr val="lt1"/>
+          </a:fontRef>
+        </p:style>
+        <p:txBody>
+          <a:bodyPr rtlCol="0" anchor="ctr" wrap="square"/>
+          <a:lstStyle/>
+          <a:p>
+            <a:pPr algn="ctr"/>
+            <a:r>
+              <a:rPr sz="1000" b="0">
+                <a:solidFill>
+                  <a:srgbClr val="FFFFFF"/>
+                </a:solidFill>
+              </a:rPr>
+              <a:t>99%</a:t>
+            </a:r>
+          </a:p>
+        </p:txBody>
+      </p:sp>
+      <p:sp>
+        <p:nvSpPr>
+          <p:cNvPr id="40" name="Rounded Rectangle 39"/>
+          <p:cNvSpPr/>
+          <p:nvPr/>
+        </p:nvSpPr>
+        <p:spPr>
+          <a:xfrm>
+            <a:off x="274320" y="3337560"/>
+            <a:ext cx="2194560" cy="347472"/>
+          </a:xfrm>
+          <a:prstGeom prst="roundRect">
+            <a:avLst/>
+          </a:prstGeom>
+          <a:solidFill>
+            <a:srgbClr val="ECF0F1"/>
+          </a:solidFill>
+          <a:ln>
+            <a:noFill/>
+          </a:ln>
+          <a:effectLst/>
+        </p:spPr>
+        <p:style>
+          <a:lnRef idx="1">
+            <a:schemeClr val="accent1"/>
+          </a:lnRef>
+          <a:fillRef idx="3">
+            <a:schemeClr val="accent1"/>
+          </a:fillRef>
+          <a:effectRef idx="2">
+            <a:schemeClr val="accent1"/>
+          </a:effectRef>
+          <a:fontRef idx="minor">
+            <a:schemeClr val="lt1"/>
+          </a:fontRef>
+        </p:style>
+        <p:txBody>
+          <a:bodyPr rtlCol="0" anchor="ctr" wrap="square"/>
+          <a:lstStyle/>
+          <a:p>
+            <a:pPr algn="l"/>
+            <a:r>
+              <a:rPr sz="1000" b="0">
+                <a:solidFill>
+                  <a:srgbClr val="2C3E50"/>
+                </a:solidFill>
+              </a:rPr>
+              <a:t>Mapping → DBT Model</a:t>
+            </a:r>
+          </a:p>
+        </p:txBody>
+      </p:sp>
+      <p:sp>
+        <p:nvSpPr>
+          <p:cNvPr id="41" name="Rounded Rectangle 40"/>
+          <p:cNvSpPr/>
+          <p:nvPr/>
+        </p:nvSpPr>
+        <p:spPr>
+          <a:xfrm>
+            <a:off x="2468880" y="3337560"/>
+            <a:ext cx="822960" cy="347472"/>
+          </a:xfrm>
+          <a:prstGeom prst="roundRect">
+            <a:avLst/>
+          </a:prstGeom>
+          <a:solidFill>
+            <a:srgbClr val="ECF0F1"/>
+          </a:solidFill>
+          <a:ln>
+            <a:noFill/>
+          </a:ln>
+          <a:effectLst/>
+        </p:spPr>
+        <p:style>
+          <a:lnRef idx="1">
+            <a:schemeClr val="accent1"/>
+          </a:lnRef>
+          <a:fillRef idx="3">
+            <a:schemeClr val="accent1"/>
+          </a:fillRef>
+          <a:effectRef idx="2">
+            <a:schemeClr val="accent1"/>
+          </a:effectRef>
+          <a:fontRef idx="minor">
+            <a:schemeClr val="lt1"/>
+          </a:fontRef>
+        </p:style>
+        <p:txBody>
+          <a:bodyPr rtlCol="0" anchor="ctr" wrap="square"/>
+          <a:lstStyle/>
+          <a:p>
+            <a:pPr algn="ctr"/>
+            <a:r>
+              <a:rPr sz="1000" b="0">
+                <a:solidFill>
+                  <a:srgbClr val="2C3E50"/>
+                </a:solidFill>
+              </a:rPr>
+              <a:t>10</a:t>
+            </a:r>
+          </a:p>
+        </p:txBody>
+      </p:sp>
+      <p:sp>
+        <p:nvSpPr>
+          <p:cNvPr id="42" name="Rounded Rectangle 41"/>
+          <p:cNvSpPr/>
+          <p:nvPr/>
+        </p:nvSpPr>
+        <p:spPr>
+          <a:xfrm>
+            <a:off x="3291840" y="3337560"/>
+            <a:ext cx="822960" cy="347472"/>
+          </a:xfrm>
+          <a:prstGeom prst="roundRect">
+            <a:avLst/>
+          </a:prstGeom>
+          <a:solidFill>
+            <a:srgbClr val="ECF0F1"/>
+          </a:solidFill>
+          <a:ln>
+            <a:noFill/>
+          </a:ln>
+          <a:effectLst/>
+        </p:spPr>
+        <p:style>
+          <a:lnRef idx="1">
+            <a:schemeClr val="accent1"/>
+          </a:lnRef>
+          <a:fillRef idx="3">
+            <a:schemeClr val="accent1"/>
+          </a:fillRef>
+          <a:effectRef idx="2">
+            <a:schemeClr val="accent1"/>
+          </a:effectRef>
+          <a:fontRef idx="minor">
+            <a:schemeClr val="lt1"/>
+          </a:fontRef>
+        </p:style>
+        <p:txBody>
+          <a:bodyPr rtlCol="0" anchor="ctr" wrap="square"/>
+          <a:lstStyle/>
+          <a:p>
+            <a:pPr algn="ctr"/>
+            <a:r>
+              <a:rPr sz="1000" b="0">
+                <a:solidFill>
+                  <a:srgbClr val="2C3E50"/>
+                </a:solidFill>
+              </a:rPr>
+              <a:t>0.1</a:t>
+            </a:r>
+          </a:p>
+        </p:txBody>
+      </p:sp>
+      <p:sp>
+        <p:nvSpPr>
+          <p:cNvPr id="43" name="Rounded Rectangle 42"/>
+          <p:cNvSpPr/>
+          <p:nvPr/>
+        </p:nvSpPr>
+        <p:spPr>
+          <a:xfrm>
+            <a:off x="4114800" y="3337560"/>
+            <a:ext cx="548640" cy="347472"/>
+          </a:xfrm>
+          <a:prstGeom prst="roundRect">
+            <a:avLst/>
+          </a:prstGeom>
+          <a:solidFill>
+            <a:srgbClr val="ECF0F1"/>
+          </a:solidFill>
+          <a:ln>
+            <a:noFill/>
+          </a:ln>
+          <a:effectLst/>
+        </p:spPr>
+        <p:style>
+          <a:lnRef idx="1">
+            <a:schemeClr val="accent1"/>
+          </a:lnRef>
+          <a:fillRef idx="3">
+            <a:schemeClr val="accent1"/>
+          </a:fillRef>
+          <a:effectRef idx="2">
+            <a:schemeClr val="accent1"/>
+          </a:effectRef>
+          <a:fontRef idx="minor">
+            <a:schemeClr val="lt1"/>
+          </a:fontRef>
+        </p:style>
+        <p:txBody>
+          <a:bodyPr rtlCol="0" anchor="ctr" wrap="square"/>
+          <a:lstStyle/>
+          <a:p>
+            <a:pPr algn="ctr"/>
+            <a:r>
+              <a:rPr sz="1000" b="0">
+                <a:solidFill>
+                  <a:srgbClr val="2C3E50"/>
+                </a:solidFill>
+              </a:rPr>
+              <a:t>80</a:t>
+            </a:r>
+          </a:p>
+        </p:txBody>
+      </p:sp>
+      <p:sp>
+        <p:nvSpPr>
+          <p:cNvPr id="44" name="Rounded Rectangle 43"/>
+          <p:cNvSpPr/>
+          <p:nvPr/>
+        </p:nvSpPr>
+        <p:spPr>
+          <a:xfrm>
+            <a:off x="4663440" y="3337560"/>
+            <a:ext cx="960120" cy="347472"/>
+          </a:xfrm>
+          <a:prstGeom prst="roundRect">
+            <a:avLst/>
+          </a:prstGeom>
+          <a:solidFill>
+            <a:srgbClr val="ECF0F1"/>
+          </a:solidFill>
+          <a:ln>
+            <a:noFill/>
+          </a:ln>
+          <a:effectLst/>
+        </p:spPr>
+        <p:style>
+          <a:lnRef idx="1">
+            <a:schemeClr val="accent1"/>
+          </a:lnRef>
+          <a:fillRef idx="3">
+            <a:schemeClr val="accent1"/>
+          </a:fillRef>
+          <a:effectRef idx="2">
+            <a:schemeClr val="accent1"/>
+          </a:effectRef>
+          <a:fontRef idx="minor">
+            <a:schemeClr val="lt1"/>
+          </a:fontRef>
+        </p:style>
+        <p:txBody>
+          <a:bodyPr rtlCol="0" anchor="ctr" wrap="square"/>
+          <a:lstStyle/>
+          <a:p>
+            <a:pPr algn="ctr"/>
+            <a:r>
+              <a:rPr sz="1000" b="0">
+                <a:solidFill>
+                  <a:srgbClr val="2C3E50"/>
+                </a:solidFill>
+              </a:rPr>
+              <a:t>800</a:t>
+            </a:r>
+          </a:p>
+        </p:txBody>
+      </p:sp>
+      <p:sp>
+        <p:nvSpPr>
+          <p:cNvPr id="45" name="Rounded Rectangle 44"/>
+          <p:cNvSpPr/>
+          <p:nvPr/>
+        </p:nvSpPr>
+        <p:spPr>
+          <a:xfrm>
+            <a:off x="5623560" y="3337560"/>
+            <a:ext cx="960120" cy="347472"/>
+          </a:xfrm>
+          <a:prstGeom prst="roundRect">
+            <a:avLst/>
+          </a:prstGeom>
+          <a:solidFill>
+            <a:srgbClr val="ECF0F1"/>
+          </a:solidFill>
+          <a:ln>
+            <a:noFill/>
+          </a:ln>
+          <a:effectLst/>
+        </p:spPr>
+        <p:style>
+          <a:lnRef idx="1">
+            <a:schemeClr val="accent1"/>
+          </a:lnRef>
+          <a:fillRef idx="3">
+            <a:schemeClr val="accent1"/>
+          </a:fillRef>
+          <a:effectRef idx="2">
+            <a:schemeClr val="accent1"/>
+          </a:effectRef>
+          <a:fontRef idx="minor">
+            <a:schemeClr val="lt1"/>
+          </a:fontRef>
+        </p:style>
+        <p:txBody>
+          <a:bodyPr rtlCol="0" anchor="ctr" wrap="square"/>
+          <a:lstStyle/>
+          <a:p>
+            <a:pPr algn="ctr"/>
+            <a:r>
+              <a:rPr sz="1000" b="0">
+                <a:solidFill>
+                  <a:srgbClr val="2C3E50"/>
+                </a:solidFill>
+              </a:rPr>
+              <a:t>8</a:t>
+            </a:r>
+          </a:p>
+        </p:txBody>
+      </p:sp>
+      <p:sp>
+        <p:nvSpPr>
+          <p:cNvPr id="46" name="Rounded Rectangle 45"/>
+          <p:cNvSpPr/>
+          <p:nvPr/>
+        </p:nvSpPr>
+        <p:spPr>
+          <a:xfrm>
+            <a:off x="6583680" y="3337560"/>
+            <a:ext cx="777240" cy="347472"/>
+          </a:xfrm>
+          <a:prstGeom prst="roundRect">
+            <a:avLst/>
+          </a:prstGeom>
+          <a:solidFill>
+            <a:srgbClr val="27AE60"/>
+          </a:solidFill>
+          <a:ln>
+            <a:noFill/>
+          </a:ln>
+          <a:effectLst/>
+        </p:spPr>
+        <p:style>
+          <a:lnRef idx="1">
+            <a:schemeClr val="accent1"/>
+          </a:lnRef>
+          <a:fillRef idx="3">
+            <a:schemeClr val="accent1"/>
+          </a:fillRef>
+          <a:effectRef idx="2">
+            <a:schemeClr val="accent1"/>
+          </a:effectRef>
+          <a:fontRef idx="minor">
+            <a:schemeClr val="lt1"/>
+          </a:fontRef>
+        </p:style>
+        <p:txBody>
+          <a:bodyPr rtlCol="0" anchor="ctr" wrap="square"/>
+          <a:lstStyle/>
+          <a:p>
+            <a:pPr algn="ctr"/>
+            <a:r>
+              <a:rPr sz="1000" b="0">
+                <a:solidFill>
+                  <a:srgbClr val="FFFFFF"/>
+                </a:solidFill>
+              </a:rPr>
+              <a:t>99%</a:t>
+            </a:r>
+          </a:p>
+        </p:txBody>
+      </p:sp>
+      <p:sp>
+        <p:nvSpPr>
+          <p:cNvPr id="47" name="Rounded Rectangle 46"/>
+          <p:cNvSpPr/>
+          <p:nvPr/>
+        </p:nvSpPr>
+        <p:spPr>
+          <a:xfrm>
+            <a:off x="274320" y="3721608"/>
+            <a:ext cx="2194560" cy="347472"/>
+          </a:xfrm>
+          <a:prstGeom prst="roundRect">
+            <a:avLst/>
+          </a:prstGeom>
+          <a:solidFill>
+            <a:srgbClr val="FFFFFF"/>
+          </a:solidFill>
+          <a:ln>
+            <a:noFill/>
+          </a:ln>
+          <a:effectLst/>
+        </p:spPr>
+        <p:style>
+          <a:lnRef idx="1">
+            <a:schemeClr val="accent1"/>
+          </a:lnRef>
+          <a:fillRef idx="3">
+            <a:schemeClr val="accent1"/>
+          </a:fillRef>
+          <a:effectRef idx="2">
+            <a:schemeClr val="accent1"/>
+          </a:effectRef>
+          <a:fontRef idx="minor">
+            <a:schemeClr val="lt1"/>
+          </a:fontRef>
+        </p:style>
+        <p:txBody>
+          <a:bodyPr rtlCol="0" anchor="ctr" wrap="square"/>
+          <a:lstStyle/>
+          <a:p>
+            <a:pPr algn="l"/>
+            <a:r>
+              <a:rPr sz="1000" b="0">
+                <a:solidFill>
+                  <a:srgbClr val="2C3E50"/>
+                </a:solidFill>
+              </a:rPr>
+              <a:t>Workflow → Pipeline JSON</a:t>
+            </a:r>
+          </a:p>
+        </p:txBody>
+      </p:sp>
+      <p:sp>
+        <p:nvSpPr>
+          <p:cNvPr id="48" name="Rounded Rectangle 47"/>
+          <p:cNvSpPr/>
+          <p:nvPr/>
+        </p:nvSpPr>
+        <p:spPr>
+          <a:xfrm>
+            <a:off x="2468880" y="3721608"/>
+            <a:ext cx="822960" cy="347472"/>
+          </a:xfrm>
+          <a:prstGeom prst="roundRect">
+            <a:avLst/>
+          </a:prstGeom>
+          <a:solidFill>
+            <a:srgbClr val="FFFFFF"/>
+          </a:solidFill>
+          <a:ln>
+            <a:noFill/>
+          </a:ln>
+          <a:effectLst/>
+        </p:spPr>
+        <p:style>
+          <a:lnRef idx="1">
+            <a:schemeClr val="accent1"/>
+          </a:lnRef>
+          <a:fillRef idx="3">
+            <a:schemeClr val="accent1"/>
+          </a:fillRef>
+          <a:effectRef idx="2">
+            <a:schemeClr val="accent1"/>
+          </a:effectRef>
+          <a:fontRef idx="minor">
+            <a:schemeClr val="lt1"/>
+          </a:fontRef>
+        </p:style>
+        <p:txBody>
+          <a:bodyPr rtlCol="0" anchor="ctr" wrap="square"/>
+          <a:lstStyle/>
+          <a:p>
+            <a:pPr algn="ctr"/>
+            <a:r>
+              <a:rPr sz="1000" b="0">
+                <a:solidFill>
+                  <a:srgbClr val="2C3E50"/>
+                </a:solidFill>
+              </a:rPr>
+              <a:t>12</a:t>
+            </a:r>
+          </a:p>
+        </p:txBody>
+      </p:sp>
+      <p:sp>
+        <p:nvSpPr>
+          <p:cNvPr id="49" name="Rounded Rectangle 48"/>
+          <p:cNvSpPr/>
+          <p:nvPr/>
+        </p:nvSpPr>
+        <p:spPr>
+          <a:xfrm>
+            <a:off x="3291840" y="3721608"/>
+            <a:ext cx="822960" cy="347472"/>
+          </a:xfrm>
+          <a:prstGeom prst="roundRect">
+            <a:avLst/>
+          </a:prstGeom>
+          <a:solidFill>
+            <a:srgbClr val="FFFFFF"/>
+          </a:solidFill>
+          <a:ln>
+            <a:noFill/>
+          </a:ln>
+          <a:effectLst/>
+        </p:spPr>
+        <p:style>
+          <a:lnRef idx="1">
+            <a:schemeClr val="accent1"/>
+          </a:lnRef>
+          <a:fillRef idx="3">
+            <a:schemeClr val="accent1"/>
+          </a:fillRef>
+          <a:effectRef idx="2">
+            <a:schemeClr val="accent1"/>
+          </a:effectRef>
+          <a:fontRef idx="minor">
+            <a:schemeClr val="lt1"/>
+          </a:fontRef>
+        </p:style>
+        <p:txBody>
+          <a:bodyPr rtlCol="0" anchor="ctr" wrap="square"/>
+          <a:lstStyle/>
+          <a:p>
+            <a:pPr algn="ctr"/>
+            <a:r>
+              <a:rPr sz="1000" b="0">
+                <a:solidFill>
+                  <a:srgbClr val="2C3E50"/>
+                </a:solidFill>
+              </a:rPr>
+              <a:t>0.2</a:t>
+            </a:r>
+          </a:p>
+        </p:txBody>
+      </p:sp>
+      <p:sp>
+        <p:nvSpPr>
+          <p:cNvPr id="50" name="Rounded Rectangle 49"/>
+          <p:cNvSpPr/>
+          <p:nvPr/>
+        </p:nvSpPr>
+        <p:spPr>
+          <a:xfrm>
+            <a:off x="4114800" y="3721608"/>
+            <a:ext cx="548640" cy="347472"/>
+          </a:xfrm>
+          <a:prstGeom prst="roundRect">
+            <a:avLst/>
+          </a:prstGeom>
+          <a:solidFill>
+            <a:srgbClr val="FFFFFF"/>
+          </a:solidFill>
+          <a:ln>
+            <a:noFill/>
+          </a:ln>
+          <a:effectLst/>
+        </p:spPr>
+        <p:style>
+          <a:lnRef idx="1">
+            <a:schemeClr val="accent1"/>
+          </a:lnRef>
+          <a:fillRef idx="3">
+            <a:schemeClr val="accent1"/>
+          </a:fillRef>
+          <a:effectRef idx="2">
+            <a:schemeClr val="accent1"/>
+          </a:effectRef>
+          <a:fontRef idx="minor">
+            <a:schemeClr val="lt1"/>
+          </a:fontRef>
+        </p:style>
+        <p:txBody>
+          <a:bodyPr rtlCol="0" anchor="ctr" wrap="square"/>
+          <a:lstStyle/>
+          <a:p>
+            <a:pPr algn="ctr"/>
+            <a:r>
+              <a:rPr sz="1000" b="0">
+                <a:solidFill>
+                  <a:srgbClr val="2C3E50"/>
+                </a:solidFill>
+              </a:rPr>
+              <a:t>50</a:t>
+            </a:r>
+          </a:p>
+        </p:txBody>
+      </p:sp>
+      <p:sp>
+        <p:nvSpPr>
+          <p:cNvPr id="51" name="Rounded Rectangle 50"/>
+          <p:cNvSpPr/>
+          <p:nvPr/>
+        </p:nvSpPr>
+        <p:spPr>
+          <a:xfrm>
+            <a:off x="4663440" y="3721608"/>
+            <a:ext cx="960120" cy="347472"/>
+          </a:xfrm>
+          <a:prstGeom prst="roundRect">
+            <a:avLst/>
+          </a:prstGeom>
+          <a:solidFill>
+            <a:srgbClr val="FFFFFF"/>
+          </a:solidFill>
+          <a:ln>
+            <a:noFill/>
+          </a:ln>
+          <a:effectLst/>
+        </p:spPr>
+        <p:style>
+          <a:lnRef idx="1">
+            <a:schemeClr val="accent1"/>
+          </a:lnRef>
+          <a:fillRef idx="3">
+            <a:schemeClr val="accent1"/>
+          </a:fillRef>
+          <a:effectRef idx="2">
+            <a:schemeClr val="accent1"/>
+          </a:effectRef>
+          <a:fontRef idx="minor">
+            <a:schemeClr val="lt1"/>
+          </a:fontRef>
+        </p:style>
+        <p:txBody>
+          <a:bodyPr rtlCol="0" anchor="ctr" wrap="square"/>
+          <a:lstStyle/>
+          <a:p>
+            <a:pPr algn="ctr"/>
+            <a:r>
+              <a:rPr sz="1000" b="0">
+                <a:solidFill>
+                  <a:srgbClr val="2C3E50"/>
+                </a:solidFill>
+              </a:rPr>
+              <a:t>600</a:t>
+            </a:r>
+          </a:p>
+        </p:txBody>
+      </p:sp>
+      <p:sp>
+        <p:nvSpPr>
+          <p:cNvPr id="52" name="Rounded Rectangle 51"/>
+          <p:cNvSpPr/>
+          <p:nvPr/>
+        </p:nvSpPr>
+        <p:spPr>
+          <a:xfrm>
+            <a:off x="5623560" y="3721608"/>
+            <a:ext cx="960120" cy="347472"/>
+          </a:xfrm>
+          <a:prstGeom prst="roundRect">
+            <a:avLst/>
+          </a:prstGeom>
+          <a:solidFill>
+            <a:srgbClr val="FFFFFF"/>
+          </a:solidFill>
+          <a:ln>
+            <a:noFill/>
+          </a:ln>
+          <a:effectLst/>
+        </p:spPr>
+        <p:style>
+          <a:lnRef idx="1">
+            <a:schemeClr val="accent1"/>
+          </a:lnRef>
+          <a:fillRef idx="3">
+            <a:schemeClr val="accent1"/>
+          </a:fillRef>
+          <a:effectRef idx="2">
+            <a:schemeClr val="accent1"/>
+          </a:effectRef>
+          <a:fontRef idx="minor">
+            <a:schemeClr val="lt1"/>
+          </a:fontRef>
+        </p:style>
+        <p:txBody>
+          <a:bodyPr rtlCol="0" anchor="ctr" wrap="square"/>
+          <a:lstStyle/>
+          <a:p>
+            <a:pPr algn="ctr"/>
+            <a:r>
+              <a:rPr sz="1000" b="0">
+                <a:solidFill>
+                  <a:srgbClr val="2C3E50"/>
+                </a:solidFill>
+              </a:rPr>
+              <a:t>10</a:t>
+            </a:r>
+          </a:p>
+        </p:txBody>
+      </p:sp>
+      <p:sp>
+        <p:nvSpPr>
+          <p:cNvPr id="53" name="Rounded Rectangle 52"/>
+          <p:cNvSpPr/>
+          <p:nvPr/>
+        </p:nvSpPr>
+        <p:spPr>
+          <a:xfrm>
+            <a:off x="6583680" y="3721608"/>
+            <a:ext cx="777240" cy="347472"/>
+          </a:xfrm>
+          <a:prstGeom prst="roundRect">
+            <a:avLst/>
+          </a:prstGeom>
+          <a:solidFill>
+            <a:srgbClr val="27AE60"/>
+          </a:solidFill>
+          <a:ln>
+            <a:noFill/>
+          </a:ln>
+          <a:effectLst/>
+        </p:spPr>
+        <p:style>
+          <a:lnRef idx="1">
+            <a:schemeClr val="accent1"/>
+          </a:lnRef>
+          <a:fillRef idx="3">
+            <a:schemeClr val="accent1"/>
+          </a:fillRef>
+          <a:effectRef idx="2">
+            <a:schemeClr val="accent1"/>
+          </a:effectRef>
+          <a:fontRef idx="minor">
+            <a:schemeClr val="lt1"/>
+          </a:fontRef>
+        </p:style>
+        <p:txBody>
+          <a:bodyPr rtlCol="0" anchor="ctr" wrap="square"/>
+          <a:lstStyle/>
+          <a:p>
+            <a:pPr algn="ctr"/>
+            <a:r>
+              <a:rPr sz="1000" b="0">
+                <a:solidFill>
+                  <a:srgbClr val="FFFFFF"/>
+                </a:solidFill>
+              </a:rPr>
+              <a:t>98%</a:t>
+            </a:r>
+          </a:p>
+        </p:txBody>
+      </p:sp>
+      <p:sp>
+        <p:nvSpPr>
+          <p:cNvPr id="54" name="Rounded Rectangle 53"/>
+          <p:cNvSpPr/>
+          <p:nvPr/>
+        </p:nvSpPr>
+        <p:spPr>
+          <a:xfrm>
+            <a:off x="274320" y="4105656"/>
+            <a:ext cx="2194560" cy="347472"/>
+          </a:xfrm>
+          <a:prstGeom prst="roundRect">
+            <a:avLst/>
+          </a:prstGeom>
+          <a:solidFill>
+            <a:srgbClr val="ECF0F1"/>
+          </a:solidFill>
+          <a:ln>
+            <a:noFill/>
+          </a:ln>
+          <a:effectLst/>
+        </p:spPr>
+        <p:style>
+          <a:lnRef idx="1">
+            <a:schemeClr val="accent1"/>
+          </a:lnRef>
+          <a:fillRef idx="3">
+            <a:schemeClr val="accent1"/>
+          </a:fillRef>
+          <a:effectRef idx="2">
+            <a:schemeClr val="accent1"/>
+          </a:effectRef>
+          <a:fontRef idx="minor">
+            <a:schemeClr val="lt1"/>
+          </a:fontRef>
+        </p:style>
+        <p:txBody>
+          <a:bodyPr rtlCol="0" anchor="ctr" wrap="square"/>
+          <a:lstStyle/>
+          <a:p>
+            <a:pPr algn="l"/>
+            <a:r>
+              <a:rPr sz="1000" b="0">
+                <a:solidFill>
+                  <a:srgbClr val="2C3E50"/>
+                </a:solidFill>
+              </a:rPr>
+              <a:t>AutoSys JIL → Pipeline</a:t>
+            </a:r>
+          </a:p>
+        </p:txBody>
+      </p:sp>
+      <p:sp>
+        <p:nvSpPr>
+          <p:cNvPr id="55" name="Rounded Rectangle 54"/>
+          <p:cNvSpPr/>
+          <p:nvPr/>
+        </p:nvSpPr>
+        <p:spPr>
+          <a:xfrm>
+            <a:off x="2468880" y="4105656"/>
+            <a:ext cx="822960" cy="347472"/>
+          </a:xfrm>
+          <a:prstGeom prst="roundRect">
+            <a:avLst/>
+          </a:prstGeom>
+          <a:solidFill>
+            <a:srgbClr val="ECF0F1"/>
+          </a:solidFill>
+          <a:ln>
+            <a:noFill/>
+          </a:ln>
+          <a:effectLst/>
+        </p:spPr>
+        <p:style>
+          <a:lnRef idx="1">
+            <a:schemeClr val="accent1"/>
+          </a:lnRef>
+          <a:fillRef idx="3">
+            <a:schemeClr val="accent1"/>
+          </a:fillRef>
+          <a:effectRef idx="2">
+            <a:schemeClr val="accent1"/>
+          </a:effectRef>
+          <a:fontRef idx="minor">
+            <a:schemeClr val="lt1"/>
+          </a:fontRef>
+        </p:style>
+        <p:txBody>
+          <a:bodyPr rtlCol="0" anchor="ctr" wrap="square"/>
+          <a:lstStyle/>
+          <a:p>
+            <a:pPr algn="ctr"/>
+            <a:r>
+              <a:rPr sz="1000" b="0">
+                <a:solidFill>
+                  <a:srgbClr val="2C3E50"/>
+                </a:solidFill>
+              </a:rPr>
+              <a:t>8</a:t>
+            </a:r>
+          </a:p>
+        </p:txBody>
+      </p:sp>
+      <p:sp>
+        <p:nvSpPr>
+          <p:cNvPr id="56" name="Rounded Rectangle 55"/>
+          <p:cNvSpPr/>
+          <p:nvPr/>
+        </p:nvSpPr>
+        <p:spPr>
+          <a:xfrm>
+            <a:off x="3291840" y="4105656"/>
+            <a:ext cx="822960" cy="347472"/>
+          </a:xfrm>
+          <a:prstGeom prst="roundRect">
+            <a:avLst/>
+          </a:prstGeom>
+          <a:solidFill>
+            <a:srgbClr val="ECF0F1"/>
+          </a:solidFill>
+          <a:ln>
+            <a:noFill/>
+          </a:ln>
+          <a:effectLst/>
+        </p:spPr>
+        <p:style>
+          <a:lnRef idx="1">
+            <a:schemeClr val="accent1"/>
+          </a:lnRef>
+          <a:fillRef idx="3">
+            <a:schemeClr val="accent1"/>
+          </a:fillRef>
+          <a:effectRef idx="2">
+            <a:schemeClr val="accent1"/>
+          </a:effectRef>
+          <a:fontRef idx="minor">
+            <a:schemeClr val="lt1"/>
+          </a:fontRef>
+        </p:style>
+        <p:txBody>
+          <a:bodyPr rtlCol="0" anchor="ctr" wrap="square"/>
+          <a:lstStyle/>
+          <a:p>
+            <a:pPr algn="ctr"/>
+            <a:r>
+              <a:rPr sz="1000" b="0">
+                <a:solidFill>
+                  <a:srgbClr val="2C3E50"/>
+                </a:solidFill>
+              </a:rPr>
+              <a:t>0.1</a:t>
+            </a:r>
+          </a:p>
+        </p:txBody>
+      </p:sp>
+      <p:sp>
+        <p:nvSpPr>
+          <p:cNvPr id="57" name="Rounded Rectangle 56"/>
+          <p:cNvSpPr/>
+          <p:nvPr/>
+        </p:nvSpPr>
+        <p:spPr>
+          <a:xfrm>
+            <a:off x="4114800" y="4105656"/>
+            <a:ext cx="548640" cy="347472"/>
+          </a:xfrm>
+          <a:prstGeom prst="roundRect">
+            <a:avLst/>
+          </a:prstGeom>
+          <a:solidFill>
+            <a:srgbClr val="ECF0F1"/>
+          </a:solidFill>
+          <a:ln>
+            <a:noFill/>
+          </a:ln>
+          <a:effectLst/>
+        </p:spPr>
+        <p:style>
+          <a:lnRef idx="1">
+            <a:schemeClr val="accent1"/>
+          </a:lnRef>
+          <a:fillRef idx="3">
+            <a:schemeClr val="accent1"/>
+          </a:fillRef>
+          <a:effectRef idx="2">
+            <a:schemeClr val="accent1"/>
+          </a:effectRef>
+          <a:fontRef idx="minor">
+            <a:schemeClr val="lt1"/>
+          </a:fontRef>
+        </p:style>
+        <p:txBody>
+          <a:bodyPr rtlCol="0" anchor="ctr" wrap="square"/>
+          <a:lstStyle/>
+          <a:p>
+            <a:pPr algn="ctr"/>
+            <a:r>
+              <a:rPr sz="1000" b="0">
+                <a:solidFill>
+                  <a:srgbClr val="2C3E50"/>
+                </a:solidFill>
+              </a:rPr>
+              <a:t>40</a:t>
+            </a:r>
+          </a:p>
+        </p:txBody>
+      </p:sp>
+      <p:sp>
+        <p:nvSpPr>
+          <p:cNvPr id="58" name="Rounded Rectangle 57"/>
+          <p:cNvSpPr/>
+          <p:nvPr/>
+        </p:nvSpPr>
+        <p:spPr>
+          <a:xfrm>
+            <a:off x="4663440" y="4105656"/>
+            <a:ext cx="960120" cy="347472"/>
+          </a:xfrm>
+          <a:prstGeom prst="roundRect">
+            <a:avLst/>
+          </a:prstGeom>
+          <a:solidFill>
+            <a:srgbClr val="ECF0F1"/>
+          </a:solidFill>
+          <a:ln>
+            <a:noFill/>
+          </a:ln>
+          <a:effectLst/>
+        </p:spPr>
+        <p:style>
+          <a:lnRef idx="1">
+            <a:schemeClr val="accent1"/>
+          </a:lnRef>
+          <a:fillRef idx="3">
+            <a:schemeClr val="accent1"/>
+          </a:fillRef>
+          <a:effectRef idx="2">
+            <a:schemeClr val="accent1"/>
+          </a:effectRef>
+          <a:fontRef idx="minor">
+            <a:schemeClr val="lt1"/>
+          </a:fontRef>
+        </p:style>
+        <p:txBody>
+          <a:bodyPr rtlCol="0" anchor="ctr" wrap="square"/>
+          <a:lstStyle/>
+          <a:p>
+            <a:pPr algn="ctr"/>
+            <a:r>
+              <a:rPr sz="1000" b="0">
+                <a:solidFill>
+                  <a:srgbClr val="2C3E50"/>
+                </a:solidFill>
+              </a:rPr>
+              <a:t>320</a:t>
+            </a:r>
+          </a:p>
+        </p:txBody>
+      </p:sp>
+      <p:sp>
+        <p:nvSpPr>
+          <p:cNvPr id="59" name="Rounded Rectangle 58"/>
+          <p:cNvSpPr/>
+          <p:nvPr/>
+        </p:nvSpPr>
+        <p:spPr>
+          <a:xfrm>
+            <a:off x="5623560" y="4105656"/>
+            <a:ext cx="960120" cy="347472"/>
+          </a:xfrm>
+          <a:prstGeom prst="roundRect">
+            <a:avLst/>
+          </a:prstGeom>
+          <a:solidFill>
+            <a:srgbClr val="ECF0F1"/>
+          </a:solidFill>
+          <a:ln>
+            <a:noFill/>
+          </a:ln>
+          <a:effectLst/>
+        </p:spPr>
+        <p:style>
+          <a:lnRef idx="1">
+            <a:schemeClr val="accent1"/>
+          </a:lnRef>
+          <a:fillRef idx="3">
+            <a:schemeClr val="accent1"/>
+          </a:fillRef>
+          <a:effectRef idx="2">
+            <a:schemeClr val="accent1"/>
+          </a:effectRef>
+          <a:fontRef idx="minor">
+            <a:schemeClr val="lt1"/>
+          </a:fontRef>
+        </p:style>
+        <p:txBody>
+          <a:bodyPr rtlCol="0" anchor="ctr" wrap="square"/>
+          <a:lstStyle/>
+          <a:p>
+            <a:pPr algn="ctr"/>
+            <a:r>
+              <a:rPr sz="1000" b="0">
+                <a:solidFill>
+                  <a:srgbClr val="2C3E50"/>
+                </a:solidFill>
+              </a:rPr>
+              <a:t>4</a:t>
+            </a:r>
+          </a:p>
+        </p:txBody>
+      </p:sp>
+      <p:sp>
+        <p:nvSpPr>
+          <p:cNvPr id="60" name="Rounded Rectangle 59"/>
+          <p:cNvSpPr/>
+          <p:nvPr/>
+        </p:nvSpPr>
+        <p:spPr>
+          <a:xfrm>
+            <a:off x="6583680" y="4105656"/>
+            <a:ext cx="777240" cy="347472"/>
+          </a:xfrm>
+          <a:prstGeom prst="roundRect">
+            <a:avLst/>
+          </a:prstGeom>
+          <a:solidFill>
+            <a:srgbClr val="27AE60"/>
+          </a:solidFill>
+          <a:ln>
+            <a:noFill/>
+          </a:ln>
+          <a:effectLst/>
+        </p:spPr>
+        <p:style>
+          <a:lnRef idx="1">
+            <a:schemeClr val="accent1"/>
+          </a:lnRef>
+          <a:fillRef idx="3">
+            <a:schemeClr val="accent1"/>
+          </a:fillRef>
+          <a:effectRef idx="2">
+            <a:schemeClr val="accent1"/>
+          </a:effectRef>
+          <a:fontRef idx="minor">
+            <a:schemeClr val="lt1"/>
+          </a:fontRef>
+        </p:style>
+        <p:txBody>
+          <a:bodyPr rtlCol="0" anchor="ctr" wrap="square"/>
+          <a:lstStyle/>
+          <a:p>
+            <a:pPr algn="ctr"/>
+            <a:r>
+              <a:rPr sz="1000" b="0">
+                <a:solidFill>
+                  <a:srgbClr val="FFFFFF"/>
+                </a:solidFill>
+              </a:rPr>
+              <a:t>99%</a:t>
+            </a:r>
+          </a:p>
+        </p:txBody>
+      </p:sp>
+      <p:sp>
+        <p:nvSpPr>
+          <p:cNvPr id="61" name="Rounded Rectangle 60"/>
+          <p:cNvSpPr/>
+          <p:nvPr/>
+        </p:nvSpPr>
+        <p:spPr>
+          <a:xfrm>
+            <a:off x="274320" y="4489704"/>
+            <a:ext cx="2194560" cy="347472"/>
+          </a:xfrm>
+          <a:prstGeom prst="roundRect">
+            <a:avLst/>
+          </a:prstGeom>
+          <a:solidFill>
+            <a:srgbClr val="FFFFFF"/>
+          </a:solidFill>
+          <a:ln>
+            <a:noFill/>
+          </a:ln>
+          <a:effectLst/>
+        </p:spPr>
+        <p:style>
+          <a:lnRef idx="1">
+            <a:schemeClr val="accent1"/>
+          </a:lnRef>
+          <a:fillRef idx="3">
+            <a:schemeClr val="accent1"/>
+          </a:fillRef>
+          <a:effectRef idx="2">
+            <a:schemeClr val="accent1"/>
+          </a:effectRef>
+          <a:fontRef idx="minor">
+            <a:schemeClr val="lt1"/>
+          </a:fontRef>
+        </p:style>
+        <p:txBody>
+          <a:bodyPr rtlCol="0" anchor="ctr" wrap="square"/>
+          <a:lstStyle/>
+          <a:p>
+            <a:pPr algn="l"/>
+            <a:r>
+              <a:rPr sz="1000" b="0">
+                <a:solidFill>
+                  <a:srgbClr val="2C3E50"/>
+                </a:solidFill>
+              </a:rPr>
+              <a:t>Delta Lake Schema (DDL)</a:t>
+            </a:r>
+          </a:p>
+        </p:txBody>
+      </p:sp>
+      <p:sp>
+        <p:nvSpPr>
+          <p:cNvPr id="62" name="Rounded Rectangle 61"/>
+          <p:cNvSpPr/>
+          <p:nvPr/>
+        </p:nvSpPr>
+        <p:spPr>
+          <a:xfrm>
+            <a:off x="2468880" y="4489704"/>
+            <a:ext cx="822960" cy="347472"/>
+          </a:xfrm>
+          <a:prstGeom prst="roundRect">
+            <a:avLst/>
+          </a:prstGeom>
+          <a:solidFill>
+            <a:srgbClr val="FFFFFF"/>
+          </a:solidFill>
+          <a:ln>
+            <a:noFill/>
+          </a:ln>
+          <a:effectLst/>
+        </p:spPr>
+        <p:style>
+          <a:lnRef idx="1">
+            <a:schemeClr val="accent1"/>
+          </a:lnRef>
+          <a:fillRef idx="3">
+            <a:schemeClr val="accent1"/>
+          </a:fillRef>
+          <a:effectRef idx="2">
+            <a:schemeClr val="accent1"/>
+          </a:effectRef>
+          <a:fontRef idx="minor">
+            <a:schemeClr val="lt1"/>
+          </a:fontRef>
+        </p:style>
+        <p:txBody>
+          <a:bodyPr rtlCol="0" anchor="ctr" wrap="square"/>
+          <a:lstStyle/>
+          <a:p>
+            <a:pPr algn="ctr"/>
+            <a:r>
+              <a:rPr sz="1000" b="0">
+                <a:solidFill>
+                  <a:srgbClr val="2C3E50"/>
+                </a:solidFill>
+              </a:rPr>
+              <a:t>4</a:t>
+            </a:r>
+          </a:p>
+        </p:txBody>
+      </p:sp>
+      <p:sp>
+        <p:nvSpPr>
+          <p:cNvPr id="63" name="Rounded Rectangle 62"/>
+          <p:cNvSpPr/>
+          <p:nvPr/>
+        </p:nvSpPr>
+        <p:spPr>
+          <a:xfrm>
+            <a:off x="3291840" y="4489704"/>
+            <a:ext cx="822960" cy="347472"/>
+          </a:xfrm>
+          <a:prstGeom prst="roundRect">
+            <a:avLst/>
+          </a:prstGeom>
+          <a:solidFill>
+            <a:srgbClr val="FFFFFF"/>
+          </a:solidFill>
+          <a:ln>
+            <a:noFill/>
+          </a:ln>
+          <a:effectLst/>
+        </p:spPr>
+        <p:style>
+          <a:lnRef idx="1">
+            <a:schemeClr val="accent1"/>
+          </a:lnRef>
+          <a:fillRef idx="3">
+            <a:schemeClr val="accent1"/>
+          </a:fillRef>
+          <a:effectRef idx="2">
+            <a:schemeClr val="accent1"/>
+          </a:effectRef>
+          <a:fontRef idx="minor">
+            <a:schemeClr val="lt1"/>
+          </a:fontRef>
+        </p:style>
+        <p:txBody>
+          <a:bodyPr rtlCol="0" anchor="ctr" wrap="square"/>
+          <a:lstStyle/>
+          <a:p>
+            <a:pPr algn="ctr"/>
+            <a:r>
+              <a:rPr sz="1000" b="0">
+                <a:solidFill>
+                  <a:srgbClr val="2C3E50"/>
+                </a:solidFill>
+              </a:rPr>
+              <a:t>0.05</a:t>
+            </a:r>
+          </a:p>
+        </p:txBody>
+      </p:sp>
+      <p:sp>
+        <p:nvSpPr>
+          <p:cNvPr id="64" name="Rounded Rectangle 63"/>
+          <p:cNvSpPr/>
+          <p:nvPr/>
+        </p:nvSpPr>
+        <p:spPr>
+          <a:xfrm>
+            <a:off x="4114800" y="4489704"/>
+            <a:ext cx="548640" cy="347472"/>
+          </a:xfrm>
+          <a:prstGeom prst="roundRect">
+            <a:avLst/>
+          </a:prstGeom>
+          <a:solidFill>
+            <a:srgbClr val="FFFFFF"/>
+          </a:solidFill>
+          <a:ln>
+            <a:noFill/>
+          </a:ln>
+          <a:effectLst/>
+        </p:spPr>
+        <p:style>
+          <a:lnRef idx="1">
+            <a:schemeClr val="accent1"/>
+          </a:lnRef>
+          <a:fillRef idx="3">
+            <a:schemeClr val="accent1"/>
+          </a:fillRef>
+          <a:effectRef idx="2">
+            <a:schemeClr val="accent1"/>
+          </a:effectRef>
+          <a:fontRef idx="minor">
+            <a:schemeClr val="lt1"/>
+          </a:fontRef>
+        </p:style>
+        <p:txBody>
+          <a:bodyPr rtlCol="0" anchor="ctr" wrap="square"/>
+          <a:lstStyle/>
+          <a:p>
+            <a:pPr algn="ctr"/>
+            <a:r>
+              <a:rPr sz="1000" b="0">
+                <a:solidFill>
+                  <a:srgbClr val="2C3E50"/>
+                </a:solidFill>
+              </a:rPr>
+              <a:t>200</a:t>
+            </a:r>
+          </a:p>
+        </p:txBody>
+      </p:sp>
+      <p:sp>
+        <p:nvSpPr>
+          <p:cNvPr id="65" name="Rounded Rectangle 64"/>
+          <p:cNvSpPr/>
+          <p:nvPr/>
+        </p:nvSpPr>
+        <p:spPr>
+          <a:xfrm>
+            <a:off x="4663440" y="4489704"/>
+            <a:ext cx="960120" cy="347472"/>
+          </a:xfrm>
+          <a:prstGeom prst="roundRect">
+            <a:avLst/>
+          </a:prstGeom>
+          <a:solidFill>
+            <a:srgbClr val="FFFFFF"/>
+          </a:solidFill>
+          <a:ln>
+            <a:noFill/>
+          </a:ln>
+          <a:effectLst/>
+        </p:spPr>
+        <p:style>
+          <a:lnRef idx="1">
+            <a:schemeClr val="accent1"/>
+          </a:lnRef>
+          <a:fillRef idx="3">
+            <a:schemeClr val="accent1"/>
+          </a:fillRef>
+          <a:effectRef idx="2">
+            <a:schemeClr val="accent1"/>
+          </a:effectRef>
+          <a:fontRef idx="minor">
+            <a:schemeClr val="lt1"/>
+          </a:fontRef>
+        </p:style>
+        <p:txBody>
+          <a:bodyPr rtlCol="0" anchor="ctr" wrap="square"/>
+          <a:lstStyle/>
+          <a:p>
+            <a:pPr algn="ctr"/>
+            <a:r>
+              <a:rPr sz="1000" b="0">
+                <a:solidFill>
+                  <a:srgbClr val="2C3E50"/>
+                </a:solidFill>
+              </a:rPr>
+              <a:t>800</a:t>
+            </a:r>
+          </a:p>
+        </p:txBody>
+      </p:sp>
+      <p:sp>
+        <p:nvSpPr>
+          <p:cNvPr id="66" name="Rounded Rectangle 65"/>
+          <p:cNvSpPr/>
+          <p:nvPr/>
+        </p:nvSpPr>
+        <p:spPr>
+          <a:xfrm>
+            <a:off x="5623560" y="4489704"/>
+            <a:ext cx="960120" cy="347472"/>
+          </a:xfrm>
+          <a:prstGeom prst="roundRect">
+            <a:avLst/>
+          </a:prstGeom>
+          <a:solidFill>
+            <a:srgbClr val="FFFFFF"/>
+          </a:solidFill>
+          <a:ln>
+            <a:noFill/>
+          </a:ln>
+          <a:effectLst/>
+        </p:spPr>
+        <p:style>
+          <a:lnRef idx="1">
+            <a:schemeClr val="accent1"/>
+          </a:lnRef>
+          <a:fillRef idx="3">
+            <a:schemeClr val="accent1"/>
+          </a:fillRef>
+          <a:effectRef idx="2">
+            <a:schemeClr val="accent1"/>
+          </a:effectRef>
+          <a:fontRef idx="minor">
+            <a:schemeClr val="lt1"/>
+          </a:fontRef>
+        </p:style>
+        <p:txBody>
+          <a:bodyPr rtlCol="0" anchor="ctr" wrap="square"/>
+          <a:lstStyle/>
+          <a:p>
+            <a:pPr algn="ctr"/>
+            <a:r>
+              <a:rPr sz="1000" b="0">
+                <a:solidFill>
+                  <a:srgbClr val="2C3E50"/>
+                </a:solidFill>
+              </a:rPr>
+              <a:t>10</a:t>
+            </a:r>
+          </a:p>
+        </p:txBody>
+      </p:sp>
+      <p:sp>
+        <p:nvSpPr>
+          <p:cNvPr id="67" name="Rounded Rectangle 66"/>
+          <p:cNvSpPr/>
+          <p:nvPr/>
+        </p:nvSpPr>
+        <p:spPr>
+          <a:xfrm>
+            <a:off x="6583680" y="4489704"/>
+            <a:ext cx="777240" cy="347472"/>
+          </a:xfrm>
+          <a:prstGeom prst="roundRect">
+            <a:avLst/>
+          </a:prstGeom>
+          <a:solidFill>
+            <a:srgbClr val="27AE60"/>
+          </a:solidFill>
+          <a:ln>
+            <a:noFill/>
+          </a:ln>
+          <a:effectLst/>
+        </p:spPr>
+        <p:style>
+          <a:lnRef idx="1">
+            <a:schemeClr val="accent1"/>
+          </a:lnRef>
+          <a:fillRef idx="3">
+            <a:schemeClr val="accent1"/>
+          </a:fillRef>
+          <a:effectRef idx="2">
+            <a:schemeClr val="accent1"/>
+          </a:effectRef>
+          <a:fontRef idx="minor">
+            <a:schemeClr val="lt1"/>
+          </a:fontRef>
+        </p:style>
+        <p:txBody>
+          <a:bodyPr rtlCol="0" anchor="ctr" wrap="square"/>
+          <a:lstStyle/>
+          <a:p>
+            <a:pPr algn="ctr"/>
+            <a:r>
+              <a:rPr sz="1000" b="0">
+                <a:solidFill>
+                  <a:srgbClr val="FFFFFF"/>
+                </a:solidFill>
+              </a:rPr>
+              <a:t>99%</a:t>
+            </a:r>
+          </a:p>
+        </p:txBody>
+      </p:sp>
+      <p:sp>
+        <p:nvSpPr>
+          <p:cNvPr id="68" name="Rounded Rectangle 67"/>
+          <p:cNvSpPr/>
+          <p:nvPr/>
+        </p:nvSpPr>
+        <p:spPr>
+          <a:xfrm>
+            <a:off x="274320" y="4873752"/>
+            <a:ext cx="2194560" cy="347472"/>
+          </a:xfrm>
+          <a:prstGeom prst="roundRect">
+            <a:avLst/>
+          </a:prstGeom>
+          <a:solidFill>
+            <a:srgbClr val="ECF0F1"/>
+          </a:solidFill>
+          <a:ln>
+            <a:noFill/>
+          </a:ln>
+          <a:effectLst/>
+        </p:spPr>
+        <p:style>
+          <a:lnRef idx="1">
+            <a:schemeClr val="accent1"/>
+          </a:lnRef>
+          <a:fillRef idx="3">
+            <a:schemeClr val="accent1"/>
+          </a:fillRef>
+          <a:effectRef idx="2">
+            <a:schemeClr val="accent1"/>
+          </a:effectRef>
+          <a:fontRef idx="minor">
+            <a:schemeClr val="lt1"/>
+          </a:fontRef>
+        </p:style>
+        <p:txBody>
+          <a:bodyPr rtlCol="0" anchor="ctr" wrap="square"/>
+          <a:lstStyle/>
+          <a:p>
+            <a:pPr algn="l"/>
+            <a:r>
+              <a:rPr sz="1000" b="0">
+                <a:solidFill>
+                  <a:srgbClr val="2C3E50"/>
+                </a:solidFill>
+              </a:rPr>
+              <a:t>Validation Notebook Generation</a:t>
+            </a:r>
+          </a:p>
+        </p:txBody>
+      </p:sp>
+      <p:sp>
+        <p:nvSpPr>
+          <p:cNvPr id="69" name="Rounded Rectangle 68"/>
+          <p:cNvSpPr/>
+          <p:nvPr/>
+        </p:nvSpPr>
+        <p:spPr>
+          <a:xfrm>
+            <a:off x="2468880" y="4873752"/>
+            <a:ext cx="822960" cy="347472"/>
+          </a:xfrm>
+          <a:prstGeom prst="roundRect">
+            <a:avLst/>
+          </a:prstGeom>
+          <a:solidFill>
+            <a:srgbClr val="ECF0F1"/>
+          </a:solidFill>
+          <a:ln>
+            <a:noFill/>
+          </a:ln>
+          <a:effectLst/>
+        </p:spPr>
+        <p:style>
+          <a:lnRef idx="1">
+            <a:schemeClr val="accent1"/>
+          </a:lnRef>
+          <a:fillRef idx="3">
+            <a:schemeClr val="accent1"/>
+          </a:fillRef>
+          <a:effectRef idx="2">
+            <a:schemeClr val="accent1"/>
+          </a:effectRef>
+          <a:fontRef idx="minor">
+            <a:schemeClr val="lt1"/>
+          </a:fontRef>
+        </p:style>
+        <p:txBody>
+          <a:bodyPr rtlCol="0" anchor="ctr" wrap="square"/>
+          <a:lstStyle/>
+          <a:p>
+            <a:pPr algn="ctr"/>
+            <a:r>
+              <a:rPr sz="1000" b="0">
+                <a:solidFill>
+                  <a:srgbClr val="2C3E50"/>
+                </a:solidFill>
+              </a:rPr>
+              <a:t>6</a:t>
+            </a:r>
+          </a:p>
+        </p:txBody>
+      </p:sp>
+      <p:sp>
+        <p:nvSpPr>
+          <p:cNvPr id="70" name="Rounded Rectangle 69"/>
+          <p:cNvSpPr/>
+          <p:nvPr/>
+        </p:nvSpPr>
+        <p:spPr>
+          <a:xfrm>
+            <a:off x="3291840" y="4873752"/>
+            <a:ext cx="822960" cy="347472"/>
+          </a:xfrm>
+          <a:prstGeom prst="roundRect">
+            <a:avLst/>
+          </a:prstGeom>
+          <a:solidFill>
+            <a:srgbClr val="ECF0F1"/>
+          </a:solidFill>
+          <a:ln>
+            <a:noFill/>
+          </a:ln>
+          <a:effectLst/>
+        </p:spPr>
+        <p:style>
+          <a:lnRef idx="1">
+            <a:schemeClr val="accent1"/>
+          </a:lnRef>
+          <a:fillRef idx="3">
+            <a:schemeClr val="accent1"/>
+          </a:fillRef>
+          <a:effectRef idx="2">
+            <a:schemeClr val="accent1"/>
+          </a:effectRef>
+          <a:fontRef idx="minor">
+            <a:schemeClr val="lt1"/>
+          </a:fontRef>
+        </p:style>
+        <p:txBody>
+          <a:bodyPr rtlCol="0" anchor="ctr" wrap="square"/>
+          <a:lstStyle/>
+          <a:p>
+            <a:pPr algn="ctr"/>
+            <a:r>
+              <a:rPr sz="1000" b="0">
+                <a:solidFill>
+                  <a:srgbClr val="2C3E50"/>
+                </a:solidFill>
+              </a:rPr>
+              <a:t>0.1</a:t>
+            </a:r>
+          </a:p>
+        </p:txBody>
+      </p:sp>
+      <p:sp>
+        <p:nvSpPr>
+          <p:cNvPr id="71" name="Rounded Rectangle 70"/>
+          <p:cNvSpPr/>
+          <p:nvPr/>
+        </p:nvSpPr>
+        <p:spPr>
+          <a:xfrm>
+            <a:off x="4114800" y="4873752"/>
+            <a:ext cx="548640" cy="347472"/>
+          </a:xfrm>
+          <a:prstGeom prst="roundRect">
+            <a:avLst/>
+          </a:prstGeom>
+          <a:solidFill>
+            <a:srgbClr val="ECF0F1"/>
+          </a:solidFill>
+          <a:ln>
+            <a:noFill/>
+          </a:ln>
+          <a:effectLst/>
+        </p:spPr>
+        <p:style>
+          <a:lnRef idx="1">
+            <a:schemeClr val="accent1"/>
+          </a:lnRef>
+          <a:fillRef idx="3">
+            <a:schemeClr val="accent1"/>
+          </a:fillRef>
+          <a:effectRef idx="2">
+            <a:schemeClr val="accent1"/>
+          </a:effectRef>
+          <a:fontRef idx="minor">
+            <a:schemeClr val="lt1"/>
+          </a:fontRef>
+        </p:style>
+        <p:txBody>
+          <a:bodyPr rtlCol="0" anchor="ctr" wrap="square"/>
+          <a:lstStyle/>
+          <a:p>
+            <a:pPr algn="ctr"/>
+            <a:r>
+              <a:rPr sz="1000" b="0">
+                <a:solidFill>
+                  <a:srgbClr val="2C3E50"/>
+                </a:solidFill>
+              </a:rPr>
+              <a:t>200</a:t>
+            </a:r>
+          </a:p>
+        </p:txBody>
+      </p:sp>
+      <p:sp>
+        <p:nvSpPr>
+          <p:cNvPr id="72" name="Rounded Rectangle 71"/>
+          <p:cNvSpPr/>
+          <p:nvPr/>
+        </p:nvSpPr>
+        <p:spPr>
+          <a:xfrm>
+            <a:off x="4663440" y="4873752"/>
+            <a:ext cx="960120" cy="347472"/>
+          </a:xfrm>
+          <a:prstGeom prst="roundRect">
+            <a:avLst/>
+          </a:prstGeom>
+          <a:solidFill>
+            <a:srgbClr val="ECF0F1"/>
+          </a:solidFill>
+          <a:ln>
+            <a:noFill/>
+          </a:ln>
+          <a:effectLst/>
+        </p:spPr>
+        <p:style>
+          <a:lnRef idx="1">
+            <a:schemeClr val="accent1"/>
+          </a:lnRef>
+          <a:fillRef idx="3">
+            <a:schemeClr val="accent1"/>
+          </a:fillRef>
+          <a:effectRef idx="2">
+            <a:schemeClr val="accent1"/>
+          </a:effectRef>
+          <a:fontRef idx="minor">
+            <a:schemeClr val="lt1"/>
+          </a:fontRef>
+        </p:style>
+        <p:txBody>
+          <a:bodyPr rtlCol="0" anchor="ctr" wrap="square"/>
+          <a:lstStyle/>
+          <a:p>
+            <a:pPr algn="ctr"/>
+            <a:r>
+              <a:rPr sz="1000" b="0">
+                <a:solidFill>
+                  <a:srgbClr val="2C3E50"/>
+                </a:solidFill>
+              </a:rPr>
+              <a:t>1,200</a:t>
+            </a:r>
+          </a:p>
+        </p:txBody>
+      </p:sp>
+      <p:sp>
+        <p:nvSpPr>
+          <p:cNvPr id="73" name="Rounded Rectangle 72"/>
+          <p:cNvSpPr/>
+          <p:nvPr/>
+        </p:nvSpPr>
+        <p:spPr>
+          <a:xfrm>
+            <a:off x="5623560" y="4873752"/>
+            <a:ext cx="960120" cy="347472"/>
+          </a:xfrm>
+          <a:prstGeom prst="roundRect">
+            <a:avLst/>
+          </a:prstGeom>
+          <a:solidFill>
+            <a:srgbClr val="ECF0F1"/>
+          </a:solidFill>
+          <a:ln>
+            <a:noFill/>
+          </a:ln>
+          <a:effectLst/>
+        </p:spPr>
+        <p:style>
+          <a:lnRef idx="1">
+            <a:schemeClr val="accent1"/>
+          </a:lnRef>
+          <a:fillRef idx="3">
+            <a:schemeClr val="accent1"/>
+          </a:fillRef>
+          <a:effectRef idx="2">
+            <a:schemeClr val="accent1"/>
+          </a:effectRef>
+          <a:fontRef idx="minor">
+            <a:schemeClr val="lt1"/>
+          </a:fontRef>
+        </p:style>
+        <p:txBody>
+          <a:bodyPr rtlCol="0" anchor="ctr" wrap="square"/>
+          <a:lstStyle/>
+          <a:p>
+            <a:pPr algn="ctr"/>
+            <a:r>
+              <a:rPr sz="1000" b="0">
+                <a:solidFill>
+                  <a:srgbClr val="2C3E50"/>
+                </a:solidFill>
+              </a:rPr>
+              <a:t>20</a:t>
+            </a:r>
+          </a:p>
+        </p:txBody>
+      </p:sp>
+      <p:sp>
+        <p:nvSpPr>
+          <p:cNvPr id="74" name="Rounded Rectangle 73"/>
+          <p:cNvSpPr/>
+          <p:nvPr/>
+        </p:nvSpPr>
+        <p:spPr>
+          <a:xfrm>
+            <a:off x="6583680" y="4873752"/>
+            <a:ext cx="777240" cy="347472"/>
+          </a:xfrm>
+          <a:prstGeom prst="roundRect">
+            <a:avLst/>
+          </a:prstGeom>
+          <a:solidFill>
+            <a:srgbClr val="27AE60"/>
+          </a:solidFill>
+          <a:ln>
+            <a:noFill/>
+          </a:ln>
+          <a:effectLst/>
+        </p:spPr>
+        <p:style>
+          <a:lnRef idx="1">
+            <a:schemeClr val="accent1"/>
+          </a:lnRef>
+          <a:fillRef idx="3">
+            <a:schemeClr val="accent1"/>
+          </a:fillRef>
+          <a:effectRef idx="2">
+            <a:schemeClr val="accent1"/>
+          </a:effectRef>
+          <a:fontRef idx="minor">
+            <a:schemeClr val="lt1"/>
+          </a:fontRef>
+        </p:style>
+        <p:txBody>
+          <a:bodyPr rtlCol="0" anchor="ctr" wrap="square"/>
+          <a:lstStyle/>
+          <a:p>
+            <a:pPr algn="ctr"/>
+            <a:r>
+              <a:rPr sz="1000" b="0">
+                <a:solidFill>
+                  <a:srgbClr val="FFFFFF"/>
+                </a:solidFill>
+              </a:rPr>
+              <a:t>98%</a:t>
+            </a:r>
+          </a:p>
+        </p:txBody>
+      </p:sp>
+      <p:sp>
+        <p:nvSpPr>
+          <p:cNvPr id="75" name="Rounded Rectangle 74"/>
+          <p:cNvSpPr/>
+          <p:nvPr/>
+        </p:nvSpPr>
+        <p:spPr>
+          <a:xfrm>
+            <a:off x="274320" y="5257800"/>
+            <a:ext cx="2194560" cy="347472"/>
+          </a:xfrm>
+          <a:prstGeom prst="roundRect">
+            <a:avLst/>
+          </a:prstGeom>
+          <a:solidFill>
+            <a:srgbClr val="FFFFFF"/>
+          </a:solidFill>
+          <a:ln>
+            <a:noFill/>
+          </a:ln>
+          <a:effectLst/>
+        </p:spPr>
+        <p:style>
+          <a:lnRef idx="1">
+            <a:schemeClr val="accent1"/>
+          </a:lnRef>
+          <a:fillRef idx="3">
+            <a:schemeClr val="accent1"/>
+          </a:fillRef>
+          <a:effectRef idx="2">
+            <a:schemeClr val="accent1"/>
+          </a:effectRef>
+          <a:fontRef idx="minor">
+            <a:schemeClr val="lt1"/>
+          </a:fontRef>
+        </p:style>
+        <p:txBody>
+          <a:bodyPr rtlCol="0" anchor="ctr" wrap="square"/>
+          <a:lstStyle/>
+          <a:p>
+            <a:pPr algn="l"/>
+            <a:r>
+              <a:rPr sz="1000" b="0">
+                <a:solidFill>
+                  <a:srgbClr val="2C3E50"/>
+                </a:solidFill>
+              </a:rPr>
+              <a:t>Unit/Integration Testing</a:t>
+            </a:r>
+          </a:p>
+        </p:txBody>
+      </p:sp>
+      <p:sp>
+        <p:nvSpPr>
+          <p:cNvPr id="76" name="Rounded Rectangle 75"/>
+          <p:cNvSpPr/>
+          <p:nvPr/>
+        </p:nvSpPr>
+        <p:spPr>
+          <a:xfrm>
+            <a:off x="2468880" y="5257800"/>
+            <a:ext cx="822960" cy="347472"/>
+          </a:xfrm>
+          <a:prstGeom prst="roundRect">
+            <a:avLst/>
+          </a:prstGeom>
+          <a:solidFill>
+            <a:srgbClr val="FFFFFF"/>
+          </a:solidFill>
+          <a:ln>
+            <a:noFill/>
+          </a:ln>
+          <a:effectLst/>
+        </p:spPr>
+        <p:style>
+          <a:lnRef idx="1">
+            <a:schemeClr val="accent1"/>
+          </a:lnRef>
+          <a:fillRef idx="3">
+            <a:schemeClr val="accent1"/>
+          </a:fillRef>
+          <a:effectRef idx="2">
+            <a:schemeClr val="accent1"/>
+          </a:effectRef>
+          <a:fontRef idx="minor">
+            <a:schemeClr val="lt1"/>
+          </a:fontRef>
+        </p:style>
+        <p:txBody>
+          <a:bodyPr rtlCol="0" anchor="ctr" wrap="square"/>
+          <a:lstStyle/>
+          <a:p>
+            <a:pPr algn="ctr"/>
+            <a:r>
+              <a:rPr sz="1000" b="0">
+                <a:solidFill>
+                  <a:srgbClr val="2C3E50"/>
+                </a:solidFill>
+              </a:rPr>
+              <a:t>10</a:t>
+            </a:r>
+          </a:p>
+        </p:txBody>
+      </p:sp>
+      <p:sp>
+        <p:nvSpPr>
+          <p:cNvPr id="77" name="Rounded Rectangle 76"/>
+          <p:cNvSpPr/>
+          <p:nvPr/>
+        </p:nvSpPr>
+        <p:spPr>
+          <a:xfrm>
+            <a:off x="3291840" y="5257800"/>
+            <a:ext cx="822960" cy="347472"/>
+          </a:xfrm>
+          <a:prstGeom prst="roundRect">
+            <a:avLst/>
+          </a:prstGeom>
+          <a:solidFill>
+            <a:srgbClr val="FFFFFF"/>
+          </a:solidFill>
+          <a:ln>
+            <a:noFill/>
+          </a:ln>
+          <a:effectLst/>
+        </p:spPr>
+        <p:style>
+          <a:lnRef idx="1">
+            <a:schemeClr val="accent1"/>
+          </a:lnRef>
+          <a:fillRef idx="3">
+            <a:schemeClr val="accent1"/>
+          </a:fillRef>
+          <a:effectRef idx="2">
+            <a:schemeClr val="accent1"/>
+          </a:effectRef>
+          <a:fontRef idx="minor">
+            <a:schemeClr val="lt1"/>
+          </a:fontRef>
+        </p:style>
+        <p:txBody>
+          <a:bodyPr rtlCol="0" anchor="ctr" wrap="square"/>
+          <a:lstStyle/>
+          <a:p>
+            <a:pPr algn="ctr"/>
+            <a:r>
+              <a:rPr sz="1000" b="0">
+                <a:solidFill>
+                  <a:srgbClr val="2C3E50"/>
+                </a:solidFill>
+              </a:rPr>
+              <a:t>0.5</a:t>
+            </a:r>
+          </a:p>
+        </p:txBody>
+      </p:sp>
+      <p:sp>
+        <p:nvSpPr>
+          <p:cNvPr id="78" name="Rounded Rectangle 77"/>
+          <p:cNvSpPr/>
+          <p:nvPr/>
+        </p:nvSpPr>
+        <p:spPr>
+          <a:xfrm>
+            <a:off x="4114800" y="5257800"/>
+            <a:ext cx="548640" cy="347472"/>
+          </a:xfrm>
+          <a:prstGeom prst="roundRect">
+            <a:avLst/>
+          </a:prstGeom>
+          <a:solidFill>
+            <a:srgbClr val="FFFFFF"/>
+          </a:solidFill>
+          <a:ln>
+            <a:noFill/>
+          </a:ln>
+          <a:effectLst/>
+        </p:spPr>
+        <p:style>
+          <a:lnRef idx="1">
+            <a:schemeClr val="accent1"/>
+          </a:lnRef>
+          <a:fillRef idx="3">
+            <a:schemeClr val="accent1"/>
+          </a:fillRef>
+          <a:effectRef idx="2">
+            <a:schemeClr val="accent1"/>
+          </a:effectRef>
+          <a:fontRef idx="minor">
+            <a:schemeClr val="lt1"/>
+          </a:fontRef>
+        </p:style>
+        <p:txBody>
+          <a:bodyPr rtlCol="0" anchor="ctr" wrap="square"/>
+          <a:lstStyle/>
+          <a:p>
+            <a:pPr algn="ctr"/>
+            <a:r>
+              <a:rPr sz="1000" b="0">
+                <a:solidFill>
+                  <a:srgbClr val="2C3E50"/>
+                </a:solidFill>
+              </a:rPr>
+              <a:t>200</a:t>
+            </a:r>
+          </a:p>
+        </p:txBody>
+      </p:sp>
+      <p:sp>
+        <p:nvSpPr>
+          <p:cNvPr id="79" name="Rounded Rectangle 78"/>
+          <p:cNvSpPr/>
+          <p:nvPr/>
+        </p:nvSpPr>
+        <p:spPr>
+          <a:xfrm>
+            <a:off x="4663440" y="5257800"/>
+            <a:ext cx="960120" cy="347472"/>
+          </a:xfrm>
+          <a:prstGeom prst="roundRect">
+            <a:avLst/>
+          </a:prstGeom>
+          <a:solidFill>
+            <a:srgbClr val="FFFFFF"/>
+          </a:solidFill>
+          <a:ln>
+            <a:noFill/>
+          </a:ln>
+          <a:effectLst/>
+        </p:spPr>
+        <p:style>
+          <a:lnRef idx="1">
+            <a:schemeClr val="accent1"/>
+          </a:lnRef>
+          <a:fillRef idx="3">
+            <a:schemeClr val="accent1"/>
+          </a:fillRef>
+          <a:effectRef idx="2">
+            <a:schemeClr val="accent1"/>
+          </a:effectRef>
+          <a:fontRef idx="minor">
+            <a:schemeClr val="lt1"/>
+          </a:fontRef>
+        </p:style>
+        <p:txBody>
+          <a:bodyPr rtlCol="0" anchor="ctr" wrap="square"/>
+          <a:lstStyle/>
+          <a:p>
+            <a:pPr algn="ctr"/>
+            <a:r>
+              <a:rPr sz="1000" b="0">
+                <a:solidFill>
+                  <a:srgbClr val="2C3E50"/>
+                </a:solidFill>
+              </a:rPr>
+              <a:t>2,000</a:t>
+            </a:r>
+          </a:p>
+        </p:txBody>
+      </p:sp>
+      <p:sp>
+        <p:nvSpPr>
+          <p:cNvPr id="80" name="Rounded Rectangle 79"/>
+          <p:cNvSpPr/>
+          <p:nvPr/>
+        </p:nvSpPr>
+        <p:spPr>
+          <a:xfrm>
+            <a:off x="5623560" y="5257800"/>
+            <a:ext cx="960120" cy="347472"/>
+          </a:xfrm>
+          <a:prstGeom prst="roundRect">
+            <a:avLst/>
+          </a:prstGeom>
+          <a:solidFill>
+            <a:srgbClr val="FFFFFF"/>
+          </a:solidFill>
+          <a:ln>
+            <a:noFill/>
+          </a:ln>
+          <a:effectLst/>
+        </p:spPr>
+        <p:style>
+          <a:lnRef idx="1">
+            <a:schemeClr val="accent1"/>
+          </a:lnRef>
+          <a:fillRef idx="3">
+            <a:schemeClr val="accent1"/>
+          </a:fillRef>
+          <a:effectRef idx="2">
+            <a:schemeClr val="accent1"/>
+          </a:effectRef>
+          <a:fontRef idx="minor">
+            <a:schemeClr val="lt1"/>
+          </a:fontRef>
+        </p:style>
+        <p:txBody>
+          <a:bodyPr rtlCol="0" anchor="ctr" wrap="square"/>
+          <a:lstStyle/>
+          <a:p>
+            <a:pPr algn="ctr"/>
+            <a:r>
+              <a:rPr sz="1000" b="0">
+                <a:solidFill>
+                  <a:srgbClr val="2C3E50"/>
+                </a:solidFill>
+              </a:rPr>
+              <a:t>100</a:t>
+            </a:r>
+          </a:p>
+        </p:txBody>
+      </p:sp>
+      <p:sp>
+        <p:nvSpPr>
+          <p:cNvPr id="81" name="Rounded Rectangle 80"/>
+          <p:cNvSpPr/>
+          <p:nvPr/>
+        </p:nvSpPr>
+        <p:spPr>
+          <a:xfrm>
+            <a:off x="6583680" y="5257800"/>
+            <a:ext cx="777240" cy="347472"/>
+          </a:xfrm>
+          <a:prstGeom prst="roundRect">
+            <a:avLst/>
+          </a:prstGeom>
+          <a:solidFill>
+            <a:srgbClr val="27AE60"/>
+          </a:solidFill>
+          <a:ln>
+            <a:noFill/>
+          </a:ln>
+          <a:effectLst/>
+        </p:spPr>
+        <p:style>
+          <a:lnRef idx="1">
+            <a:schemeClr val="accent1"/>
+          </a:lnRef>
+          <a:fillRef idx="3">
+            <a:schemeClr val="accent1"/>
+          </a:fillRef>
+          <a:effectRef idx="2">
+            <a:schemeClr val="accent1"/>
+          </a:effectRef>
+          <a:fontRef idx="minor">
+            <a:schemeClr val="lt1"/>
+          </a:fontRef>
+        </p:style>
+        <p:txBody>
+          <a:bodyPr rtlCol="0" anchor="ctr" wrap="square"/>
+          <a:lstStyle/>
+          <a:p>
+            <a:pPr algn="ctr"/>
+            <a:r>
+              <a:rPr sz="1000" b="0">
+                <a:solidFill>
+                  <a:srgbClr val="FFFFFF"/>
+                </a:solidFill>
+              </a:rPr>
+              <a:t>95%</a:t>
+            </a:r>
+          </a:p>
+        </p:txBody>
+      </p:sp>
+      <p:sp>
+        <p:nvSpPr>
+          <p:cNvPr id="82" name="Rounded Rectangle 81"/>
+          <p:cNvSpPr/>
+          <p:nvPr/>
+        </p:nvSpPr>
+        <p:spPr>
+          <a:xfrm>
+            <a:off x="274320" y="5641848"/>
+            <a:ext cx="2194560" cy="347472"/>
+          </a:xfrm>
+          <a:prstGeom prst="roundRect">
+            <a:avLst/>
+          </a:prstGeom>
+          <a:solidFill>
+            <a:srgbClr val="ECF0F1"/>
+          </a:solidFill>
+          <a:ln>
+            <a:noFill/>
+          </a:ln>
+          <a:effectLst/>
+        </p:spPr>
+        <p:style>
+          <a:lnRef idx="1">
+            <a:schemeClr val="accent1"/>
+          </a:lnRef>
+          <a:fillRef idx="3">
+            <a:schemeClr val="accent1"/>
+          </a:fillRef>
+          <a:effectRef idx="2">
+            <a:schemeClr val="accent1"/>
+          </a:effectRef>
+          <a:fontRef idx="minor">
+            <a:schemeClr val="lt1"/>
+          </a:fontRef>
+        </p:style>
+        <p:txBody>
+          <a:bodyPr rtlCol="0" anchor="ctr" wrap="square"/>
+          <a:lstStyle/>
+          <a:p>
+            <a:pPr algn="l"/>
+            <a:r>
+              <a:rPr sz="1000" b="0">
+                <a:solidFill>
+                  <a:srgbClr val="2C3E50"/>
+                </a:solidFill>
+              </a:rPr>
+              <a:t>Lineage Documentation</a:t>
+            </a:r>
+          </a:p>
+        </p:txBody>
+      </p:sp>
+      <p:sp>
+        <p:nvSpPr>
+          <p:cNvPr id="83" name="Rounded Rectangle 82"/>
+          <p:cNvSpPr/>
+          <p:nvPr/>
+        </p:nvSpPr>
+        <p:spPr>
+          <a:xfrm>
+            <a:off x="2468880" y="5641848"/>
+            <a:ext cx="822960" cy="347472"/>
+          </a:xfrm>
+          <a:prstGeom prst="roundRect">
+            <a:avLst/>
+          </a:prstGeom>
+          <a:solidFill>
+            <a:srgbClr val="ECF0F1"/>
+          </a:solidFill>
+          <a:ln>
+            <a:noFill/>
+          </a:ln>
+          <a:effectLst/>
+        </p:spPr>
+        <p:style>
+          <a:lnRef idx="1">
+            <a:schemeClr val="accent1"/>
+          </a:lnRef>
+          <a:fillRef idx="3">
+            <a:schemeClr val="accent1"/>
+          </a:fillRef>
+          <a:effectRef idx="2">
+            <a:schemeClr val="accent1"/>
+          </a:effectRef>
+          <a:fontRef idx="minor">
+            <a:schemeClr val="lt1"/>
+          </a:fontRef>
+        </p:style>
+        <p:txBody>
+          <a:bodyPr rtlCol="0" anchor="ctr" wrap="square"/>
+          <a:lstStyle/>
+          <a:p>
+            <a:pPr algn="ctr"/>
+            <a:r>
+              <a:rPr sz="1000" b="0">
+                <a:solidFill>
+                  <a:srgbClr val="2C3E50"/>
+                </a:solidFill>
+              </a:rPr>
+              <a:t>4</a:t>
+            </a:r>
+          </a:p>
+        </p:txBody>
+      </p:sp>
+      <p:sp>
+        <p:nvSpPr>
+          <p:cNvPr id="84" name="Rounded Rectangle 83"/>
+          <p:cNvSpPr/>
+          <p:nvPr/>
+        </p:nvSpPr>
+        <p:spPr>
+          <a:xfrm>
+            <a:off x="3291840" y="5641848"/>
+            <a:ext cx="822960" cy="347472"/>
+          </a:xfrm>
+          <a:prstGeom prst="roundRect">
+            <a:avLst/>
+          </a:prstGeom>
+          <a:solidFill>
+            <a:srgbClr val="ECF0F1"/>
+          </a:solidFill>
+          <a:ln>
+            <a:noFill/>
+          </a:ln>
+          <a:effectLst/>
+        </p:spPr>
+        <p:style>
+          <a:lnRef idx="1">
+            <a:schemeClr val="accent1"/>
+          </a:lnRef>
+          <a:fillRef idx="3">
+            <a:schemeClr val="accent1"/>
+          </a:fillRef>
+          <a:effectRef idx="2">
+            <a:schemeClr val="accent1"/>
+          </a:effectRef>
+          <a:fontRef idx="minor">
+            <a:schemeClr val="lt1"/>
+          </a:fontRef>
+        </p:style>
+        <p:txBody>
+          <a:bodyPr rtlCol="0" anchor="ctr" wrap="square"/>
+          <a:lstStyle/>
+          <a:p>
+            <a:pPr algn="ctr"/>
+            <a:r>
+              <a:rPr sz="1000" b="0">
+                <a:solidFill>
+                  <a:srgbClr val="2C3E50"/>
+                </a:solidFill>
+              </a:rPr>
+              <a:t>0.05</a:t>
+            </a:r>
+          </a:p>
+        </p:txBody>
+      </p:sp>
+      <p:sp>
+        <p:nvSpPr>
+          <p:cNvPr id="85" name="Rounded Rectangle 84"/>
+          <p:cNvSpPr/>
+          <p:nvPr/>
+        </p:nvSpPr>
+        <p:spPr>
+          <a:xfrm>
+            <a:off x="4114800" y="5641848"/>
+            <a:ext cx="548640" cy="347472"/>
+          </a:xfrm>
+          <a:prstGeom prst="roundRect">
+            <a:avLst/>
+          </a:prstGeom>
+          <a:solidFill>
+            <a:srgbClr val="ECF0F1"/>
+          </a:solidFill>
+          <a:ln>
+            <a:noFill/>
+          </a:ln>
+          <a:effectLst/>
+        </p:spPr>
+        <p:style>
+          <a:lnRef idx="1">
+            <a:schemeClr val="accent1"/>
+          </a:lnRef>
+          <a:fillRef idx="3">
+            <a:schemeClr val="accent1"/>
+          </a:fillRef>
+          <a:effectRef idx="2">
+            <a:schemeClr val="accent1"/>
+          </a:effectRef>
+          <a:fontRef idx="minor">
+            <a:schemeClr val="lt1"/>
+          </a:fontRef>
+        </p:style>
+        <p:txBody>
+          <a:bodyPr rtlCol="0" anchor="ctr" wrap="square"/>
+          <a:lstStyle/>
+          <a:p>
+            <a:pPr algn="ctr"/>
+            <a:r>
+              <a:rPr sz="1000" b="0">
+                <a:solidFill>
+                  <a:srgbClr val="2C3E50"/>
+                </a:solidFill>
+              </a:rPr>
+              <a:t>200</a:t>
+            </a:r>
+          </a:p>
+        </p:txBody>
+      </p:sp>
+      <p:sp>
+        <p:nvSpPr>
+          <p:cNvPr id="86" name="Rounded Rectangle 85"/>
+          <p:cNvSpPr/>
+          <p:nvPr/>
+        </p:nvSpPr>
+        <p:spPr>
+          <a:xfrm>
+            <a:off x="4663440" y="5641848"/>
+            <a:ext cx="960120" cy="347472"/>
+          </a:xfrm>
+          <a:prstGeom prst="roundRect">
+            <a:avLst/>
+          </a:prstGeom>
+          <a:solidFill>
+            <a:srgbClr val="ECF0F1"/>
+          </a:solidFill>
+          <a:ln>
+            <a:noFill/>
+          </a:ln>
+          <a:effectLst/>
+        </p:spPr>
+        <p:style>
+          <a:lnRef idx="1">
+            <a:schemeClr val="accent1"/>
+          </a:lnRef>
+          <a:fillRef idx="3">
+            <a:schemeClr val="accent1"/>
+          </a:fillRef>
+          <a:effectRef idx="2">
+            <a:schemeClr val="accent1"/>
+          </a:effectRef>
+          <a:fontRef idx="minor">
+            <a:schemeClr val="lt1"/>
+          </a:fontRef>
+        </p:style>
+        <p:txBody>
+          <a:bodyPr rtlCol="0" anchor="ctr" wrap="square"/>
+          <a:lstStyle/>
+          <a:p>
+            <a:pPr algn="ctr"/>
+            <a:r>
+              <a:rPr sz="1000" b="0">
+                <a:solidFill>
+                  <a:srgbClr val="2C3E50"/>
+                </a:solidFill>
+              </a:rPr>
+              <a:t>800</a:t>
+            </a:r>
+          </a:p>
+        </p:txBody>
+      </p:sp>
+      <p:sp>
+        <p:nvSpPr>
+          <p:cNvPr id="87" name="Rounded Rectangle 86"/>
+          <p:cNvSpPr/>
+          <p:nvPr/>
+        </p:nvSpPr>
+        <p:spPr>
+          <a:xfrm>
+            <a:off x="5623560" y="5641848"/>
+            <a:ext cx="960120" cy="347472"/>
+          </a:xfrm>
+          <a:prstGeom prst="roundRect">
+            <a:avLst/>
+          </a:prstGeom>
+          <a:solidFill>
+            <a:srgbClr val="ECF0F1"/>
+          </a:solidFill>
+          <a:ln>
+            <a:noFill/>
+          </a:ln>
+          <a:effectLst/>
+        </p:spPr>
+        <p:style>
+          <a:lnRef idx="1">
+            <a:schemeClr val="accent1"/>
+          </a:lnRef>
+          <a:fillRef idx="3">
+            <a:schemeClr val="accent1"/>
+          </a:fillRef>
+          <a:effectRef idx="2">
+            <a:schemeClr val="accent1"/>
+          </a:effectRef>
+          <a:fontRef idx="minor">
+            <a:schemeClr val="lt1"/>
+          </a:fontRef>
+        </p:style>
+        <p:txBody>
+          <a:bodyPr rtlCol="0" anchor="ctr" wrap="square"/>
+          <a:lstStyle/>
+          <a:p>
+            <a:pPr algn="ctr"/>
+            <a:r>
+              <a:rPr sz="1000" b="0">
+                <a:solidFill>
+                  <a:srgbClr val="2C3E50"/>
+                </a:solidFill>
+              </a:rPr>
+              <a:t>10</a:t>
+            </a:r>
+          </a:p>
+        </p:txBody>
+      </p:sp>
+      <p:sp>
+        <p:nvSpPr>
+          <p:cNvPr id="88" name="Rounded Rectangle 87"/>
+          <p:cNvSpPr/>
+          <p:nvPr/>
+        </p:nvSpPr>
+        <p:spPr>
+          <a:xfrm>
+            <a:off x="6583680" y="5641848"/>
+            <a:ext cx="777240" cy="347472"/>
+          </a:xfrm>
+          <a:prstGeom prst="roundRect">
+            <a:avLst/>
+          </a:prstGeom>
+          <a:solidFill>
+            <a:srgbClr val="27AE60"/>
+          </a:solidFill>
+          <a:ln>
+            <a:noFill/>
+          </a:ln>
+          <a:effectLst/>
+        </p:spPr>
+        <p:style>
+          <a:lnRef idx="1">
+            <a:schemeClr val="accent1"/>
+          </a:lnRef>
+          <a:fillRef idx="3">
+            <a:schemeClr val="accent1"/>
+          </a:fillRef>
+          <a:effectRef idx="2">
+            <a:schemeClr val="accent1"/>
+          </a:effectRef>
+          <a:fontRef idx="minor">
+            <a:schemeClr val="lt1"/>
+          </a:fontRef>
+        </p:style>
+        <p:txBody>
+          <a:bodyPr rtlCol="0" anchor="ctr" wrap="square"/>
+          <a:lstStyle/>
+          <a:p>
+            <a:pPr algn="ctr"/>
+            <a:r>
+              <a:rPr sz="1000" b="0">
+                <a:solidFill>
+                  <a:srgbClr val="FFFFFF"/>
+                </a:solidFill>
+              </a:rPr>
+              <a:t>99%</a:t>
+            </a:r>
+          </a:p>
+        </p:txBody>
+      </p:sp>
+      <p:sp>
+        <p:nvSpPr>
+          <p:cNvPr id="89" name="Rounded Rectangle 88"/>
+          <p:cNvSpPr/>
+          <p:nvPr/>
+        </p:nvSpPr>
+        <p:spPr>
+          <a:xfrm>
+            <a:off x="274320" y="6025896"/>
+            <a:ext cx="2194560" cy="347472"/>
+          </a:xfrm>
+          <a:prstGeom prst="roundRect">
+            <a:avLst/>
+          </a:prstGeom>
+          <a:solidFill>
+            <a:srgbClr val="FFFFFF"/>
+          </a:solidFill>
+          <a:ln>
+            <a:noFill/>
+          </a:ln>
+          <a:effectLst/>
+        </p:spPr>
+        <p:style>
+          <a:lnRef idx="1">
+            <a:schemeClr val="accent1"/>
+          </a:lnRef>
+          <a:fillRef idx="3">
+            <a:schemeClr val="accent1"/>
+          </a:fillRef>
+          <a:effectRef idx="2">
+            <a:schemeClr val="accent1"/>
+          </a:effectRef>
+          <a:fontRef idx="minor">
+            <a:schemeClr val="lt1"/>
+          </a:fontRef>
+        </p:style>
+        <p:txBody>
+          <a:bodyPr rtlCol="0" anchor="ctr" wrap="square"/>
+          <a:lstStyle/>
+          <a:p>
+            <a:pPr algn="l"/>
+            <a:r>
+              <a:rPr sz="1000" b="0">
+                <a:solidFill>
+                  <a:srgbClr val="2C3E50"/>
+                </a:solidFill>
+              </a:rPr>
+              <a:t>Data Catalog (Purview/UC) Setup</a:t>
+            </a:r>
+          </a:p>
+        </p:txBody>
+      </p:sp>
+      <p:sp>
+        <p:nvSpPr>
+          <p:cNvPr id="90" name="Rounded Rectangle 89"/>
+          <p:cNvSpPr/>
+          <p:nvPr/>
+        </p:nvSpPr>
+        <p:spPr>
+          <a:xfrm>
+            <a:off x="2468880" y="6025896"/>
+            <a:ext cx="822960" cy="347472"/>
+          </a:xfrm>
+          <a:prstGeom prst="roundRect">
+            <a:avLst/>
+          </a:prstGeom>
+          <a:solidFill>
+            <a:srgbClr val="FFFFFF"/>
+          </a:solidFill>
+          <a:ln>
+            <a:noFill/>
+          </a:ln>
+          <a:effectLst/>
+        </p:spPr>
+        <p:style>
+          <a:lnRef idx="1">
+            <a:schemeClr val="accent1"/>
+          </a:lnRef>
+          <a:fillRef idx="3">
+            <a:schemeClr val="accent1"/>
+          </a:fillRef>
+          <a:effectRef idx="2">
+            <a:schemeClr val="accent1"/>
+          </a:effectRef>
+          <a:fontRef idx="minor">
+            <a:schemeClr val="lt1"/>
+          </a:fontRef>
+        </p:style>
+        <p:txBody>
+          <a:bodyPr rtlCol="0" anchor="ctr" wrap="square"/>
+          <a:lstStyle/>
+          <a:p>
+            <a:pPr algn="ctr"/>
+            <a:r>
+              <a:rPr sz="1000" b="0">
+                <a:solidFill>
+                  <a:srgbClr val="2C3E50"/>
+                </a:solidFill>
+              </a:rPr>
+              <a:t>6</a:t>
+            </a:r>
+          </a:p>
+        </p:txBody>
+      </p:sp>
+      <p:sp>
+        <p:nvSpPr>
+          <p:cNvPr id="91" name="Rounded Rectangle 90"/>
+          <p:cNvSpPr/>
+          <p:nvPr/>
+        </p:nvSpPr>
+        <p:spPr>
+          <a:xfrm>
+            <a:off x="3291840" y="6025896"/>
+            <a:ext cx="822960" cy="347472"/>
+          </a:xfrm>
+          <a:prstGeom prst="roundRect">
+            <a:avLst/>
+          </a:prstGeom>
+          <a:solidFill>
+            <a:srgbClr val="FFFFFF"/>
+          </a:solidFill>
+          <a:ln>
+            <a:noFill/>
+          </a:ln>
+          <a:effectLst/>
+        </p:spPr>
+        <p:style>
+          <a:lnRef idx="1">
+            <a:schemeClr val="accent1"/>
+          </a:lnRef>
+          <a:fillRef idx="3">
+            <a:schemeClr val="accent1"/>
+          </a:fillRef>
+          <a:effectRef idx="2">
+            <a:schemeClr val="accent1"/>
+          </a:effectRef>
+          <a:fontRef idx="minor">
+            <a:schemeClr val="lt1"/>
+          </a:fontRef>
+        </p:style>
+        <p:txBody>
+          <a:bodyPr rtlCol="0" anchor="ctr" wrap="square"/>
+          <a:lstStyle/>
+          <a:p>
+            <a:pPr algn="ctr"/>
+            <a:r>
+              <a:rPr sz="1000" b="0">
+                <a:solidFill>
+                  <a:srgbClr val="2C3E50"/>
+                </a:solidFill>
+              </a:rPr>
+              <a:t>0.1</a:t>
+            </a:r>
+          </a:p>
+        </p:txBody>
+      </p:sp>
+      <p:sp>
+        <p:nvSpPr>
+          <p:cNvPr id="92" name="Rounded Rectangle 91"/>
+          <p:cNvSpPr/>
+          <p:nvPr/>
+        </p:nvSpPr>
+        <p:spPr>
+          <a:xfrm>
+            <a:off x="4114800" y="6025896"/>
+            <a:ext cx="548640" cy="347472"/>
+          </a:xfrm>
+          <a:prstGeom prst="roundRect">
+            <a:avLst/>
+          </a:prstGeom>
+          <a:solidFill>
+            <a:srgbClr val="FFFFFF"/>
+          </a:solidFill>
+          <a:ln>
+            <a:noFill/>
+          </a:ln>
+          <a:effectLst/>
+        </p:spPr>
+        <p:style>
+          <a:lnRef idx="1">
+            <a:schemeClr val="accent1"/>
+          </a:lnRef>
+          <a:fillRef idx="3">
+            <a:schemeClr val="accent1"/>
+          </a:fillRef>
+          <a:effectRef idx="2">
+            <a:schemeClr val="accent1"/>
+          </a:effectRef>
+          <a:fontRef idx="minor">
+            <a:schemeClr val="lt1"/>
+          </a:fontRef>
+        </p:style>
+        <p:txBody>
+          <a:bodyPr rtlCol="0" anchor="ctr" wrap="square"/>
+          <a:lstStyle/>
+          <a:p>
+            <a:pPr algn="ctr"/>
+            <a:r>
+              <a:rPr sz="1000" b="0">
+                <a:solidFill>
+                  <a:srgbClr val="2C3E50"/>
+                </a:solidFill>
+              </a:rPr>
+              <a:t>200</a:t>
+            </a:r>
+          </a:p>
+        </p:txBody>
+      </p:sp>
+      <p:sp>
+        <p:nvSpPr>
+          <p:cNvPr id="93" name="Rounded Rectangle 92"/>
+          <p:cNvSpPr/>
+          <p:nvPr/>
+        </p:nvSpPr>
+        <p:spPr>
+          <a:xfrm>
+            <a:off x="4663440" y="6025896"/>
+            <a:ext cx="960120" cy="347472"/>
+          </a:xfrm>
+          <a:prstGeom prst="roundRect">
+            <a:avLst/>
+          </a:prstGeom>
+          <a:solidFill>
+            <a:srgbClr val="FFFFFF"/>
+          </a:solidFill>
+          <a:ln>
+            <a:noFill/>
+          </a:ln>
+          <a:effectLst/>
+        </p:spPr>
+        <p:style>
+          <a:lnRef idx="1">
+            <a:schemeClr val="accent1"/>
+          </a:lnRef>
+          <a:fillRef idx="3">
+            <a:schemeClr val="accent1"/>
+          </a:fillRef>
+          <a:effectRef idx="2">
+            <a:schemeClr val="accent1"/>
+          </a:effectRef>
+          <a:fontRef idx="minor">
+            <a:schemeClr val="lt1"/>
+          </a:fontRef>
+        </p:style>
+        <p:txBody>
+          <a:bodyPr rtlCol="0" anchor="ctr" wrap="square"/>
+          <a:lstStyle/>
+          <a:p>
+            <a:pPr algn="ctr"/>
+            <a:r>
+              <a:rPr sz="1000" b="0">
+                <a:solidFill>
+                  <a:srgbClr val="2C3E50"/>
+                </a:solidFill>
+              </a:rPr>
+              <a:t>1,200</a:t>
+            </a:r>
+          </a:p>
+        </p:txBody>
+      </p:sp>
+      <p:sp>
+        <p:nvSpPr>
+          <p:cNvPr id="94" name="Rounded Rectangle 93"/>
+          <p:cNvSpPr/>
+          <p:nvPr/>
+        </p:nvSpPr>
+        <p:spPr>
+          <a:xfrm>
+            <a:off x="5623560" y="6025896"/>
+            <a:ext cx="960120" cy="347472"/>
+          </a:xfrm>
+          <a:prstGeom prst="roundRect">
+            <a:avLst/>
+          </a:prstGeom>
+          <a:solidFill>
+            <a:srgbClr val="FFFFFF"/>
+          </a:solidFill>
+          <a:ln>
+            <a:noFill/>
+          </a:ln>
+          <a:effectLst/>
+        </p:spPr>
+        <p:style>
+          <a:lnRef idx="1">
+            <a:schemeClr val="accent1"/>
+          </a:lnRef>
+          <a:fillRef idx="3">
+            <a:schemeClr val="accent1"/>
+          </a:fillRef>
+          <a:effectRef idx="2">
+            <a:schemeClr val="accent1"/>
+          </a:effectRef>
+          <a:fontRef idx="minor">
+            <a:schemeClr val="lt1"/>
+          </a:fontRef>
+        </p:style>
+        <p:txBody>
+          <a:bodyPr rtlCol="0" anchor="ctr" wrap="square"/>
+          <a:lstStyle/>
+          <a:p>
+            <a:pPr algn="ctr"/>
+            <a:r>
+              <a:rPr sz="1000" b="0">
+                <a:solidFill>
+                  <a:srgbClr val="2C3E50"/>
+                </a:solidFill>
+              </a:rPr>
+              <a:t>20</a:t>
+            </a:r>
+          </a:p>
+        </p:txBody>
+      </p:sp>
+      <p:sp>
+        <p:nvSpPr>
+          <p:cNvPr id="95" name="Rounded Rectangle 94"/>
+          <p:cNvSpPr/>
+          <p:nvPr/>
+        </p:nvSpPr>
+        <p:spPr>
+          <a:xfrm>
+            <a:off x="6583680" y="6025896"/>
+            <a:ext cx="777240" cy="347472"/>
+          </a:xfrm>
+          <a:prstGeom prst="roundRect">
+            <a:avLst/>
+          </a:prstGeom>
+          <a:solidFill>
+            <a:srgbClr val="27AE60"/>
+          </a:solidFill>
+          <a:ln>
+            <a:noFill/>
+          </a:ln>
+          <a:effectLst/>
+        </p:spPr>
+        <p:style>
+          <a:lnRef idx="1">
+            <a:schemeClr val="accent1"/>
+          </a:lnRef>
+          <a:fillRef idx="3">
+            <a:schemeClr val="accent1"/>
+          </a:fillRef>
+          <a:effectRef idx="2">
+            <a:schemeClr val="accent1"/>
+          </a:effectRef>
+          <a:fontRef idx="minor">
+            <a:schemeClr val="lt1"/>
+          </a:fontRef>
+        </p:style>
+        <p:txBody>
+          <a:bodyPr rtlCol="0" anchor="ctr" wrap="square"/>
+          <a:lstStyle/>
+          <a:p>
+            <a:pPr algn="ctr"/>
+            <a:r>
+              <a:rPr sz="1000" b="0">
+                <a:solidFill>
+                  <a:srgbClr val="FFFFFF"/>
+                </a:solidFill>
+              </a:rPr>
+              <a:t>98%</a:t>
+            </a:r>
+          </a:p>
+        </p:txBody>
+      </p:sp>
+      <p:sp>
+        <p:nvSpPr>
+          <p:cNvPr id="96" name="Rounded Rectangle 95"/>
+          <p:cNvSpPr/>
+          <p:nvPr/>
+        </p:nvSpPr>
+        <p:spPr>
+          <a:xfrm>
+            <a:off x="274320" y="6428232"/>
+            <a:ext cx="2194560" cy="411480"/>
+          </a:xfrm>
+          <a:prstGeom prst="roundRect">
+            <a:avLst/>
+          </a:prstGeom>
+          <a:solidFill>
+            <a:srgbClr val="003C6E"/>
+          </a:solidFill>
+          <a:ln>
+            <a:noFill/>
+          </a:ln>
+          <a:effectLst/>
+        </p:spPr>
+        <p:style>
+          <a:lnRef idx="1">
+            <a:schemeClr val="accent1"/>
+          </a:lnRef>
+          <a:fillRef idx="3">
+            <a:schemeClr val="accent1"/>
+          </a:fillRef>
+          <a:effectRef idx="2">
+            <a:schemeClr val="accent1"/>
+          </a:effectRef>
+          <a:fontRef idx="minor">
+            <a:schemeClr val="lt1"/>
+          </a:fontRef>
+        </p:style>
+        <p:txBody>
+          <a:bodyPr rtlCol="0" anchor="ctr" wrap="square"/>
+          <a:lstStyle/>
+          <a:p>
+            <a:pPr algn="l"/>
+            <a:r>
+              <a:rPr sz="1100" b="1">
+                <a:solidFill>
+                  <a:srgbClr val="FFFFFF"/>
+                </a:solidFill>
+              </a:rPr>
+              <a:t>TOTAL</a:t>
+            </a:r>
+          </a:p>
+        </p:txBody>
+      </p:sp>
+      <p:sp>
+        <p:nvSpPr>
+          <p:cNvPr id="97" name="Rounded Rectangle 96"/>
+          <p:cNvSpPr/>
+          <p:nvPr/>
+        </p:nvSpPr>
+        <p:spPr>
+          <a:xfrm>
+            <a:off x="2468880" y="6428232"/>
+            <a:ext cx="822960" cy="411480"/>
+          </a:xfrm>
+          <a:prstGeom prst="roundRect">
+            <a:avLst/>
+          </a:prstGeom>
+          <a:solidFill>
+            <a:srgbClr val="003C6E"/>
+          </a:solidFill>
+          <a:ln>
+            <a:noFill/>
+          </a:ln>
+          <a:effectLst/>
+        </p:spPr>
+        <p:style>
+          <a:lnRef idx="1">
+            <a:schemeClr val="accent1"/>
+          </a:lnRef>
+          <a:fillRef idx="3">
+            <a:schemeClr val="accent1"/>
+          </a:fillRef>
+          <a:effectRef idx="2">
+            <a:schemeClr val="accent1"/>
+          </a:effectRef>
+          <a:fontRef idx="minor">
+            <a:schemeClr val="lt1"/>
+          </a:fontRef>
+        </p:style>
+        <p:txBody>
+          <a:bodyPr rtlCol="0" anchor="ctr"/>
+          <a:lstStyle/>
+          <a:p>
+            <a:pPr algn="ctr"/>
+          </a:p>
+        </p:txBody>
+      </p:sp>
+      <p:sp>
+        <p:nvSpPr>
+          <p:cNvPr id="98" name="Rounded Rectangle 97"/>
+          <p:cNvSpPr/>
+          <p:nvPr/>
+        </p:nvSpPr>
+        <p:spPr>
+          <a:xfrm>
+            <a:off x="3291840" y="6428232"/>
+            <a:ext cx="822960" cy="411480"/>
+          </a:xfrm>
+          <a:prstGeom prst="roundRect">
+            <a:avLst/>
+          </a:prstGeom>
+          <a:solidFill>
+            <a:srgbClr val="003C6E"/>
+          </a:solidFill>
+          <a:ln>
+            <a:noFill/>
+          </a:ln>
+          <a:effectLst/>
+        </p:spPr>
+        <p:style>
+          <a:lnRef idx="1">
+            <a:schemeClr val="accent1"/>
+          </a:lnRef>
+          <a:fillRef idx="3">
+            <a:schemeClr val="accent1"/>
+          </a:fillRef>
+          <a:effectRef idx="2">
+            <a:schemeClr val="accent1"/>
+          </a:effectRef>
+          <a:fontRef idx="minor">
+            <a:schemeClr val="lt1"/>
+          </a:fontRef>
+        </p:style>
+        <p:txBody>
+          <a:bodyPr rtlCol="0" anchor="ctr"/>
+          <a:lstStyle/>
+          <a:p>
+            <a:pPr algn="ctr"/>
+          </a:p>
+        </p:txBody>
+      </p:sp>
+      <p:sp>
+        <p:nvSpPr>
+          <p:cNvPr id="99" name="Rounded Rectangle 98"/>
+          <p:cNvSpPr/>
+          <p:nvPr/>
+        </p:nvSpPr>
+        <p:spPr>
+          <a:xfrm>
+            <a:off x="4114800" y="6428232"/>
+            <a:ext cx="548640" cy="411480"/>
+          </a:xfrm>
+          <a:prstGeom prst="roundRect">
+            <a:avLst/>
+          </a:prstGeom>
+          <a:solidFill>
+            <a:srgbClr val="003C6E"/>
+          </a:solidFill>
+          <a:ln>
+            <a:noFill/>
+          </a:ln>
+          <a:effectLst/>
+        </p:spPr>
+        <p:style>
+          <a:lnRef idx="1">
+            <a:schemeClr val="accent1"/>
+          </a:lnRef>
+          <a:fillRef idx="3">
+            <a:schemeClr val="accent1"/>
+          </a:fillRef>
+          <a:effectRef idx="2">
+            <a:schemeClr val="accent1"/>
+          </a:effectRef>
+          <a:fontRef idx="minor">
+            <a:schemeClr val="lt1"/>
+          </a:fontRef>
+        </p:style>
+        <p:txBody>
+          <a:bodyPr rtlCol="0" anchor="ctr"/>
+          <a:lstStyle/>
+          <a:p>
+            <a:pPr algn="ctr"/>
+          </a:p>
+        </p:txBody>
+      </p:sp>
+      <p:sp>
+        <p:nvSpPr>
+          <p:cNvPr id="100" name="Rounded Rectangle 99"/>
+          <p:cNvSpPr/>
+          <p:nvPr/>
+        </p:nvSpPr>
+        <p:spPr>
+          <a:xfrm>
+            <a:off x="4663440" y="6428232"/>
+            <a:ext cx="960120" cy="411480"/>
+          </a:xfrm>
+          <a:prstGeom prst="roundRect">
+            <a:avLst/>
+          </a:prstGeom>
+          <a:solidFill>
+            <a:srgbClr val="27AE60"/>
+          </a:solidFill>
+          <a:ln>
+            <a:noFill/>
+          </a:ln>
+          <a:effectLst/>
+        </p:spPr>
+        <p:style>
+          <a:lnRef idx="1">
+            <a:schemeClr val="accent1"/>
+          </a:lnRef>
+          <a:fillRef idx="3">
+            <a:schemeClr val="accent1"/>
+          </a:fillRef>
+          <a:effectRef idx="2">
+            <a:schemeClr val="accent1"/>
+          </a:effectRef>
+          <a:fontRef idx="minor">
+            <a:schemeClr val="lt1"/>
+          </a:fontRef>
+        </p:style>
+        <p:txBody>
+          <a:bodyPr rtlCol="0" anchor="ctr" wrap="square"/>
+          <a:lstStyle/>
+          <a:p>
+            <a:pPr algn="ctr"/>
+            <a:r>
+              <a:rPr sz="1100" b="1">
+                <a:solidFill>
+                  <a:srgbClr val="FFFFFF"/>
+                </a:solidFill>
+              </a:rPr>
+              <a:t>14,680</a:t>
+            </a:r>
+          </a:p>
+        </p:txBody>
+      </p:sp>
+      <p:sp>
+        <p:nvSpPr>
+          <p:cNvPr id="101" name="Rounded Rectangle 100"/>
+          <p:cNvSpPr/>
+          <p:nvPr/>
+        </p:nvSpPr>
+        <p:spPr>
+          <a:xfrm>
+            <a:off x="5623560" y="6428232"/>
+            <a:ext cx="960120" cy="411480"/>
+          </a:xfrm>
+          <a:prstGeom prst="roundRect">
+            <a:avLst/>
+          </a:prstGeom>
+          <a:solidFill>
+            <a:srgbClr val="27AE60"/>
+          </a:solidFill>
+          <a:ln>
+            <a:noFill/>
+          </a:ln>
+          <a:effectLst/>
+        </p:spPr>
+        <p:style>
+          <a:lnRef idx="1">
+            <a:schemeClr val="accent1"/>
+          </a:lnRef>
+          <a:fillRef idx="3">
+            <a:schemeClr val="accent1"/>
+          </a:fillRef>
+          <a:effectRef idx="2">
+            <a:schemeClr val="accent1"/>
+          </a:effectRef>
+          <a:fontRef idx="minor">
+            <a:schemeClr val="lt1"/>
+          </a:fontRef>
+        </p:style>
+        <p:txBody>
+          <a:bodyPr rtlCol="0" anchor="ctr" wrap="square"/>
+          <a:lstStyle/>
+          <a:p>
+            <a:pPr algn="ctr"/>
+            <a:r>
+              <a:rPr sz="1100" b="1">
+                <a:solidFill>
+                  <a:srgbClr val="FFFFFF"/>
+                </a:solidFill>
+              </a:rPr>
+              <a:t>269</a:t>
+            </a:r>
+          </a:p>
+        </p:txBody>
+      </p:sp>
+      <p:sp>
+        <p:nvSpPr>
+          <p:cNvPr id="102" name="Rounded Rectangle 101"/>
+          <p:cNvSpPr/>
+          <p:nvPr/>
+        </p:nvSpPr>
+        <p:spPr>
+          <a:xfrm>
+            <a:off x="6583680" y="6428232"/>
+            <a:ext cx="777240" cy="411480"/>
+          </a:xfrm>
+          <a:prstGeom prst="roundRect">
+            <a:avLst/>
+          </a:prstGeom>
+          <a:solidFill>
+            <a:srgbClr val="27AE60"/>
+          </a:solidFill>
+          <a:ln>
+            <a:noFill/>
+          </a:ln>
+          <a:effectLst/>
+        </p:spPr>
+        <p:style>
+          <a:lnRef idx="1">
+            <a:schemeClr val="accent1"/>
+          </a:lnRef>
+          <a:fillRef idx="3">
+            <a:schemeClr val="accent1"/>
+          </a:fillRef>
+          <a:effectRef idx="2">
+            <a:schemeClr val="accent1"/>
+          </a:effectRef>
+          <a:fontRef idx="minor">
+            <a:schemeClr val="lt1"/>
+          </a:fontRef>
+        </p:style>
+        <p:txBody>
+          <a:bodyPr rtlCol="0" anchor="ctr" wrap="square"/>
+          <a:lstStyle/>
+          <a:p>
+            <a:pPr algn="ctr"/>
+            <a:r>
+              <a:rPr sz="1100" b="1">
+                <a:solidFill>
+                  <a:srgbClr val="FFFFFF"/>
+                </a:solidFill>
+              </a:rPr>
+              <a:t>98%</a:t>
+            </a:r>
+          </a:p>
+        </p:txBody>
+      </p:sp>
+      <p:sp>
+        <p:nvSpPr>
+          <p:cNvPr id="103" name="Rounded Rectangle 102"/>
+          <p:cNvSpPr/>
+          <p:nvPr/>
+        </p:nvSpPr>
+        <p:spPr>
+          <a:xfrm>
+            <a:off x="7498079" y="1417320"/>
+            <a:ext cx="4389120" cy="3474720"/>
           </a:xfrm>
           <a:prstGeom prst="roundRect">
             <a:avLst/>
@@ -4689,67 +9766,35 @@
           <a:bodyPr rtlCol="0" anchor="ctr" wrap="square"/>
           <a:lstStyle/>
           <a:p>
-            <a:pPr algn="ctr"/>
-            <a:r>
-              <a:rPr sz="1600" b="1">
+            <a:pPr algn="l"/>
+            <a:r>
+              <a:rPr sz="1400" b="0">
                 <a:solidFill>
                   <a:srgbClr val="FFFFFF"/>
                 </a:solidFill>
               </a:rPr>
-              <a:t>Mid-Size Enterprise</a:t>
-            </a:r>
-          </a:p>
-        </p:txBody>
-      </p:sp>
-      <p:sp>
-        <p:nvSpPr>
-          <p:cNvPr id="6" name="TextBox 5"/>
-          <p:cNvSpPr txBox="1"/>
-          <p:nvPr/>
-        </p:nvSpPr>
-        <p:spPr>
-          <a:xfrm>
-            <a:off x="594360" y="2011680"/>
-            <a:ext cx="3200400" cy="4114800"/>
-          </a:xfrm>
-          <a:prstGeom prst="rect">
-            <a:avLst/>
-          </a:prstGeom>
-          <a:noFill/>
-        </p:spPr>
-        <p:txBody>
-          <a:bodyPr wrap="square">
-            <a:spAutoFit/>
-          </a:bodyPr>
-          <a:lstStyle/>
-          <a:p>
-            <a:pPr algn="ctr"/>
-            <a:r>
-              <a:rPr sz="1300" b="0">
-                <a:solidFill>
-                  <a:srgbClr val="2C3E50"/>
-                </a:solidFill>
-              </a:rPr>
-              <a:t>50–100 mappings
-20–30 workflows
-1–2 database types
-Timeline: 3–4 weeks
-FTEs: 1 engineer
-Savings: $400K–$800K</a:t>
-            </a:r>
-          </a:p>
-        </p:txBody>
-      </p:sp>
-      <p:sp>
-        <p:nvSpPr>
-          <p:cNvPr id="7" name="Rounded Rectangle 6"/>
-          <p:cNvSpPr/>
-          <p:nvPr/>
-        </p:nvSpPr>
-        <p:spPr>
-          <a:xfrm>
-            <a:off x="4251960" y="1371600"/>
-            <a:ext cx="3474720" cy="548640"/>
+              <a:t>Manual: 14,680 hours
+= 92 FTE-months
+= $1,395K labor
+Automated: 269 hours
+= 1.7 FTE-months
+= $26K labor
+Net Saved: $1,369K
+(98% reduction)</a:t>
+            </a:r>
+          </a:p>
+        </p:txBody>
+      </p:sp>
+      <p:sp>
+        <p:nvSpPr>
+          <p:cNvPr id="104" name="Rounded Rectangle 103"/>
+          <p:cNvSpPr/>
+          <p:nvPr/>
+        </p:nvSpPr>
+        <p:spPr>
+          <a:xfrm>
+            <a:off x="7498079" y="5029200"/>
+            <a:ext cx="4389120" cy="1188720"/>
           </a:xfrm>
           <a:prstGeom prst="roundRect">
             <a:avLst/>
@@ -4782,144 +9827,14 @@
           <a:p>
             <a:pPr algn="ctr"/>
             <a:r>
-              <a:rPr sz="1600" b="1">
+              <a:rPr sz="1400" b="1">
                 <a:solidFill>
                   <a:srgbClr val="FFFFFF"/>
                 </a:solidFill>
               </a:rPr>
-              <a:t>Large Enterprise</a:t>
-            </a:r>
-          </a:p>
-        </p:txBody>
-      </p:sp>
-      <p:sp>
-        <p:nvSpPr>
-          <p:cNvPr id="8" name="TextBox 7"/>
-          <p:cNvSpPr txBox="1"/>
-          <p:nvPr/>
-        </p:nvSpPr>
-        <p:spPr>
-          <a:xfrm>
-            <a:off x="4389120" y="2011680"/>
-            <a:ext cx="3200400" cy="4114800"/>
-          </a:xfrm>
-          <a:prstGeom prst="rect">
-            <a:avLst/>
-          </a:prstGeom>
-          <a:noFill/>
-        </p:spPr>
-        <p:txBody>
-          <a:bodyPr wrap="square">
-            <a:spAutoFit/>
-          </a:bodyPr>
-          <a:lstStyle/>
-          <a:p>
-            <a:pPr algn="ctr"/>
-            <a:r>
-              <a:rPr sz="1300" b="0">
-                <a:solidFill>
-                  <a:srgbClr val="2C3E50"/>
-                </a:solidFill>
-              </a:rPr>
-              <a:t>200–500 mappings
-50–100 workflows
-3–4 database types
-AutoSys JIL jobs
-Timeline: 6–10 weeks
-FTEs: 2 engineers
-Savings: $1.5M–$3M</a:t>
-            </a:r>
-          </a:p>
-        </p:txBody>
-      </p:sp>
-      <p:sp>
-        <p:nvSpPr>
-          <p:cNvPr id="9" name="Rounded Rectangle 8"/>
-          <p:cNvSpPr/>
-          <p:nvPr/>
-        </p:nvSpPr>
-        <p:spPr>
-          <a:xfrm>
-            <a:off x="8046720" y="1371600"/>
-            <a:ext cx="3474720" cy="548640"/>
-          </a:xfrm>
-          <a:prstGeom prst="roundRect">
-            <a:avLst/>
-          </a:prstGeom>
-          <a:solidFill>
-            <a:srgbClr val="8E44AD"/>
-          </a:solidFill>
-          <a:ln>
-            <a:noFill/>
-          </a:ln>
-          <a:effectLst/>
-        </p:spPr>
-        <p:style>
-          <a:lnRef idx="1">
-            <a:schemeClr val="accent1"/>
-          </a:lnRef>
-          <a:fillRef idx="3">
-            <a:schemeClr val="accent1"/>
-          </a:fillRef>
-          <a:effectRef idx="2">
-            <a:schemeClr val="accent1"/>
-          </a:effectRef>
-          <a:fontRef idx="minor">
-            <a:schemeClr val="lt1"/>
-          </a:fontRef>
-        </p:style>
-        <p:txBody>
-          <a:bodyPr rtlCol="0" anchor="ctr" wrap="square"/>
-          <a:lstStyle/>
-          <a:p>
-            <a:pPr algn="ctr"/>
-            <a:r>
-              <a:rPr sz="1600" b="1">
-                <a:solidFill>
-                  <a:srgbClr val="FFFFFF"/>
-                </a:solidFill>
-              </a:rPr>
-              <a:t>Global Financial Org</a:t>
-            </a:r>
-          </a:p>
-        </p:txBody>
-      </p:sp>
-      <p:sp>
-        <p:nvSpPr>
-          <p:cNvPr id="10" name="TextBox 9"/>
-          <p:cNvSpPr txBox="1"/>
-          <p:nvPr/>
-        </p:nvSpPr>
-        <p:spPr>
-          <a:xfrm>
-            <a:off x="8183880" y="2011680"/>
-            <a:ext cx="3200400" cy="4114800"/>
-          </a:xfrm>
-          <a:prstGeom prst="rect">
-            <a:avLst/>
-          </a:prstGeom>
-          <a:noFill/>
-        </p:spPr>
-        <p:txBody>
-          <a:bodyPr wrap="square">
-            <a:spAutoFit/>
-          </a:bodyPr>
-          <a:lstStyle/>
-          <a:p>
-            <a:pPr algn="ctr"/>
-            <a:r>
-              <a:rPr sz="1300" b="0">
-                <a:solidFill>
-                  <a:srgbClr val="2C3E50"/>
-                </a:solidFill>
-              </a:rPr>
-              <a:t>1,000+ mappings
-200+ workflows
-6 database types
-AutoSys + PL/SQL heavy
-Timeline: 12–16 weeks
-FTEs: 3–4 engineers
-Savings: $4M–$8M</a:t>
+              <a:t>Additional Savings:
++$1.2–3.5M/year
+Informatica license elimination</a:t>
             </a:r>
           </a:p>
         </p:txBody>
@@ -5023,7 +9938,7 @@
                   <a:srgbClr val="FFFFFF"/>
                 </a:solidFill>
               </a:rPr>
-              <a:t>Security, Governance &amp; Compliance</a:t>
+              <a:t>Enterprise Scenarios &amp; Scale</a:t>
             </a:r>
           </a:p>
         </p:txBody>
@@ -5057,21 +9972,73 @@
                   <a:srgbClr val="BDC3C7"/>
                 </a:solidFill>
               </a:rPr>
-              <a:t>Enterprise-grade safeguards built-in</a:t>
-            </a:r>
-          </a:p>
-        </p:txBody>
-      </p:sp>
-      <p:sp>
-        <p:nvSpPr>
-          <p:cNvPr id="5" name="TextBox 4"/>
+              <a:t>Real-world migration complexity handled</a:t>
+            </a:r>
+          </a:p>
+        </p:txBody>
+      </p:sp>
+      <p:sp>
+        <p:nvSpPr>
+          <p:cNvPr id="5" name="Rounded Rectangle 4"/>
+          <p:cNvSpPr/>
+          <p:nvPr/>
+        </p:nvSpPr>
+        <p:spPr>
+          <a:xfrm>
+            <a:off x="457200" y="1371600"/>
+            <a:ext cx="3474720" cy="548640"/>
+          </a:xfrm>
+          <a:prstGeom prst="roundRect">
+            <a:avLst/>
+          </a:prstGeom>
+          <a:solidFill>
+            <a:srgbClr val="0078D4"/>
+          </a:solidFill>
+          <a:ln>
+            <a:noFill/>
+          </a:ln>
+          <a:effectLst/>
+        </p:spPr>
+        <p:style>
+          <a:lnRef idx="1">
+            <a:schemeClr val="accent1"/>
+          </a:lnRef>
+          <a:fillRef idx="3">
+            <a:schemeClr val="accent1"/>
+          </a:fillRef>
+          <a:effectRef idx="2">
+            <a:schemeClr val="accent1"/>
+          </a:effectRef>
+          <a:fontRef idx="minor">
+            <a:schemeClr val="lt1"/>
+          </a:fontRef>
+        </p:style>
+        <p:txBody>
+          <a:bodyPr rtlCol="0" anchor="ctr" wrap="square"/>
+          <a:lstStyle/>
+          <a:p>
+            <a:pPr algn="ctr"/>
+            <a:r>
+              <a:rPr sz="1600" b="1">
+                <a:solidFill>
+                  <a:srgbClr val="FFFFFF"/>
+                </a:solidFill>
+              </a:rPr>
+              <a:t>Mid-Size Enterprise</a:t>
+            </a:r>
+          </a:p>
+        </p:txBody>
+      </p:sp>
+      <p:sp>
+        <p:nvSpPr>
+          <p:cNvPr id="6" name="TextBox 5"/>
           <p:cNvSpPr txBox="1"/>
           <p:nvPr/>
         </p:nvSpPr>
         <p:spPr>
           <a:xfrm>
-            <a:off x="457200" y="1463040"/>
-            <a:ext cx="6858000" cy="5029200"/>
+            <a:off x="594360" y="2011680"/>
+            <a:ext cx="3200400" cy="4114800"/>
           </a:xfrm>
           <a:prstGeom prst="rect">
             <a:avLst/>
@@ -5084,173 +10051,39 @@
           </a:bodyPr>
           <a:lstStyle/>
           <a:p>
-            <a:pPr>
-              <a:spcAft>
-                <a:spcPts val="600"/>
-              </a:spcAft>
-            </a:pPr>
-            <a:r>
-              <a:rPr sz="1500">
-                <a:solidFill>
-                  <a:srgbClr val="2C3E50"/>
-                </a:solidFill>
-              </a:rPr>
-              <a:t>▸  Credential sanitization — passwords/keys stripped from all generated artifacts</a:t>
-            </a:r>
-          </a:p>
-          <a:p>
-            <a:pPr>
-              <a:spcAft>
-                <a:spcPts val="600"/>
-              </a:spcAft>
-            </a:pPr>
-            <a:r>
-              <a:rPr sz="1500">
-                <a:solidFill>
-                  <a:srgbClr val="2C3E50"/>
-                </a:solidFill>
-              </a:rPr>
-              <a:t>▸  PII detection — flags columns containing personal data (names, SSN, email patterns)</a:t>
-            </a:r>
-          </a:p>
-          <a:p>
-            <a:pPr>
-              <a:spcAft>
-                <a:spcPts val="600"/>
-              </a:spcAft>
-            </a:pPr>
-            <a:r>
-              <a:rPr sz="1500">
-                <a:solidFill>
-                  <a:srgbClr val="2C3E50"/>
-                </a:solidFill>
-              </a:rPr>
-              <a:t>▸  Audit logging — every migration action recorded in JSON audit trail</a:t>
-            </a:r>
-          </a:p>
-          <a:p>
-            <a:pPr>
-              <a:spcAft>
-                <a:spcPts val="600"/>
-              </a:spcAft>
-            </a:pPr>
-            <a:r>
-              <a:rPr sz="1500">
-                <a:solidFill>
-                  <a:srgbClr val="2C3E50"/>
-                </a:solidFill>
-              </a:rPr>
-              <a:t>▸  Multi-tenant Key Vault integration — secrets resolved via notebookutils / dbutils</a:t>
-            </a:r>
-          </a:p>
-          <a:p>
-            <a:pPr>
-              <a:spcAft>
-                <a:spcPts val="600"/>
-              </a:spcAft>
-            </a:pPr>
-            <a:r>
-              <a:rPr sz="1500">
-                <a:solidFill>
-                  <a:srgbClr val="2C3E50"/>
-                </a:solidFill>
-              </a:rPr>
-              <a:t>▸  Data Quality rules — DQ assertions auto-generated from mapping metadata</a:t>
-            </a:r>
-          </a:p>
-          <a:p>
-            <a:pPr>
-              <a:spcAft>
-                <a:spcPts val="600"/>
-              </a:spcAft>
-            </a:pPr>
-            <a:r>
-              <a:rPr sz="1500">
-                <a:solidFill>
-                  <a:srgbClr val="2C3E50"/>
-                </a:solidFill>
-              </a:rPr>
-              <a:t>▸  Column-level lineage — full source → transform → target traceability</a:t>
-            </a:r>
-          </a:p>
-          <a:p>
-            <a:pPr>
-              <a:spcAft>
-                <a:spcPts val="600"/>
-              </a:spcAft>
-            </a:pPr>
-            <a:r>
-              <a:rPr sz="1500">
-                <a:solidFill>
-                  <a:srgbClr val="2C3E50"/>
-                </a:solidFill>
-              </a:rPr>
-              <a:t>▸  Microsoft Purview integration — Apache Atlas v2 metadata entities + lineage</a:t>
-            </a:r>
-          </a:p>
-          <a:p>
-            <a:pPr>
-              <a:spcAft>
-                <a:spcPts val="600"/>
-              </a:spcAft>
-            </a:pPr>
-            <a:r>
-              <a:rPr sz="1500">
-                <a:solidFill>
-                  <a:srgbClr val="2C3E50"/>
-                </a:solidFill>
-              </a:rPr>
-              <a:t>▸  Unity Catalog tags — ALTER TABLE SET TAGS for migration provenance</a:t>
-            </a:r>
-          </a:p>
-          <a:p>
-            <a:pPr>
-              <a:spcAft>
-                <a:spcPts val="600"/>
-              </a:spcAft>
-            </a:pPr>
-            <a:r>
-              <a:rPr sz="1500">
-                <a:solidFill>
-                  <a:srgbClr val="2C3E50"/>
-                </a:solidFill>
-              </a:rPr>
-              <a:t>▸  Impact analysis — trace downstream effects of source table changes</a:t>
-            </a:r>
-          </a:p>
-          <a:p>
-            <a:pPr>
-              <a:spcAft>
-                <a:spcPts val="600"/>
-              </a:spcAft>
-            </a:pPr>
-            <a:r>
-              <a:rPr sz="1500">
-                <a:solidFill>
-                  <a:srgbClr val="2C3E50"/>
-                </a:solidFill>
-              </a:rPr>
-              <a:t>▸  5-level validation framework — statistical verification of migrated data</a:t>
-            </a:r>
-          </a:p>
-        </p:txBody>
-      </p:sp>
-      <p:sp>
-        <p:nvSpPr>
-          <p:cNvPr id="6" name="Rounded Rectangle 5"/>
-          <p:cNvSpPr/>
-          <p:nvPr/>
-        </p:nvSpPr>
-        <p:spPr>
-          <a:xfrm>
-            <a:off x="8046720" y="1645920"/>
-            <a:ext cx="3657600" cy="4114800"/>
-          </a:xfrm>
-          <a:prstGeom prst="roundRect">
-            <a:avLst/>
-          </a:prstGeom>
-          <a:solidFill>
-            <a:srgbClr val="003C6E"/>
+            <a:pPr algn="ctr"/>
+            <a:r>
+              <a:rPr sz="1300" b="0">
+                <a:solidFill>
+                  <a:srgbClr val="2C3E50"/>
+                </a:solidFill>
+              </a:rPr>
+              <a:t>50–100 mappings
+20–30 workflows
+1–2 database types
+Timeline: 3–4 weeks
+FTEs: 1 engineer
+Savings: $400K–$800K</a:t>
+            </a:r>
+          </a:p>
+        </p:txBody>
+      </p:sp>
+      <p:sp>
+        <p:nvSpPr>
+          <p:cNvPr id="7" name="Rounded Rectangle 6"/>
+          <p:cNvSpPr/>
+          <p:nvPr/>
+        </p:nvSpPr>
+        <p:spPr>
+          <a:xfrm>
+            <a:off x="4251960" y="1371600"/>
+            <a:ext cx="3474720" cy="548640"/>
+          </a:xfrm>
+          <a:prstGeom prst="roundRect">
+            <a:avLst/>
+          </a:prstGeom>
+          <a:solidFill>
+            <a:srgbClr val="FF4500"/>
           </a:solidFill>
           <a:ln>
             <a:noFill/>
@@ -5277,19 +10110,144 @@
           <a:p>
             <a:pPr algn="ctr"/>
             <a:r>
-              <a:rPr sz="1400" b="0">
+              <a:rPr sz="1600" b="1">
                 <a:solidFill>
                   <a:srgbClr val="FFFFFF"/>
                 </a:solidFill>
               </a:rPr>
-              <a:t>Compliance Coverage
-✓ SOX audit trail
-✓ GDPR PII detection
-✓ HIPAA data masking flags
-✓ Zero credential exposure
-✓ Role-based access via
-   Key Vault / Unity Catalog
-✓ Full lineage for regulators</a:t>
+              <a:t>Large Enterprise</a:t>
+            </a:r>
+          </a:p>
+        </p:txBody>
+      </p:sp>
+      <p:sp>
+        <p:nvSpPr>
+          <p:cNvPr id="8" name="TextBox 7"/>
+          <p:cNvSpPr txBox="1"/>
+          <p:nvPr/>
+        </p:nvSpPr>
+        <p:spPr>
+          <a:xfrm>
+            <a:off x="4389120" y="2011680"/>
+            <a:ext cx="3200400" cy="4114800"/>
+          </a:xfrm>
+          <a:prstGeom prst="rect">
+            <a:avLst/>
+          </a:prstGeom>
+          <a:noFill/>
+        </p:spPr>
+        <p:txBody>
+          <a:bodyPr wrap="square">
+            <a:spAutoFit/>
+          </a:bodyPr>
+          <a:lstStyle/>
+          <a:p>
+            <a:pPr algn="ctr"/>
+            <a:r>
+              <a:rPr sz="1300" b="0">
+                <a:solidFill>
+                  <a:srgbClr val="2C3E50"/>
+                </a:solidFill>
+              </a:rPr>
+              <a:t>200–500 mappings
+50–100 workflows
+3–4 database types
+AutoSys JIL jobs
+Timeline: 6–10 weeks
+FTEs: 2 engineers
+Savings: $1.5M–$3M</a:t>
+            </a:r>
+          </a:p>
+        </p:txBody>
+      </p:sp>
+      <p:sp>
+        <p:nvSpPr>
+          <p:cNvPr id="9" name="Rounded Rectangle 8"/>
+          <p:cNvSpPr/>
+          <p:nvPr/>
+        </p:nvSpPr>
+        <p:spPr>
+          <a:xfrm>
+            <a:off x="8046720" y="1371600"/>
+            <a:ext cx="3474720" cy="548640"/>
+          </a:xfrm>
+          <a:prstGeom prst="roundRect">
+            <a:avLst/>
+          </a:prstGeom>
+          <a:solidFill>
+            <a:srgbClr val="8E44AD"/>
+          </a:solidFill>
+          <a:ln>
+            <a:noFill/>
+          </a:ln>
+          <a:effectLst/>
+        </p:spPr>
+        <p:style>
+          <a:lnRef idx="1">
+            <a:schemeClr val="accent1"/>
+          </a:lnRef>
+          <a:fillRef idx="3">
+            <a:schemeClr val="accent1"/>
+          </a:fillRef>
+          <a:effectRef idx="2">
+            <a:schemeClr val="accent1"/>
+          </a:effectRef>
+          <a:fontRef idx="minor">
+            <a:schemeClr val="lt1"/>
+          </a:fontRef>
+        </p:style>
+        <p:txBody>
+          <a:bodyPr rtlCol="0" anchor="ctr" wrap="square"/>
+          <a:lstStyle/>
+          <a:p>
+            <a:pPr algn="ctr"/>
+            <a:r>
+              <a:rPr sz="1600" b="1">
+                <a:solidFill>
+                  <a:srgbClr val="FFFFFF"/>
+                </a:solidFill>
+              </a:rPr>
+              <a:t>Global Financial Org</a:t>
+            </a:r>
+          </a:p>
+        </p:txBody>
+      </p:sp>
+      <p:sp>
+        <p:nvSpPr>
+          <p:cNvPr id="10" name="TextBox 9"/>
+          <p:cNvSpPr txBox="1"/>
+          <p:nvPr/>
+        </p:nvSpPr>
+        <p:spPr>
+          <a:xfrm>
+            <a:off x="8183880" y="2011680"/>
+            <a:ext cx="3200400" cy="4114800"/>
+          </a:xfrm>
+          <a:prstGeom prst="rect">
+            <a:avLst/>
+          </a:prstGeom>
+          <a:noFill/>
+        </p:spPr>
+        <p:txBody>
+          <a:bodyPr wrap="square">
+            <a:spAutoFit/>
+          </a:bodyPr>
+          <a:lstStyle/>
+          <a:p>
+            <a:pPr algn="ctr"/>
+            <a:r>
+              <a:rPr sz="1300" b="0">
+                <a:solidFill>
+                  <a:srgbClr val="2C3E50"/>
+                </a:solidFill>
+              </a:rPr>
+              <a:t>1,000+ mappings
+200+ workflows
+6 database types
+AutoSys + PL/SQL heavy
+Timeline: 12–16 weeks
+FTEs: 3–4 engineers
+Savings: $4M–$8M</a:t>
             </a:r>
           </a:p>
         </p:txBody>
@@ -5303,6 +10261,376 @@
 </file>
 
 <file path=ppt/slides/slide13.xml><?xml version="1.0" encoding="utf-8"?>
+<p:sld xmlns:a="http://schemas.openxmlformats.org/drawingml/2006/main" xmlns:p="http://schemas.openxmlformats.org/presentationml/2006/main" xmlns:r="http://schemas.openxmlformats.org/officeDocument/2006/relationships">
+  <p:cSld>
+    <p:bg>
+      <p:bgPr>
+        <a:solidFill>
+          <a:srgbClr val="FFFFFF"/>
+        </a:solidFill>
+        <a:effectLst/>
+      </p:bgPr>
+    </p:bg>
+    <p:spTree>
+      <p:nvGrpSpPr>
+        <p:cNvPr id="1" name=""/>
+        <p:cNvGrpSpPr/>
+        <p:nvPr/>
+      </p:nvGrpSpPr>
+      <p:grpSpPr/>
+      <p:sp>
+        <p:nvSpPr>
+          <p:cNvPr id="2" name="Rounded Rectangle 1"/>
+          <p:cNvSpPr/>
+          <p:nvPr/>
+        </p:nvSpPr>
+        <p:spPr>
+          <a:xfrm>
+            <a:off x="0" y="0"/>
+            <a:ext cx="12191695" cy="1188720"/>
+          </a:xfrm>
+          <a:prstGeom prst="roundRect">
+            <a:avLst/>
+          </a:prstGeom>
+          <a:solidFill>
+            <a:srgbClr val="003C6E"/>
+          </a:solidFill>
+          <a:ln>
+            <a:noFill/>
+          </a:ln>
+          <a:effectLst/>
+        </p:spPr>
+        <p:style>
+          <a:lnRef idx="1">
+            <a:schemeClr val="accent1"/>
+          </a:lnRef>
+          <a:fillRef idx="3">
+            <a:schemeClr val="accent1"/>
+          </a:fillRef>
+          <a:effectRef idx="2">
+            <a:schemeClr val="accent1"/>
+          </a:effectRef>
+          <a:fontRef idx="minor">
+            <a:schemeClr val="lt1"/>
+          </a:fontRef>
+        </p:style>
+        <p:txBody>
+          <a:bodyPr rtlCol="0" anchor="ctr"/>
+          <a:lstStyle/>
+          <a:p>
+            <a:pPr algn="ctr"/>
+          </a:p>
+        </p:txBody>
+      </p:sp>
+      <p:sp>
+        <p:nvSpPr>
+          <p:cNvPr id="3" name="TextBox 2"/>
+          <p:cNvSpPr txBox="1"/>
+          <p:nvPr/>
+        </p:nvSpPr>
+        <p:spPr>
+          <a:xfrm>
+            <a:off x="548640" y="182880"/>
+            <a:ext cx="10058400" cy="548640"/>
+          </a:xfrm>
+          <a:prstGeom prst="rect">
+            <a:avLst/>
+          </a:prstGeom>
+          <a:noFill/>
+        </p:spPr>
+        <p:txBody>
+          <a:bodyPr wrap="square">
+            <a:spAutoFit/>
+          </a:bodyPr>
+          <a:lstStyle/>
+          <a:p>
+            <a:pPr algn="l"/>
+            <a:r>
+              <a:rPr sz="2800" b="1">
+                <a:solidFill>
+                  <a:srgbClr val="FFFFFF"/>
+                </a:solidFill>
+              </a:rPr>
+              <a:t>Security, Governance &amp; Compliance</a:t>
+            </a:r>
+          </a:p>
+        </p:txBody>
+      </p:sp>
+      <p:sp>
+        <p:nvSpPr>
+          <p:cNvPr id="4" name="TextBox 3"/>
+          <p:cNvSpPr txBox="1"/>
+          <p:nvPr/>
+        </p:nvSpPr>
+        <p:spPr>
+          <a:xfrm>
+            <a:off x="548640" y="685800"/>
+            <a:ext cx="10058400" cy="457200"/>
+          </a:xfrm>
+          <a:prstGeom prst="rect">
+            <a:avLst/>
+          </a:prstGeom>
+          <a:noFill/>
+        </p:spPr>
+        <p:txBody>
+          <a:bodyPr wrap="square">
+            <a:spAutoFit/>
+          </a:bodyPr>
+          <a:lstStyle/>
+          <a:p>
+            <a:pPr algn="l"/>
+            <a:r>
+              <a:rPr sz="1600" b="0">
+                <a:solidFill>
+                  <a:srgbClr val="BDC3C7"/>
+                </a:solidFill>
+              </a:rPr>
+              <a:t>Enterprise-grade safeguards built-in</a:t>
+            </a:r>
+          </a:p>
+        </p:txBody>
+      </p:sp>
+      <p:sp>
+        <p:nvSpPr>
+          <p:cNvPr id="5" name="TextBox 4"/>
+          <p:cNvSpPr txBox="1"/>
+          <p:nvPr/>
+        </p:nvSpPr>
+        <p:spPr>
+          <a:xfrm>
+            <a:off x="457200" y="1463040"/>
+            <a:ext cx="6858000" cy="5029200"/>
+          </a:xfrm>
+          <a:prstGeom prst="rect">
+            <a:avLst/>
+          </a:prstGeom>
+          <a:noFill/>
+        </p:spPr>
+        <p:txBody>
+          <a:bodyPr wrap="square">
+            <a:spAutoFit/>
+          </a:bodyPr>
+          <a:lstStyle/>
+          <a:p>
+            <a:pPr>
+              <a:spcAft>
+                <a:spcPts val="600"/>
+              </a:spcAft>
+            </a:pPr>
+            <a:r>
+              <a:rPr sz="1500">
+                <a:solidFill>
+                  <a:srgbClr val="2C3E50"/>
+                </a:solidFill>
+              </a:rPr>
+              <a:t>▸  Credential sanitization — passwords/keys stripped from all generated artifacts</a:t>
+            </a:r>
+          </a:p>
+          <a:p>
+            <a:pPr>
+              <a:spcAft>
+                <a:spcPts val="600"/>
+              </a:spcAft>
+            </a:pPr>
+            <a:r>
+              <a:rPr sz="1500">
+                <a:solidFill>
+                  <a:srgbClr val="2C3E50"/>
+                </a:solidFill>
+              </a:rPr>
+              <a:t>▸  PII detection — flags columns containing personal data (names, SSN, email patterns)</a:t>
+            </a:r>
+          </a:p>
+          <a:p>
+            <a:pPr>
+              <a:spcAft>
+                <a:spcPts val="600"/>
+              </a:spcAft>
+            </a:pPr>
+            <a:r>
+              <a:rPr sz="1500">
+                <a:solidFill>
+                  <a:srgbClr val="2C3E50"/>
+                </a:solidFill>
+              </a:rPr>
+              <a:t>▸  Audit logging — every migration action recorded in JSON audit trail</a:t>
+            </a:r>
+          </a:p>
+          <a:p>
+            <a:pPr>
+              <a:spcAft>
+                <a:spcPts val="600"/>
+              </a:spcAft>
+            </a:pPr>
+            <a:r>
+              <a:rPr sz="1500">
+                <a:solidFill>
+                  <a:srgbClr val="2C3E50"/>
+                </a:solidFill>
+              </a:rPr>
+              <a:t>▸  Multi-tenant Key Vault integration — secrets resolved via notebookutils / dbutils</a:t>
+            </a:r>
+          </a:p>
+          <a:p>
+            <a:pPr>
+              <a:spcAft>
+                <a:spcPts val="600"/>
+              </a:spcAft>
+            </a:pPr>
+            <a:r>
+              <a:rPr sz="1500">
+                <a:solidFill>
+                  <a:srgbClr val="2C3E50"/>
+                </a:solidFill>
+              </a:rPr>
+              <a:t>▸  Data Quality rules — DQ assertions auto-generated from mapping metadata</a:t>
+            </a:r>
+          </a:p>
+          <a:p>
+            <a:pPr>
+              <a:spcAft>
+                <a:spcPts val="600"/>
+              </a:spcAft>
+            </a:pPr>
+            <a:r>
+              <a:rPr sz="1500">
+                <a:solidFill>
+                  <a:srgbClr val="2C3E50"/>
+                </a:solidFill>
+              </a:rPr>
+              <a:t>▸  Column-level lineage — full source → transform → target traceability</a:t>
+            </a:r>
+          </a:p>
+          <a:p>
+            <a:pPr>
+              <a:spcAft>
+                <a:spcPts val="600"/>
+              </a:spcAft>
+            </a:pPr>
+            <a:r>
+              <a:rPr sz="1500">
+                <a:solidFill>
+                  <a:srgbClr val="2C3E50"/>
+                </a:solidFill>
+              </a:rPr>
+              <a:t>▸  Microsoft Purview integration — Apache Atlas v2 metadata entities + lineage</a:t>
+            </a:r>
+          </a:p>
+          <a:p>
+            <a:pPr>
+              <a:spcAft>
+                <a:spcPts val="600"/>
+              </a:spcAft>
+            </a:pPr>
+            <a:r>
+              <a:rPr sz="1500">
+                <a:solidFill>
+                  <a:srgbClr val="2C3E50"/>
+                </a:solidFill>
+              </a:rPr>
+              <a:t>▸  Unity Catalog tags — ALTER TABLE SET TAGS for migration provenance</a:t>
+            </a:r>
+          </a:p>
+          <a:p>
+            <a:pPr>
+              <a:spcAft>
+                <a:spcPts val="600"/>
+              </a:spcAft>
+            </a:pPr>
+            <a:r>
+              <a:rPr sz="1500">
+                <a:solidFill>
+                  <a:srgbClr val="2C3E50"/>
+                </a:solidFill>
+              </a:rPr>
+              <a:t>▸  Impact analysis — trace downstream effects of source table changes</a:t>
+            </a:r>
+          </a:p>
+          <a:p>
+            <a:pPr>
+              <a:spcAft>
+                <a:spcPts val="600"/>
+              </a:spcAft>
+            </a:pPr>
+            <a:r>
+              <a:rPr sz="1500">
+                <a:solidFill>
+                  <a:srgbClr val="2C3E50"/>
+                </a:solidFill>
+              </a:rPr>
+              <a:t>▸  5-level validation framework — statistical verification of migrated data</a:t>
+            </a:r>
+          </a:p>
+        </p:txBody>
+      </p:sp>
+      <p:sp>
+        <p:nvSpPr>
+          <p:cNvPr id="6" name="Rounded Rectangle 5"/>
+          <p:cNvSpPr/>
+          <p:nvPr/>
+        </p:nvSpPr>
+        <p:spPr>
+          <a:xfrm>
+            <a:off x="8046720" y="1645920"/>
+            <a:ext cx="3657600" cy="4114800"/>
+          </a:xfrm>
+          <a:prstGeom prst="roundRect">
+            <a:avLst/>
+          </a:prstGeom>
+          <a:solidFill>
+            <a:srgbClr val="003C6E"/>
+          </a:solidFill>
+          <a:ln>
+            <a:noFill/>
+          </a:ln>
+          <a:effectLst/>
+        </p:spPr>
+        <p:style>
+          <a:lnRef idx="1">
+            <a:schemeClr val="accent1"/>
+          </a:lnRef>
+          <a:fillRef idx="3">
+            <a:schemeClr val="accent1"/>
+          </a:fillRef>
+          <a:effectRef idx="2">
+            <a:schemeClr val="accent1"/>
+          </a:effectRef>
+          <a:fontRef idx="minor">
+            <a:schemeClr val="lt1"/>
+          </a:fontRef>
+        </p:style>
+        <p:txBody>
+          <a:bodyPr rtlCol="0" anchor="ctr" wrap="square"/>
+          <a:lstStyle/>
+          <a:p>
+            <a:pPr algn="ctr"/>
+            <a:r>
+              <a:rPr sz="1400" b="0">
+                <a:solidFill>
+                  <a:srgbClr val="FFFFFF"/>
+                </a:solidFill>
+              </a:rPr>
+              <a:t>Compliance Coverage
+✓ SOX audit trail
+✓ GDPR PII detection
+✓ HIPAA data masking flags
+✓ Zero credential exposure
+✓ Role-based access via
+   Key Vault / Unity Catalog
+✓ Full lineage for regulators</a:t>
+            </a:r>
+          </a:p>
+        </p:txBody>
+      </p:sp>
+    </p:spTree>
+  </p:cSld>
+  <p:clrMapOvr>
+    <a:masterClrMapping/>
+  </p:clrMapOvr>
+</p:sld>
+</file>
+
+<file path=ppt/slides/slide14.xml><?xml version="1.0" encoding="utf-8"?>
 <p:sld xmlns:a="http://schemas.openxmlformats.org/drawingml/2006/main" xmlns:p="http://schemas.openxmlformats.org/presentationml/2006/main" xmlns:r="http://schemas.openxmlformats.org/officeDocument/2006/relationships">
   <p:cSld>
     <p:bg>
@@ -6721,35 +12049,44 @@
       </p:sp>
       <p:sp>
         <p:nvSpPr>
-          <p:cNvPr id="7" name="TextBox 6"/>
-          <p:cNvSpPr txBox="1"/>
-          <p:nvPr/>
-        </p:nvSpPr>
-        <p:spPr>
-          <a:xfrm>
-            <a:off x="2148840" y="2423160"/>
-            <a:ext cx="274320" cy="457200"/>
-          </a:xfrm>
-          <a:prstGeom prst="rect">
-            <a:avLst/>
-          </a:prstGeom>
-          <a:noFill/>
-        </p:spPr>
-        <p:txBody>
-          <a:bodyPr wrap="square">
-            <a:spAutoFit/>
-          </a:bodyPr>
-          <a:lstStyle/>
-          <a:p>
-            <a:pPr algn="ctr"/>
-            <a:r>
-              <a:rPr sz="2400" b="1">
-                <a:solidFill>
-                  <a:srgbClr val="2C3E50"/>
-                </a:solidFill>
-              </a:rPr>
-              <a:t>→</a:t>
-            </a:r>
+          <p:cNvPr id="7" name="Right Arrow 6"/>
+          <p:cNvSpPr/>
+          <p:nvPr/>
+        </p:nvSpPr>
+        <p:spPr>
+          <a:xfrm>
+            <a:off x="2130552" y="2423160"/>
+            <a:ext cx="256032" cy="320040"/>
+          </a:xfrm>
+          <a:prstGeom prst="rightArrow">
+            <a:avLst/>
+          </a:prstGeom>
+          <a:solidFill>
+            <a:srgbClr val="2C3E50"/>
+          </a:solidFill>
+          <a:ln>
+            <a:noFill/>
+          </a:ln>
+        </p:spPr>
+        <p:style>
+          <a:lnRef idx="1">
+            <a:schemeClr val="accent1"/>
+          </a:lnRef>
+          <a:fillRef idx="3">
+            <a:schemeClr val="accent1"/>
+          </a:fillRef>
+          <a:effectRef idx="2">
+            <a:schemeClr val="accent1"/>
+          </a:effectRef>
+          <a:fontRef idx="minor">
+            <a:schemeClr val="lt1"/>
+          </a:fontRef>
+        </p:style>
+        <p:txBody>
+          <a:bodyPr rtlCol="0" anchor="ctr"/>
+          <a:lstStyle/>
+          <a:p>
+            <a:pPr algn="ctr"/>
           </a:p>
         </p:txBody>
       </p:sp>
@@ -6808,35 +12145,44 @@
       </p:sp>
       <p:sp>
         <p:nvSpPr>
-          <p:cNvPr id="9" name="TextBox 8"/>
-          <p:cNvSpPr txBox="1"/>
-          <p:nvPr/>
-        </p:nvSpPr>
-        <p:spPr>
-          <a:xfrm>
-            <a:off x="4114800" y="2423160"/>
-            <a:ext cx="274320" cy="457200"/>
-          </a:xfrm>
-          <a:prstGeom prst="rect">
-            <a:avLst/>
-          </a:prstGeom>
-          <a:noFill/>
-        </p:spPr>
-        <p:txBody>
-          <a:bodyPr wrap="square">
-            <a:spAutoFit/>
-          </a:bodyPr>
-          <a:lstStyle/>
-          <a:p>
-            <a:pPr algn="ctr"/>
-            <a:r>
-              <a:rPr sz="2400" b="1">
-                <a:solidFill>
-                  <a:srgbClr val="2C3E50"/>
-                </a:solidFill>
-              </a:rPr>
-              <a:t>→</a:t>
-            </a:r>
+          <p:cNvPr id="9" name="Right Arrow 8"/>
+          <p:cNvSpPr/>
+          <p:nvPr/>
+        </p:nvSpPr>
+        <p:spPr>
+          <a:xfrm>
+            <a:off x="4096512" y="2423160"/>
+            <a:ext cx="256032" cy="320040"/>
+          </a:xfrm>
+          <a:prstGeom prst="rightArrow">
+            <a:avLst/>
+          </a:prstGeom>
+          <a:solidFill>
+            <a:srgbClr val="2C3E50"/>
+          </a:solidFill>
+          <a:ln>
+            <a:noFill/>
+          </a:ln>
+        </p:spPr>
+        <p:style>
+          <a:lnRef idx="1">
+            <a:schemeClr val="accent1"/>
+          </a:lnRef>
+          <a:fillRef idx="3">
+            <a:schemeClr val="accent1"/>
+          </a:fillRef>
+          <a:effectRef idx="2">
+            <a:schemeClr val="accent1"/>
+          </a:effectRef>
+          <a:fontRef idx="minor">
+            <a:schemeClr val="lt1"/>
+          </a:fontRef>
+        </p:style>
+        <p:txBody>
+          <a:bodyPr rtlCol="0" anchor="ctr"/>
+          <a:lstStyle/>
+          <a:p>
+            <a:pPr algn="ctr"/>
           </a:p>
         </p:txBody>
       </p:sp>
@@ -6895,35 +12241,44 @@
       </p:sp>
       <p:sp>
         <p:nvSpPr>
-          <p:cNvPr id="11" name="TextBox 10"/>
-          <p:cNvSpPr txBox="1"/>
-          <p:nvPr/>
-        </p:nvSpPr>
-        <p:spPr>
-          <a:xfrm>
-            <a:off x="6080760" y="2423160"/>
-            <a:ext cx="274320" cy="457200"/>
-          </a:xfrm>
-          <a:prstGeom prst="rect">
-            <a:avLst/>
-          </a:prstGeom>
-          <a:noFill/>
-        </p:spPr>
-        <p:txBody>
-          <a:bodyPr wrap="square">
-            <a:spAutoFit/>
-          </a:bodyPr>
-          <a:lstStyle/>
-          <a:p>
-            <a:pPr algn="ctr"/>
-            <a:r>
-              <a:rPr sz="2400" b="1">
-                <a:solidFill>
-                  <a:srgbClr val="2C3E50"/>
-                </a:solidFill>
-              </a:rPr>
-              <a:t>→</a:t>
-            </a:r>
+          <p:cNvPr id="11" name="Right Arrow 10"/>
+          <p:cNvSpPr/>
+          <p:nvPr/>
+        </p:nvSpPr>
+        <p:spPr>
+          <a:xfrm>
+            <a:off x="6062472" y="2423160"/>
+            <a:ext cx="256032" cy="320040"/>
+          </a:xfrm>
+          <a:prstGeom prst="rightArrow">
+            <a:avLst/>
+          </a:prstGeom>
+          <a:solidFill>
+            <a:srgbClr val="2C3E50"/>
+          </a:solidFill>
+          <a:ln>
+            <a:noFill/>
+          </a:ln>
+        </p:spPr>
+        <p:style>
+          <a:lnRef idx="1">
+            <a:schemeClr val="accent1"/>
+          </a:lnRef>
+          <a:fillRef idx="3">
+            <a:schemeClr val="accent1"/>
+          </a:fillRef>
+          <a:effectRef idx="2">
+            <a:schemeClr val="accent1"/>
+          </a:effectRef>
+          <a:fontRef idx="minor">
+            <a:schemeClr val="lt1"/>
+          </a:fontRef>
+        </p:style>
+        <p:txBody>
+          <a:bodyPr rtlCol="0" anchor="ctr"/>
+          <a:lstStyle/>
+          <a:p>
+            <a:pPr algn="ctr"/>
           </a:p>
         </p:txBody>
       </p:sp>
@@ -6982,35 +12337,44 @@
       </p:sp>
       <p:sp>
         <p:nvSpPr>
-          <p:cNvPr id="13" name="TextBox 12"/>
-          <p:cNvSpPr txBox="1"/>
-          <p:nvPr/>
-        </p:nvSpPr>
-        <p:spPr>
-          <a:xfrm>
-            <a:off x="8046720" y="2423160"/>
-            <a:ext cx="274320" cy="457200"/>
-          </a:xfrm>
-          <a:prstGeom prst="rect">
-            <a:avLst/>
-          </a:prstGeom>
-          <a:noFill/>
-        </p:spPr>
-        <p:txBody>
-          <a:bodyPr wrap="square">
-            <a:spAutoFit/>
-          </a:bodyPr>
-          <a:lstStyle/>
-          <a:p>
-            <a:pPr algn="ctr"/>
-            <a:r>
-              <a:rPr sz="2400" b="1">
-                <a:solidFill>
-                  <a:srgbClr val="2C3E50"/>
-                </a:solidFill>
-              </a:rPr>
-              <a:t>→</a:t>
-            </a:r>
+          <p:cNvPr id="13" name="Right Arrow 12"/>
+          <p:cNvSpPr/>
+          <p:nvPr/>
+        </p:nvSpPr>
+        <p:spPr>
+          <a:xfrm>
+            <a:off x="8028432" y="2423160"/>
+            <a:ext cx="256032" cy="320040"/>
+          </a:xfrm>
+          <a:prstGeom prst="rightArrow">
+            <a:avLst/>
+          </a:prstGeom>
+          <a:solidFill>
+            <a:srgbClr val="2C3E50"/>
+          </a:solidFill>
+          <a:ln>
+            <a:noFill/>
+          </a:ln>
+        </p:spPr>
+        <p:style>
+          <a:lnRef idx="1">
+            <a:schemeClr val="accent1"/>
+          </a:lnRef>
+          <a:fillRef idx="3">
+            <a:schemeClr val="accent1"/>
+          </a:fillRef>
+          <a:effectRef idx="2">
+            <a:schemeClr val="accent1"/>
+          </a:effectRef>
+          <a:fontRef idx="minor">
+            <a:schemeClr val="lt1"/>
+          </a:fontRef>
+        </p:style>
+        <p:txBody>
+          <a:bodyPr rtlCol="0" anchor="ctr"/>
+          <a:lstStyle/>
+          <a:p>
+            <a:pPr algn="ctr"/>
           </a:p>
         </p:txBody>
       </p:sp>
@@ -7069,35 +12433,44 @@
       </p:sp>
       <p:sp>
         <p:nvSpPr>
-          <p:cNvPr id="15" name="TextBox 14"/>
-          <p:cNvSpPr txBox="1"/>
-          <p:nvPr/>
-        </p:nvSpPr>
-        <p:spPr>
-          <a:xfrm>
-            <a:off x="10012680" y="2423160"/>
-            <a:ext cx="274320" cy="457200"/>
-          </a:xfrm>
-          <a:prstGeom prst="rect">
-            <a:avLst/>
-          </a:prstGeom>
-          <a:noFill/>
-        </p:spPr>
-        <p:txBody>
-          <a:bodyPr wrap="square">
-            <a:spAutoFit/>
-          </a:bodyPr>
-          <a:lstStyle/>
-          <a:p>
-            <a:pPr algn="ctr"/>
-            <a:r>
-              <a:rPr sz="2400" b="1">
-                <a:solidFill>
-                  <a:srgbClr val="2C3E50"/>
-                </a:solidFill>
-              </a:rPr>
-              <a:t>→</a:t>
-            </a:r>
+          <p:cNvPr id="15" name="Right Arrow 14"/>
+          <p:cNvSpPr/>
+          <p:nvPr/>
+        </p:nvSpPr>
+        <p:spPr>
+          <a:xfrm>
+            <a:off x="9994392" y="2423160"/>
+            <a:ext cx="256032" cy="320040"/>
+          </a:xfrm>
+          <a:prstGeom prst="rightArrow">
+            <a:avLst/>
+          </a:prstGeom>
+          <a:solidFill>
+            <a:srgbClr val="2C3E50"/>
+          </a:solidFill>
+          <a:ln>
+            <a:noFill/>
+          </a:ln>
+        </p:spPr>
+        <p:style>
+          <a:lnRef idx="1">
+            <a:schemeClr val="accent1"/>
+          </a:lnRef>
+          <a:fillRef idx="3">
+            <a:schemeClr val="accent1"/>
+          </a:fillRef>
+          <a:effectRef idx="2">
+            <a:schemeClr val="accent1"/>
+          </a:effectRef>
+          <a:fontRef idx="minor">
+            <a:schemeClr val="lt1"/>
+          </a:fontRef>
+        </p:style>
+        <p:txBody>
+          <a:bodyPr rtlCol="0" anchor="ctr"/>
+          <a:lstStyle/>
+          <a:p>
+            <a:pPr algn="ctr"/>
           </a:p>
         </p:txBody>
       </p:sp>
@@ -13213,8 +18586,8 @@
         </p:nvSpPr>
         <p:spPr>
           <a:xfrm>
-            <a:off x="8229600" y="1463040"/>
-            <a:ext cx="2377440" cy="1371600"/>
+            <a:off x="7955279" y="1463040"/>
+            <a:ext cx="2011680" cy="1371600"/>
           </a:xfrm>
           <a:prstGeom prst="roundRect">
             <a:avLst/>
@@ -13257,8 +18630,8 @@
         </p:nvSpPr>
         <p:spPr>
           <a:xfrm>
-            <a:off x="8321040" y="1600200"/>
-            <a:ext cx="2194560" cy="731520"/>
+            <a:off x="8000999" y="1600200"/>
+            <a:ext cx="1920240" cy="731520"/>
           </a:xfrm>
           <a:prstGeom prst="rect">
             <a:avLst/>
@@ -13273,7 +18646,7 @@
           <a:p>
             <a:pPr algn="ctr"/>
             <a:r>
-              <a:rPr sz="3600" b="1">
+              <a:rPr sz="3200" b="1">
                 <a:solidFill>
                   <a:srgbClr val="FFFFFF"/>
                 </a:solidFill>
@@ -13291,8 +18664,8 @@
         </p:nvSpPr>
         <p:spPr>
           <a:xfrm>
-            <a:off x="8321040" y="2240280"/>
-            <a:ext cx="2194560" cy="457200"/>
+            <a:off x="8000999" y="2240280"/>
+            <a:ext cx="1920240" cy="457200"/>
           </a:xfrm>
           <a:prstGeom prst="rect">
             <a:avLst/>
@@ -13307,7 +18680,7 @@
           <a:p>
             <a:pPr algn="ctr"/>
             <a:r>
-              <a:rPr sz="1300" b="0">
+              <a:rPr sz="1200" b="0">
                 <a:solidFill>
                   <a:srgbClr val="FFFFFF"/>
                 </a:solidFill>
@@ -13326,8 +18699,8 @@
         </p:nvSpPr>
         <p:spPr>
           <a:xfrm>
-            <a:off x="8229600" y="3108960"/>
-            <a:ext cx="2377440" cy="1371600"/>
+            <a:off x="7955279" y="3108960"/>
+            <a:ext cx="2011680" cy="1371600"/>
           </a:xfrm>
           <a:prstGeom prst="roundRect">
             <a:avLst/>
@@ -13370,8 +18743,8 @@
         </p:nvSpPr>
         <p:spPr>
           <a:xfrm>
-            <a:off x="8321040" y="3246120"/>
-            <a:ext cx="2194560" cy="731520"/>
+            <a:off x="8000999" y="3246120"/>
+            <a:ext cx="1920240" cy="731520"/>
           </a:xfrm>
           <a:prstGeom prst="rect">
             <a:avLst/>
@@ -13386,7 +18759,7 @@
           <a:p>
             <a:pPr algn="ctr"/>
             <a:r>
-              <a:rPr sz="3600" b="1">
+              <a:rPr sz="3200" b="1">
                 <a:solidFill>
                   <a:srgbClr val="FFFFFF"/>
                 </a:solidFill>
@@ -13404,8 +18777,8 @@
         </p:nvSpPr>
         <p:spPr>
           <a:xfrm>
-            <a:off x="8321040" y="3886200"/>
-            <a:ext cx="2194560" cy="457200"/>
+            <a:off x="8000999" y="3886200"/>
+            <a:ext cx="1920240" cy="457200"/>
           </a:xfrm>
           <a:prstGeom prst="rect">
             <a:avLst/>
@@ -13420,7 +18793,7 @@
           <a:p>
             <a:pPr algn="ctr"/>
             <a:r>
-              <a:rPr sz="1300" b="0">
+              <a:rPr sz="1200" b="0">
                 <a:solidFill>
                   <a:srgbClr val="FFFFFF"/>
                 </a:solidFill>
@@ -13439,8 +18812,8 @@
         </p:nvSpPr>
         <p:spPr>
           <a:xfrm>
-            <a:off x="8229600" y="4754880"/>
-            <a:ext cx="2377440" cy="1371600"/>
+            <a:off x="7955279" y="4754880"/>
+            <a:ext cx="2011680" cy="1371600"/>
           </a:xfrm>
           <a:prstGeom prst="roundRect">
             <a:avLst/>
@@ -13483,8 +18856,8 @@
         </p:nvSpPr>
         <p:spPr>
           <a:xfrm>
-            <a:off x="8321040" y="4892040"/>
-            <a:ext cx="2194560" cy="731520"/>
+            <a:off x="8000999" y="4892040"/>
+            <a:ext cx="1920240" cy="731520"/>
           </a:xfrm>
           <a:prstGeom prst="rect">
             <a:avLst/>
@@ -13499,7 +18872,7 @@
           <a:p>
             <a:pPr algn="ctr"/>
             <a:r>
-              <a:rPr sz="3600" b="1">
+              <a:rPr sz="3200" b="1">
                 <a:solidFill>
                   <a:srgbClr val="FFFFFF"/>
                 </a:solidFill>
@@ -13517,8 +18890,8 @@
         </p:nvSpPr>
         <p:spPr>
           <a:xfrm>
-            <a:off x="8321040" y="5532120"/>
-            <a:ext cx="2194560" cy="457200"/>
+            <a:off x="8000999" y="5532120"/>
+            <a:ext cx="1920240" cy="457200"/>
           </a:xfrm>
           <a:prstGeom prst="rect">
             <a:avLst/>
@@ -13533,7 +18906,7 @@
           <a:p>
             <a:pPr algn="ctr"/>
             <a:r>
-              <a:rPr sz="1300" b="0">
+              <a:rPr sz="1200" b="0">
                 <a:solidFill>
                   <a:srgbClr val="FFFFFF"/>
                 </a:solidFill>
@@ -13552,8 +18925,8 @@
         </p:nvSpPr>
         <p:spPr>
           <a:xfrm>
-            <a:off x="10789920" y="1463040"/>
-            <a:ext cx="2377440" cy="1371600"/>
+            <a:off x="10058400" y="1463040"/>
+            <a:ext cx="2011680" cy="1371600"/>
           </a:xfrm>
           <a:prstGeom prst="roundRect">
             <a:avLst/>
@@ -13596,8 +18969,8 @@
         </p:nvSpPr>
         <p:spPr>
           <a:xfrm>
-            <a:off x="10881360" y="1600200"/>
-            <a:ext cx="2194560" cy="731520"/>
+            <a:off x="10104120" y="1600200"/>
+            <a:ext cx="1920240" cy="731520"/>
           </a:xfrm>
           <a:prstGeom prst="rect">
             <a:avLst/>
@@ -13612,7 +18985,7 @@
           <a:p>
             <a:pPr algn="ctr"/>
             <a:r>
-              <a:rPr sz="3600" b="1">
+              <a:rPr sz="3200" b="1">
                 <a:solidFill>
                   <a:srgbClr val="FFFFFF"/>
                 </a:solidFill>
@@ -13630,8 +19003,8 @@
         </p:nvSpPr>
         <p:spPr>
           <a:xfrm>
-            <a:off x="10881360" y="2240280"/>
-            <a:ext cx="2194560" cy="457200"/>
+            <a:off x="10104120" y="2240280"/>
+            <a:ext cx="1920240" cy="457200"/>
           </a:xfrm>
           <a:prstGeom prst="rect">
             <a:avLst/>
@@ -13646,7 +19019,7 @@
           <a:p>
             <a:pPr algn="ctr"/>
             <a:r>
-              <a:rPr sz="1300" b="0">
+              <a:rPr sz="1200" b="0">
                 <a:solidFill>
                   <a:srgbClr val="FFFFFF"/>
                 </a:solidFill>
@@ -13665,8 +19038,8 @@
         </p:nvSpPr>
         <p:spPr>
           <a:xfrm>
-            <a:off x="10789920" y="3108960"/>
-            <a:ext cx="2377440" cy="1371600"/>
+            <a:off x="10058400" y="3108960"/>
+            <a:ext cx="2011680" cy="1371600"/>
           </a:xfrm>
           <a:prstGeom prst="roundRect">
             <a:avLst/>
@@ -13709,8 +19082,8 @@
         </p:nvSpPr>
         <p:spPr>
           <a:xfrm>
-            <a:off x="10881360" y="3246120"/>
-            <a:ext cx="2194560" cy="731520"/>
+            <a:off x="10104120" y="3246120"/>
+            <a:ext cx="1920240" cy="731520"/>
           </a:xfrm>
           <a:prstGeom prst="rect">
             <a:avLst/>
@@ -13725,7 +19098,7 @@
           <a:p>
             <a:pPr algn="ctr"/>
             <a:r>
-              <a:rPr sz="3600" b="1">
+              <a:rPr sz="3200" b="1">
                 <a:solidFill>
                   <a:srgbClr val="FFFFFF"/>
                 </a:solidFill>
@@ -13743,8 +19116,8 @@
         </p:nvSpPr>
         <p:spPr>
           <a:xfrm>
-            <a:off x="10881360" y="3886200"/>
-            <a:ext cx="2194560" cy="457200"/>
+            <a:off x="10104120" y="3886200"/>
+            <a:ext cx="1920240" cy="457200"/>
           </a:xfrm>
           <a:prstGeom prst="rect">
             <a:avLst/>
@@ -13759,7 +19132,7 @@
           <a:p>
             <a:pPr algn="ctr"/>
             <a:r>
-              <a:rPr sz="1300" b="0">
+              <a:rPr sz="1200" b="0">
                 <a:solidFill>
                   <a:srgbClr val="FFFFFF"/>
                 </a:solidFill>
@@ -13778,8 +19151,8 @@
         </p:nvSpPr>
         <p:spPr>
           <a:xfrm>
-            <a:off x="10789920" y="4754880"/>
-            <a:ext cx="2377440" cy="1371600"/>
+            <a:off x="10058400" y="4754880"/>
+            <a:ext cx="2011680" cy="1371600"/>
           </a:xfrm>
           <a:prstGeom prst="roundRect">
             <a:avLst/>
@@ -13822,8 +19195,8 @@
         </p:nvSpPr>
         <p:spPr>
           <a:xfrm>
-            <a:off x="10881360" y="4892040"/>
-            <a:ext cx="2194560" cy="731520"/>
+            <a:off x="10104120" y="4892040"/>
+            <a:ext cx="1920240" cy="731520"/>
           </a:xfrm>
           <a:prstGeom prst="rect">
             <a:avLst/>
@@ -13838,7 +19211,7 @@
           <a:p>
             <a:pPr algn="ctr"/>
             <a:r>
-              <a:rPr sz="3600" b="1">
+              <a:rPr sz="3200" b="1">
                 <a:solidFill>
                   <a:srgbClr val="FFFFFF"/>
                 </a:solidFill>
@@ -13856,8 +19229,8 @@
         </p:nvSpPr>
         <p:spPr>
           <a:xfrm>
-            <a:off x="10881360" y="5532120"/>
-            <a:ext cx="2194560" cy="457200"/>
+            <a:off x="10104120" y="5532120"/>
+            <a:ext cx="1920240" cy="457200"/>
           </a:xfrm>
           <a:prstGeom prst="rect">
             <a:avLst/>
@@ -13872,7 +19245,7 @@
           <a:p>
             <a:pPr algn="ctr"/>
             <a:r>
-              <a:rPr sz="1300" b="0">
+              <a:rPr sz="1200" b="0">
                 <a:solidFill>
                   <a:srgbClr val="FFFFFF"/>
                 </a:solidFill>

--- a/output/Informatica_to_Fabric_Migration_Tool.pptx
+++ b/output/Informatica_to_Fabric_Migration_Tool.pptx
@@ -3140,7 +3140,7 @@
                   <a:srgbClr val="FFFFFF"/>
                 </a:solidFill>
               </a:rPr>
-              <a:t>Informatica  →  Microsoft Fabric / Azure Databricks</a:t>
+              <a:t>Informatica PowerCenter / IDMC  →  Microsoft Fabric / Azure Databricks</a:t>
             </a:r>
           </a:p>
         </p:txBody>
@@ -3174,7 +3174,7 @@
                   <a:srgbClr val="BDC3C7"/>
                 </a:solidFill>
               </a:rPr>
-              <a:t>Automated Migration Tool — Functionality Overview &amp; ROI Analysis</a:t>
+              <a:t>Automated Migration Tool — PowerCenter + IICS + IDMC (12 Services) → Fabric / Databricks / DBT</a:t>
             </a:r>
           </a:p>
         </p:txBody>
@@ -14339,7 +14339,7 @@
                   <a:srgbClr val="2C3E50"/>
                 </a:solidFill>
               </a:rPr>
-              <a:t>▸  Informatica PowerCenter/IICS licensing costs escalate year-over-year (avg. 15-25% annual increase)</a:t>
+              <a:t>▸  Informatica PowerCenter/IICS/IDMC licensing costs escalate year-over-year (avg. 15-25% annual increase)</a:t>
             </a:r>
           </a:p>
           <a:p>
@@ -14370,6 +14370,21 @@
                 </a:solidFill>
               </a:rPr>
               <a:t>▸  Vendor lock-in: proprietary XML formats, no native cloud integration, limited Spark support</a:t>
+            </a:r>
+          </a:p>
+          <a:p>
+            <a:pPr>
+              <a:spcAft>
+                <a:spcPts val="600"/>
+              </a:spcAft>
+            </a:pPr>
+            <a:r>
+              <a:rPr sz="1600">
+                <a:solidFill>
+                  <a:srgbClr val="2C3E50"/>
+                </a:solidFill>
+              </a:rPr>
+              <a:t>▸  IDMC cloud services (CDI, CDGC, CDQ, MDM, etc.) add complexity without reducing on-prem footprint</a:t>
             </a:r>
           </a:p>
           <a:p>
@@ -15282,7 +15297,7 @@
                   <a:srgbClr val="2C3E50"/>
                 </a:solidFill>
               </a:rPr>
-              <a:t>▸  PowerCenter 9.x/10.x + IICS full support</a:t>
+              <a:t>▸  PowerCenter 9.x/10.x + IICS + IDMC (12 cloud services) full support</a:t>
             </a:r>
           </a:p>
           <a:p>

--- a/output/Informatica_to_Fabric_Migration_Tool.pptx
+++ b/output/Informatica_to_Fabric_Migration_Tool.pptx
@@ -5239,7 +5239,7 @@
                   <a:srgbClr val="FFFFFF"/>
                 </a:solidFill>
               </a:rPr>
-              <a:t>Functionality Coverage</a:t>
+              <a:t>What Gets Generated</a:t>
             </a:r>
           </a:p>
         </p:txBody>
@@ -5273,7 +5273,7 @@
                   <a:srgbClr val="BDC3C7"/>
                 </a:solidFill>
               </a:rPr>
-              <a:t>100 sprints  •  17 phases  •  2,143 tests  •  9 agents  •  4 target platforms</a:t>
+              <a:t>One command → all artifacts, ready for Fabric / Databricks / DBT</a:t>
             </a:r>
           </a:p>
         </p:txBody>
@@ -5286,47 +5286,39 @@
         </p:nvSpPr>
         <p:spPr>
           <a:xfrm>
-            <a:off x="320040" y="1325880"/>
-            <a:ext cx="3657600" cy="384048"/>
-          </a:xfrm>
-          <a:prstGeom prst="roundRect">
-            <a:avLst/>
-          </a:prstGeom>
-          <a:solidFill>
-            <a:srgbClr val="0078D4"/>
-          </a:solidFill>
-          <a:ln>
-            <a:noFill/>
-          </a:ln>
-          <a:effectLst/>
-        </p:spPr>
-        <p:style>
-          <a:lnRef idx="1">
-            <a:schemeClr val="accent1"/>
-          </a:lnRef>
-          <a:fillRef idx="3">
-            <a:schemeClr val="accent1"/>
-          </a:fillRef>
-          <a:effectRef idx="2">
-            <a:schemeClr val="accent1"/>
-          </a:effectRef>
-          <a:fontRef idx="minor">
-            <a:schemeClr val="lt1"/>
-          </a:fontRef>
-        </p:style>
-        <p:txBody>
-          <a:bodyPr rtlCol="0" anchor="ctr" wrap="square"/>
-          <a:lstStyle/>
-          <a:p>
-            <a:pPr algn="l"/>
-            <a:r>
-              <a:rPr sz="1200" b="1">
-                <a:solidFill>
-                  <a:srgbClr val="FFFFFF"/>
-                </a:solidFill>
-              </a:rPr>
-              <a:t>🔄 Migration Engine</a:t>
-            </a:r>
+            <a:off x="274320" y="1417320"/>
+            <a:ext cx="109728" cy="640080"/>
+          </a:xfrm>
+          <a:prstGeom prst="roundRect">
+            <a:avLst/>
+          </a:prstGeom>
+          <a:solidFill>
+            <a:srgbClr val="27AE60"/>
+          </a:solidFill>
+          <a:ln>
+            <a:noFill/>
+          </a:ln>
+          <a:effectLst/>
+        </p:spPr>
+        <p:style>
+          <a:lnRef idx="1">
+            <a:schemeClr val="accent1"/>
+          </a:lnRef>
+          <a:fillRef idx="3">
+            <a:schemeClr val="accent1"/>
+          </a:fillRef>
+          <a:effectRef idx="2">
+            <a:schemeClr val="accent1"/>
+          </a:effectRef>
+          <a:fontRef idx="minor">
+            <a:schemeClr val="lt1"/>
+          </a:fontRef>
+        </p:style>
+        <p:txBody>
+          <a:bodyPr rtlCol="0" anchor="ctr"/>
+          <a:lstStyle/>
+          <a:p>
+            <a:pPr algn="ctr"/>
           </a:p>
         </p:txBody>
       </p:sp>
@@ -5338,8 +5330,8 @@
         </p:nvSpPr>
         <p:spPr>
           <a:xfrm>
-            <a:off x="393192" y="1728216"/>
-            <a:ext cx="3511296" cy="1133856"/>
+            <a:off x="438912" y="1417320"/>
+            <a:ext cx="2651760" cy="347472"/>
           </a:xfrm>
           <a:prstGeom prst="rect">
             <a:avLst/>
@@ -5352,144 +5344,28 @@
           </a:bodyPr>
           <a:lstStyle/>
           <a:p>
-            <a:pPr>
-              <a:spcAft>
-                <a:spcPts val="200"/>
-              </a:spcAft>
-            </a:pPr>
-            <a:r>
-              <a:rPr sz="1000">
-                <a:solidFill>
-                  <a:srgbClr val="2C3E50"/>
-                </a:solidFill>
-              </a:rPr>
-              <a:t>▸  26+ transformation types</a:t>
-            </a:r>
-          </a:p>
-          <a:p>
-            <a:pPr>
-              <a:spcAft>
-                <a:spcPts val="200"/>
-              </a:spcAft>
-            </a:pPr>
-            <a:r>
-              <a:rPr sz="1000">
-                <a:solidFill>
-                  <a:srgbClr val="2C3E50"/>
-                </a:solidFill>
-              </a:rPr>
-              <a:t>▸  6 source databases</a:t>
-            </a:r>
-          </a:p>
-          <a:p>
-            <a:pPr>
-              <a:spcAft>
-                <a:spcPts val="200"/>
-              </a:spcAft>
-            </a:pPr>
-            <a:r>
-              <a:rPr sz="1000">
-                <a:solidFill>
-                  <a:srgbClr val="2C3E50"/>
-                </a:solidFill>
-              </a:rPr>
-              <a:t>▸  180+ SQL patterns</a:t>
-            </a:r>
-          </a:p>
-          <a:p>
-            <a:pPr>
-              <a:spcAft>
-                <a:spcPts val="200"/>
-              </a:spcAft>
-            </a:pPr>
-            <a:r>
-              <a:rPr sz="1000">
-                <a:solidFill>
-                  <a:srgbClr val="2C3E50"/>
-                </a:solidFill>
-              </a:rPr>
-              <a:t>▸  AutoSys JIL conversion</a:t>
-            </a:r>
-          </a:p>
-          <a:p>
-            <a:pPr>
-              <a:spcAft>
-                <a:spcPts val="200"/>
-              </a:spcAft>
-            </a:pPr>
-            <a:r>
-              <a:rPr sz="1000">
-                <a:solidFill>
-                  <a:srgbClr val="2C3E50"/>
-                </a:solidFill>
-              </a:rPr>
-              <a:t>▸  IICS + IDMC (12 services)</a:t>
-            </a:r>
-          </a:p>
-        </p:txBody>
-      </p:sp>
-      <p:sp>
-        <p:nvSpPr>
-          <p:cNvPr id="7" name="Rounded Rectangle 6"/>
-          <p:cNvSpPr/>
-          <p:nvPr/>
-        </p:nvSpPr>
-        <p:spPr>
-          <a:xfrm>
-            <a:off x="4206240" y="1325880"/>
-            <a:ext cx="3657600" cy="384048"/>
-          </a:xfrm>
-          <a:prstGeom prst="roundRect">
-            <a:avLst/>
-          </a:prstGeom>
-          <a:solidFill>
-            <a:srgbClr val="8E44AD"/>
-          </a:solidFill>
-          <a:ln>
-            <a:noFill/>
-          </a:ln>
-          <a:effectLst/>
-        </p:spPr>
-        <p:style>
-          <a:lnRef idx="1">
-            <a:schemeClr val="accent1"/>
-          </a:lnRef>
-          <a:fillRef idx="3">
-            <a:schemeClr val="accent1"/>
-          </a:fillRef>
-          <a:effectRef idx="2">
-            <a:schemeClr val="accent1"/>
-          </a:effectRef>
-          <a:fontRef idx="minor">
-            <a:schemeClr val="lt1"/>
-          </a:fontRef>
-        </p:style>
-        <p:txBody>
-          <a:bodyPr rtlCol="0" anchor="ctr" wrap="square"/>
-          <a:lstStyle/>
-          <a:p>
             <a:pPr algn="l"/>
             <a:r>
-              <a:rPr sz="1200" b="1">
-                <a:solidFill>
-                  <a:srgbClr val="FFFFFF"/>
-                </a:solidFill>
-              </a:rPr>
-              <a:t>🤖 AI &amp; Intelligence</a:t>
-            </a:r>
-          </a:p>
-        </p:txBody>
-      </p:sp>
-      <p:sp>
-        <p:nvSpPr>
-          <p:cNvPr id="8" name="TextBox 7"/>
+              <a:rPr sz="1300" b="1">
+                <a:solidFill>
+                  <a:srgbClr val="003C6E"/>
+                </a:solidFill>
+              </a:rPr>
+              <a:t>📓  PySpark Notebooks</a:t>
+            </a:r>
+          </a:p>
+        </p:txBody>
+      </p:sp>
+      <p:sp>
+        <p:nvSpPr>
+          <p:cNvPr id="7" name="TextBox 6"/>
           <p:cNvSpPr txBox="1"/>
           <p:nvPr/>
         </p:nvSpPr>
         <p:spPr>
           <a:xfrm>
-            <a:off x="4279392" y="1728216"/>
-            <a:ext cx="3511296" cy="1133856"/>
+            <a:off x="438912" y="1737360"/>
+            <a:ext cx="2651760" cy="320040"/>
           </a:xfrm>
           <a:prstGeom prst="rect">
             <a:avLst/>
@@ -5502,144 +5378,72 @@
           </a:bodyPr>
           <a:lstStyle/>
           <a:p>
-            <a:pPr>
-              <a:spcAft>
-                <a:spcPts val="200"/>
-              </a:spcAft>
-            </a:pPr>
-            <a:r>
-              <a:rPr sz="1000">
-                <a:solidFill>
-                  <a:srgbClr val="2C3E50"/>
-                </a:solidFill>
-              </a:rPr>
-              <a:t>▸  LLM-powered SQL conversion</a:t>
-            </a:r>
-          </a:p>
-          <a:p>
-            <a:pPr>
-              <a:spcAft>
-                <a:spcPts val="200"/>
-              </a:spcAft>
-            </a:pPr>
-            <a:r>
-              <a:rPr sz="1000">
-                <a:solidFill>
-                  <a:srgbClr val="2C3E50"/>
-                </a:solidFill>
-              </a:rPr>
-              <a:t>▸  Confidence scoring</a:t>
-            </a:r>
-          </a:p>
-          <a:p>
-            <a:pPr>
-              <a:spcAft>
-                <a:spcPts val="200"/>
-              </a:spcAft>
-            </a:pPr>
-            <a:r>
-              <a:rPr sz="1000">
-                <a:solidFill>
-                  <a:srgbClr val="2C3E50"/>
-                </a:solidFill>
-              </a:rPr>
-              <a:t>▸  Pattern learning</a:t>
-            </a:r>
-          </a:p>
-          <a:p>
-            <a:pPr>
-              <a:spcAft>
-                <a:spcPts val="200"/>
-              </a:spcAft>
-            </a:pPr>
-            <a:r>
-              <a:rPr sz="1000">
-                <a:solidFill>
-                  <a:srgbClr val="2C3E50"/>
-                </a:solidFill>
-              </a:rPr>
-              <a:t>▸  Chat-based assistant</a:t>
-            </a:r>
-          </a:p>
-          <a:p>
-            <a:pPr>
-              <a:spcAft>
-                <a:spcPts val="200"/>
-              </a:spcAft>
-            </a:pPr>
-            <a:r>
-              <a:rPr sz="1000">
-                <a:solidFill>
-                  <a:srgbClr val="2C3E50"/>
-                </a:solidFill>
-              </a:rPr>
-              <a:t>▸  Gap resolution</a:t>
-            </a:r>
-          </a:p>
-        </p:txBody>
-      </p:sp>
-      <p:sp>
-        <p:nvSpPr>
-          <p:cNvPr id="9" name="Rounded Rectangle 8"/>
-          <p:cNvSpPr/>
-          <p:nvPr/>
-        </p:nvSpPr>
-        <p:spPr>
-          <a:xfrm>
-            <a:off x="8092440" y="1325880"/>
-            <a:ext cx="3657600" cy="384048"/>
-          </a:xfrm>
-          <a:prstGeom prst="roundRect">
-            <a:avLst/>
-          </a:prstGeom>
-          <a:solidFill>
-            <a:srgbClr val="E74C3C"/>
-          </a:solidFill>
-          <a:ln>
-            <a:noFill/>
-          </a:ln>
-          <a:effectLst/>
-        </p:spPr>
-        <p:style>
-          <a:lnRef idx="1">
-            <a:schemeClr val="accent1"/>
-          </a:lnRef>
-          <a:fillRef idx="3">
-            <a:schemeClr val="accent1"/>
-          </a:fillRef>
-          <a:effectRef idx="2">
-            <a:schemeClr val="accent1"/>
-          </a:effectRef>
-          <a:fontRef idx="minor">
-            <a:schemeClr val="lt1"/>
-          </a:fontRef>
-        </p:style>
-        <p:txBody>
-          <a:bodyPr rtlCol="0" anchor="ctr" wrap="square"/>
-          <a:lstStyle/>
-          <a:p>
             <a:pPr algn="l"/>
             <a:r>
-              <a:rPr sz="1200" b="1">
-                <a:solidFill>
-                  <a:srgbClr val="FFFFFF"/>
-                </a:solidFill>
-              </a:rPr>
-              <a:t>🌊 CDC &amp; Streaming</a:t>
-            </a:r>
-          </a:p>
-        </p:txBody>
-      </p:sp>
-      <p:sp>
-        <p:nvSpPr>
-          <p:cNvPr id="10" name="TextBox 9"/>
+              <a:rPr sz="1100" b="0">
+                <a:solidFill>
+                  <a:srgbClr val="2C3E50"/>
+                </a:solidFill>
+              </a:rPr>
+              <a:t>NB_*.py</a:t>
+            </a:r>
+          </a:p>
+        </p:txBody>
+      </p:sp>
+      <p:sp>
+        <p:nvSpPr>
+          <p:cNvPr id="8" name="Rounded Rectangle 7"/>
+          <p:cNvSpPr/>
+          <p:nvPr/>
+        </p:nvSpPr>
+        <p:spPr>
+          <a:xfrm>
+            <a:off x="274320" y="2331720"/>
+            <a:ext cx="109728" cy="640080"/>
+          </a:xfrm>
+          <a:prstGeom prst="roundRect">
+            <a:avLst/>
+          </a:prstGeom>
+          <a:solidFill>
+            <a:srgbClr val="8E44AD"/>
+          </a:solidFill>
+          <a:ln>
+            <a:noFill/>
+          </a:ln>
+          <a:effectLst/>
+        </p:spPr>
+        <p:style>
+          <a:lnRef idx="1">
+            <a:schemeClr val="accent1"/>
+          </a:lnRef>
+          <a:fillRef idx="3">
+            <a:schemeClr val="accent1"/>
+          </a:fillRef>
+          <a:effectRef idx="2">
+            <a:schemeClr val="accent1"/>
+          </a:effectRef>
+          <a:fontRef idx="minor">
+            <a:schemeClr val="lt1"/>
+          </a:fontRef>
+        </p:style>
+        <p:txBody>
+          <a:bodyPr rtlCol="0" anchor="ctr"/>
+          <a:lstStyle/>
+          <a:p>
+            <a:pPr algn="ctr"/>
+          </a:p>
+        </p:txBody>
+      </p:sp>
+      <p:sp>
+        <p:nvSpPr>
+          <p:cNvPr id="9" name="TextBox 8"/>
           <p:cNvSpPr txBox="1"/>
           <p:nvPr/>
         </p:nvSpPr>
         <p:spPr>
           <a:xfrm>
-            <a:off x="8165592" y="1728216"/>
-            <a:ext cx="3511296" cy="1133856"/>
+            <a:off x="438912" y="2331720"/>
+            <a:ext cx="2651760" cy="347472"/>
           </a:xfrm>
           <a:prstGeom prst="rect">
             <a:avLst/>
@@ -5652,144 +5456,28 @@
           </a:bodyPr>
           <a:lstStyle/>
           <a:p>
-            <a:pPr>
-              <a:spcAft>
-                <a:spcPts val="200"/>
-              </a:spcAft>
-            </a:pPr>
-            <a:r>
-              <a:rPr sz="1000">
-                <a:solidFill>
-                  <a:srgbClr val="2C3E50"/>
-                </a:solidFill>
-              </a:rPr>
-              <a:t>▸  Structured Streaming</a:t>
-            </a:r>
-          </a:p>
-          <a:p>
-            <a:pPr>
-              <a:spcAft>
-                <a:spcPts val="200"/>
-              </a:spcAft>
-            </a:pPr>
-            <a:r>
-              <a:rPr sz="1000">
-                <a:solidFill>
-                  <a:srgbClr val="2C3E50"/>
-                </a:solidFill>
-              </a:rPr>
-              <a:t>▸  Azure Functions (7 triggers)</a:t>
-            </a:r>
-          </a:p>
-          <a:p>
-            <a:pPr>
-              <a:spcAft>
-                <a:spcPts val="200"/>
-              </a:spcAft>
-            </a:pPr>
-            <a:r>
-              <a:rPr sz="1000">
-                <a:solidFill>
-                  <a:srgbClr val="2C3E50"/>
-                </a:solidFill>
-              </a:rPr>
-              <a:t>▸  Eventstream definitions</a:t>
-            </a:r>
-          </a:p>
-          <a:p>
-            <a:pPr>
-              <a:spcAft>
-                <a:spcPts val="200"/>
-              </a:spcAft>
-            </a:pPr>
-            <a:r>
-              <a:rPr sz="1000">
-                <a:solidFill>
-                  <a:srgbClr val="2C3E50"/>
-                </a:solidFill>
-              </a:rPr>
-              <a:t>▸  CDC MERGE INTO patterns</a:t>
-            </a:r>
-          </a:p>
-          <a:p>
-            <a:pPr>
-              <a:spcAft>
-                <a:spcPts val="200"/>
-              </a:spcAft>
-            </a:pPr>
-            <a:r>
-              <a:rPr sz="1000">
-                <a:solidFill>
-                  <a:srgbClr val="2C3E50"/>
-                </a:solidFill>
-              </a:rPr>
-              <a:t>▸  Deployment blueprints</a:t>
-            </a:r>
-          </a:p>
-        </p:txBody>
-      </p:sp>
-      <p:sp>
-        <p:nvSpPr>
-          <p:cNvPr id="11" name="Rounded Rectangle 10"/>
-          <p:cNvSpPr/>
-          <p:nvPr/>
-        </p:nvSpPr>
-        <p:spPr>
-          <a:xfrm>
-            <a:off x="320040" y="2990088"/>
-            <a:ext cx="3657600" cy="384048"/>
-          </a:xfrm>
-          <a:prstGeom prst="roundRect">
-            <a:avLst/>
-          </a:prstGeom>
-          <a:solidFill>
-            <a:srgbClr val="F39C12"/>
-          </a:solidFill>
-          <a:ln>
-            <a:noFill/>
-          </a:ln>
-          <a:effectLst/>
-        </p:spPr>
-        <p:style>
-          <a:lnRef idx="1">
-            <a:schemeClr val="accent1"/>
-          </a:lnRef>
-          <a:fillRef idx="3">
-            <a:schemeClr val="accent1"/>
-          </a:fillRef>
-          <a:effectRef idx="2">
-            <a:schemeClr val="accent1"/>
-          </a:effectRef>
-          <a:fontRef idx="minor">
-            <a:schemeClr val="lt1"/>
-          </a:fontRef>
-        </p:style>
-        <p:txBody>
-          <a:bodyPr rtlCol="0" anchor="ctr" wrap="square"/>
-          <a:lstStyle/>
-          <a:p>
             <a:pPr algn="l"/>
             <a:r>
-              <a:rPr sz="1200" b="1">
-                <a:solidFill>
-                  <a:srgbClr val="FFFFFF"/>
-                </a:solidFill>
-              </a:rPr>
-              <a:t>🔒 Governance</a:t>
-            </a:r>
-          </a:p>
-        </p:txBody>
-      </p:sp>
-      <p:sp>
-        <p:nvSpPr>
-          <p:cNvPr id="12" name="TextBox 11"/>
+              <a:rPr sz="1300" b="1">
+                <a:solidFill>
+                  <a:srgbClr val="003C6E"/>
+                </a:solidFill>
+              </a:rPr>
+              <a:t>🗄️  Converted SQL</a:t>
+            </a:r>
+          </a:p>
+        </p:txBody>
+      </p:sp>
+      <p:sp>
+        <p:nvSpPr>
+          <p:cNvPr id="10" name="TextBox 9"/>
           <p:cNvSpPr txBox="1"/>
           <p:nvPr/>
         </p:nvSpPr>
         <p:spPr>
           <a:xfrm>
-            <a:off x="393192" y="3392424"/>
-            <a:ext cx="3511296" cy="1133856"/>
+            <a:off x="438912" y="2651760"/>
+            <a:ext cx="2651760" cy="320040"/>
           </a:xfrm>
           <a:prstGeom prst="rect">
             <a:avLst/>
@@ -5802,144 +5490,72 @@
           </a:bodyPr>
           <a:lstStyle/>
           <a:p>
-            <a:pPr>
-              <a:spcAft>
-                <a:spcPts val="200"/>
-              </a:spcAft>
-            </a:pPr>
-            <a:r>
-              <a:rPr sz="1000">
-                <a:solidFill>
-                  <a:srgbClr val="2C3E50"/>
-                </a:solidFill>
-              </a:rPr>
-              <a:t>▸  RLS / Column masking</a:t>
-            </a:r>
-          </a:p>
-          <a:p>
-            <a:pPr>
-              <a:spcAft>
-                <a:spcPts val="200"/>
-              </a:spcAft>
-            </a:pPr>
-            <a:r>
-              <a:rPr sz="1000">
-                <a:solidFill>
-                  <a:srgbClr val="2C3E50"/>
-                </a:solidFill>
-              </a:rPr>
-              <a:t>▸  GDPR / CCPA compliance</a:t>
-            </a:r>
-          </a:p>
-          <a:p>
-            <a:pPr>
-              <a:spcAft>
-                <a:spcPts val="200"/>
-              </a:spcAft>
-            </a:pPr>
-            <a:r>
-              <a:rPr sz="1000">
-                <a:solidFill>
-                  <a:srgbClr val="2C3E50"/>
-                </a:solidFill>
-              </a:rPr>
-              <a:t>▸  PII classification</a:t>
-            </a:r>
-          </a:p>
-          <a:p>
-            <a:pPr>
-              <a:spcAft>
-                <a:spcPts val="200"/>
-              </a:spcAft>
-            </a:pPr>
-            <a:r>
-              <a:rPr sz="1000">
-                <a:solidFill>
-                  <a:srgbClr val="2C3E50"/>
-                </a:solidFill>
-              </a:rPr>
-              <a:t>▸  6-gate certification</a:t>
-            </a:r>
-          </a:p>
-          <a:p>
-            <a:pPr>
-              <a:spcAft>
-                <a:spcPts val="200"/>
-              </a:spcAft>
-            </a:pPr>
-            <a:r>
-              <a:rPr sz="1000">
-                <a:solidFill>
-                  <a:srgbClr val="2C3E50"/>
-                </a:solidFill>
-              </a:rPr>
-              <a:t>▸  Data residency validation</a:t>
-            </a:r>
-          </a:p>
-        </p:txBody>
-      </p:sp>
-      <p:sp>
-        <p:nvSpPr>
-          <p:cNvPr id="13" name="Rounded Rectangle 12"/>
-          <p:cNvSpPr/>
-          <p:nvPr/>
-        </p:nvSpPr>
-        <p:spPr>
-          <a:xfrm>
-            <a:off x="4206240" y="2990088"/>
-            <a:ext cx="3657600" cy="384048"/>
-          </a:xfrm>
-          <a:prstGeom prst="roundRect">
-            <a:avLst/>
-          </a:prstGeom>
-          <a:solidFill>
-            <a:srgbClr val="632CA6"/>
-          </a:solidFill>
-          <a:ln>
-            <a:noFill/>
-          </a:ln>
-          <a:effectLst/>
-        </p:spPr>
-        <p:style>
-          <a:lnRef idx="1">
-            <a:schemeClr val="accent1"/>
-          </a:lnRef>
-          <a:fillRef idx="3">
-            <a:schemeClr val="accent1"/>
-          </a:fillRef>
-          <a:effectRef idx="2">
-            <a:schemeClr val="accent1"/>
-          </a:effectRef>
-          <a:fontRef idx="minor">
-            <a:schemeClr val="lt1"/>
-          </a:fontRef>
-        </p:style>
-        <p:txBody>
-          <a:bodyPr rtlCol="0" anchor="ctr" wrap="square"/>
-          <a:lstStyle/>
-          <a:p>
             <a:pPr algn="l"/>
             <a:r>
-              <a:rPr sz="1200" b="1">
-                <a:solidFill>
-                  <a:srgbClr val="FFFFFF"/>
-                </a:solidFill>
-              </a:rPr>
-              <a:t>📊 Observability</a:t>
-            </a:r>
-          </a:p>
-        </p:txBody>
-      </p:sp>
-      <p:sp>
-        <p:nvSpPr>
-          <p:cNvPr id="14" name="TextBox 13"/>
+              <a:rPr sz="1100" b="0">
+                <a:solidFill>
+                  <a:srgbClr val="2C3E50"/>
+                </a:solidFill>
+              </a:rPr>
+              <a:t>SQL_*.sql</a:t>
+            </a:r>
+          </a:p>
+        </p:txBody>
+      </p:sp>
+      <p:sp>
+        <p:nvSpPr>
+          <p:cNvPr id="11" name="Rounded Rectangle 10"/>
+          <p:cNvSpPr/>
+          <p:nvPr/>
+        </p:nvSpPr>
+        <p:spPr>
+          <a:xfrm>
+            <a:off x="274320" y="3246120"/>
+            <a:ext cx="109728" cy="640080"/>
+          </a:xfrm>
+          <a:prstGeom prst="roundRect">
+            <a:avLst/>
+          </a:prstGeom>
+          <a:solidFill>
+            <a:srgbClr val="0078D4"/>
+          </a:solidFill>
+          <a:ln>
+            <a:noFill/>
+          </a:ln>
+          <a:effectLst/>
+        </p:spPr>
+        <p:style>
+          <a:lnRef idx="1">
+            <a:schemeClr val="accent1"/>
+          </a:lnRef>
+          <a:fillRef idx="3">
+            <a:schemeClr val="accent1"/>
+          </a:fillRef>
+          <a:effectRef idx="2">
+            <a:schemeClr val="accent1"/>
+          </a:effectRef>
+          <a:fontRef idx="minor">
+            <a:schemeClr val="lt1"/>
+          </a:fontRef>
+        </p:style>
+        <p:txBody>
+          <a:bodyPr rtlCol="0" anchor="ctr"/>
+          <a:lstStyle/>
+          <a:p>
+            <a:pPr algn="ctr"/>
+          </a:p>
+        </p:txBody>
+      </p:sp>
+      <p:sp>
+        <p:nvSpPr>
+          <p:cNvPr id="12" name="TextBox 11"/>
           <p:cNvSpPr txBox="1"/>
           <p:nvPr/>
         </p:nvSpPr>
         <p:spPr>
           <a:xfrm>
-            <a:off x="4279392" y="3392424"/>
-            <a:ext cx="3511296" cy="1133856"/>
+            <a:off x="438912" y="3246120"/>
+            <a:ext cx="2651760" cy="347472"/>
           </a:xfrm>
           <a:prstGeom prst="rect">
             <a:avLst/>
@@ -5952,144 +5568,28 @@
           </a:bodyPr>
           <a:lstStyle/>
           <a:p>
-            <a:pPr>
-              <a:spcAft>
-                <a:spcPts val="200"/>
-              </a:spcAft>
-            </a:pPr>
-            <a:r>
-              <a:rPr sz="1000">
-                <a:solidFill>
-                  <a:srgbClr val="2C3E50"/>
-                </a:solidFill>
-              </a:rPr>
-              <a:t>▸  Datadog integration</a:t>
-            </a:r>
-          </a:p>
-          <a:p>
-            <a:pPr>
-              <a:spcAft>
-                <a:spcPts val="200"/>
-              </a:spcAft>
-            </a:pPr>
-            <a:r>
-              <a:rPr sz="1000">
-                <a:solidFill>
-                  <a:srgbClr val="2C3E50"/>
-                </a:solidFill>
-              </a:rPr>
-              <a:t>▸  Agentic auto-remediation</a:t>
-            </a:r>
-          </a:p>
-          <a:p>
-            <a:pPr>
-              <a:spcAft>
-                <a:spcPts val="200"/>
-              </a:spcAft>
-            </a:pPr>
-            <a:r>
-              <a:rPr sz="1000">
-                <a:solidFill>
-                  <a:srgbClr val="2C3E50"/>
-                </a:solidFill>
-              </a:rPr>
-              <a:t>▸  Global monitoring platform</a:t>
-            </a:r>
-          </a:p>
-          <a:p>
-            <a:pPr>
-              <a:spcAft>
-                <a:spcPts val="200"/>
-              </a:spcAft>
-            </a:pPr>
-            <a:r>
-              <a:rPr sz="1000">
-                <a:solidFill>
-                  <a:srgbClr val="2C3E50"/>
-                </a:solidFill>
-              </a:rPr>
-              <a:t>▸  4-tier escalation chains</a:t>
-            </a:r>
-          </a:p>
-          <a:p>
-            <a:pPr>
-              <a:spcAft>
-                <a:spcPts val="200"/>
-              </a:spcAft>
-            </a:pPr>
-            <a:r>
-              <a:rPr sz="1000">
-                <a:solidFill>
-                  <a:srgbClr val="2C3E50"/>
-                </a:solidFill>
-              </a:rPr>
-              <a:t>▸  SLO tracking</a:t>
-            </a:r>
-          </a:p>
-        </p:txBody>
-      </p:sp>
-      <p:sp>
-        <p:nvSpPr>
-          <p:cNvPr id="15" name="Rounded Rectangle 14"/>
-          <p:cNvSpPr/>
-          <p:nvPr/>
-        </p:nvSpPr>
-        <p:spPr>
-          <a:xfrm>
-            <a:off x="8092440" y="2990088"/>
-            <a:ext cx="3657600" cy="384048"/>
-          </a:xfrm>
-          <a:prstGeom prst="roundRect">
-            <a:avLst/>
-          </a:prstGeom>
-          <a:solidFill>
-            <a:srgbClr val="27AE60"/>
-          </a:solidFill>
-          <a:ln>
-            <a:noFill/>
-          </a:ln>
-          <a:effectLst/>
-        </p:spPr>
-        <p:style>
-          <a:lnRef idx="1">
-            <a:schemeClr val="accent1"/>
-          </a:lnRef>
-          <a:fillRef idx="3">
-            <a:schemeClr val="accent1"/>
-          </a:fillRef>
-          <a:effectRef idx="2">
-            <a:schemeClr val="accent1"/>
-          </a:effectRef>
-          <a:fontRef idx="minor">
-            <a:schemeClr val="lt1"/>
-          </a:fontRef>
-        </p:style>
-        <p:txBody>
-          <a:bodyPr rtlCol="0" anchor="ctr" wrap="square"/>
-          <a:lstStyle/>
-          <a:p>
             <a:pPr algn="l"/>
             <a:r>
-              <a:rPr sz="1200" b="1">
-                <a:solidFill>
-                  <a:srgbClr val="FFFFFF"/>
-                </a:solidFill>
-              </a:rPr>
-              <a:t>✅ Validation</a:t>
-            </a:r>
-          </a:p>
-        </p:txBody>
-      </p:sp>
-      <p:sp>
-        <p:nvSpPr>
-          <p:cNvPr id="16" name="TextBox 15"/>
+              <a:rPr sz="1300" b="1">
+                <a:solidFill>
+                  <a:srgbClr val="003C6E"/>
+                </a:solidFill>
+              </a:rPr>
+              <a:t>⚡  Pipeline JSON</a:t>
+            </a:r>
+          </a:p>
+        </p:txBody>
+      </p:sp>
+      <p:sp>
+        <p:nvSpPr>
+          <p:cNvPr id="13" name="TextBox 12"/>
           <p:cNvSpPr txBox="1"/>
           <p:nvPr/>
         </p:nvSpPr>
         <p:spPr>
           <a:xfrm>
-            <a:off x="8165592" y="3392424"/>
-            <a:ext cx="3511296" cy="1133856"/>
+            <a:off x="438912" y="3566160"/>
+            <a:ext cx="2651760" cy="320040"/>
           </a:xfrm>
           <a:prstGeom prst="rect">
             <a:avLst/>
@@ -6102,144 +5602,72 @@
           </a:bodyPr>
           <a:lstStyle/>
           <a:p>
-            <a:pPr>
-              <a:spcAft>
-                <a:spcPts val="200"/>
-              </a:spcAft>
-            </a:pPr>
-            <a:r>
-              <a:rPr sz="1000">
-                <a:solidFill>
-                  <a:srgbClr val="2C3E50"/>
-                </a:solidFill>
-              </a:rPr>
-              <a:t>▸  6-level framework</a:t>
-            </a:r>
-          </a:p>
-          <a:p>
-            <a:pPr>
-              <a:spcAft>
-                <a:spcPts val="200"/>
-              </a:spcAft>
-            </a:pPr>
-            <a:r>
-              <a:rPr sz="1000">
-                <a:solidFill>
-                  <a:srgbClr val="2C3E50"/>
-                </a:solidFill>
-              </a:rPr>
-              <a:t>▸  Statistical tests (K-S)</a:t>
-            </a:r>
-          </a:p>
-          <a:p>
-            <a:pPr>
-              <a:spcAft>
-                <a:spcPts val="200"/>
-              </a:spcAft>
-            </a:pPr>
-            <a:r>
-              <a:rPr sz="1000">
-                <a:solidFill>
-                  <a:srgbClr val="2C3E50"/>
-                </a:solidFill>
-              </a:rPr>
-              <a:t>▸  SCD2 verification</a:t>
-            </a:r>
-          </a:p>
-          <a:p>
-            <a:pPr>
-              <a:spcAft>
-                <a:spcPts val="200"/>
-              </a:spcAft>
-            </a:pPr>
-            <a:r>
-              <a:rPr sz="1000">
-                <a:solidFill>
-                  <a:srgbClr val="2C3E50"/>
-                </a:solidFill>
-              </a:rPr>
-              <a:t>▸  RI checks + A/B testing</a:t>
-            </a:r>
-          </a:p>
-          <a:p>
-            <a:pPr>
-              <a:spcAft>
-                <a:spcPts val="200"/>
-              </a:spcAft>
-            </a:pPr>
-            <a:r>
-              <a:rPr sz="1000">
-                <a:solidFill>
-                  <a:srgbClr val="2C3E50"/>
-                </a:solidFill>
-              </a:rPr>
-              <a:t>▸  Business rule assertions</a:t>
-            </a:r>
-          </a:p>
-        </p:txBody>
-      </p:sp>
-      <p:sp>
-        <p:nvSpPr>
-          <p:cNvPr id="17" name="Rounded Rectangle 16"/>
-          <p:cNvSpPr/>
-          <p:nvPr/>
-        </p:nvSpPr>
-        <p:spPr>
-          <a:xfrm>
-            <a:off x="320040" y="4654296"/>
-            <a:ext cx="3657600" cy="384048"/>
-          </a:xfrm>
-          <a:prstGeom prst="roundRect">
-            <a:avLst/>
-          </a:prstGeom>
-          <a:solidFill>
-            <a:srgbClr val="1ABC9C"/>
-          </a:solidFill>
-          <a:ln>
-            <a:noFill/>
-          </a:ln>
-          <a:effectLst/>
-        </p:spPr>
-        <p:style>
-          <a:lnRef idx="1">
-            <a:schemeClr val="accent1"/>
-          </a:lnRef>
-          <a:fillRef idx="3">
-            <a:schemeClr val="accent1"/>
-          </a:fillRef>
-          <a:effectRef idx="2">
-            <a:schemeClr val="accent1"/>
-          </a:effectRef>
-          <a:fontRef idx="minor">
-            <a:schemeClr val="lt1"/>
-          </a:fontRef>
-        </p:style>
-        <p:txBody>
-          <a:bodyPr rtlCol="0" anchor="ctr" wrap="square"/>
-          <a:lstStyle/>
-          <a:p>
             <a:pPr algn="l"/>
             <a:r>
-              <a:rPr sz="1200" b="1">
-                <a:solidFill>
-                  <a:srgbClr val="FFFFFF"/>
-                </a:solidFill>
-              </a:rPr>
-              <a:t>🏗️ DevOps &amp; Infra</a:t>
-            </a:r>
-          </a:p>
-        </p:txBody>
-      </p:sp>
-      <p:sp>
-        <p:nvSpPr>
-          <p:cNvPr id="18" name="TextBox 17"/>
+              <a:rPr sz="1100" b="0">
+                <a:solidFill>
+                  <a:srgbClr val="2C3E50"/>
+                </a:solidFill>
+              </a:rPr>
+              <a:t>PL_*.json</a:t>
+            </a:r>
+          </a:p>
+        </p:txBody>
+      </p:sp>
+      <p:sp>
+        <p:nvSpPr>
+          <p:cNvPr id="14" name="Rounded Rectangle 13"/>
+          <p:cNvSpPr/>
+          <p:nvPr/>
+        </p:nvSpPr>
+        <p:spPr>
+          <a:xfrm>
+            <a:off x="274320" y="4160520"/>
+            <a:ext cx="109728" cy="640080"/>
+          </a:xfrm>
+          <a:prstGeom prst="roundRect">
+            <a:avLst/>
+          </a:prstGeom>
+          <a:solidFill>
+            <a:srgbClr val="FF694F"/>
+          </a:solidFill>
+          <a:ln>
+            <a:noFill/>
+          </a:ln>
+          <a:effectLst/>
+        </p:spPr>
+        <p:style>
+          <a:lnRef idx="1">
+            <a:schemeClr val="accent1"/>
+          </a:lnRef>
+          <a:fillRef idx="3">
+            <a:schemeClr val="accent1"/>
+          </a:fillRef>
+          <a:effectRef idx="2">
+            <a:schemeClr val="accent1"/>
+          </a:effectRef>
+          <a:fontRef idx="minor">
+            <a:schemeClr val="lt1"/>
+          </a:fontRef>
+        </p:style>
+        <p:txBody>
+          <a:bodyPr rtlCol="0" anchor="ctr"/>
+          <a:lstStyle/>
+          <a:p>
+            <a:pPr algn="ctr"/>
+          </a:p>
+        </p:txBody>
+      </p:sp>
+      <p:sp>
+        <p:nvSpPr>
+          <p:cNvPr id="15" name="TextBox 14"/>
           <p:cNvSpPr txBox="1"/>
           <p:nvPr/>
         </p:nvSpPr>
         <p:spPr>
           <a:xfrm>
-            <a:off x="393192" y="5056632"/>
-            <a:ext cx="3511296" cy="1133856"/>
+            <a:off x="438912" y="4160520"/>
+            <a:ext cx="2651760" cy="347472"/>
           </a:xfrm>
           <a:prstGeom prst="rect">
             <a:avLst/>
@@ -6252,144 +5680,28 @@
           </a:bodyPr>
           <a:lstStyle/>
           <a:p>
-            <a:pPr>
-              <a:spcAft>
-                <a:spcPts val="200"/>
-              </a:spcAft>
-            </a:pPr>
-            <a:r>
-              <a:rPr sz="1000">
-                <a:solidFill>
-                  <a:srgbClr val="2C3E50"/>
-                </a:solidFill>
-              </a:rPr>
-              <a:t>▸  Terraform + Bicep IaC</a:t>
-            </a:r>
-          </a:p>
-          <a:p>
-            <a:pPr>
-              <a:spcAft>
-                <a:spcPts val="200"/>
-              </a:spcAft>
-            </a:pPr>
-            <a:r>
-              <a:rPr sz="1000">
-                <a:solidFill>
-                  <a:srgbClr val="2C3E50"/>
-                </a:solidFill>
-              </a:rPr>
-              <a:t>▸  CI/CD (GitHub + ADO)</a:t>
-            </a:r>
-          </a:p>
-          <a:p>
-            <a:pPr>
-              <a:spcAft>
-                <a:spcPts val="200"/>
-              </a:spcAft>
-            </a:pPr>
-            <a:r>
-              <a:rPr sz="1000">
-                <a:solidFill>
-                  <a:srgbClr val="2C3E50"/>
-                </a:solidFill>
-              </a:rPr>
-              <a:t>▸  Docker / K8s / Helm</a:t>
-            </a:r>
-          </a:p>
-          <a:p>
-            <a:pPr>
-              <a:spcAft>
-                <a:spcPts val="200"/>
-              </a:spcAft>
-            </a:pPr>
-            <a:r>
-              <a:rPr sz="1000">
-                <a:solidFill>
-                  <a:srgbClr val="2C3E50"/>
-                </a:solidFill>
-              </a:rPr>
-              <a:t>▸  DAB bundles</a:t>
-            </a:r>
-          </a:p>
-          <a:p>
-            <a:pPr>
-              <a:spcAft>
-                <a:spcPts val="200"/>
-              </a:spcAft>
-            </a:pPr>
-            <a:r>
-              <a:rPr sz="1000">
-                <a:solidFill>
-                  <a:srgbClr val="2C3E50"/>
-                </a:solidFill>
-              </a:rPr>
-              <a:t>▸  Env promotion gates</a:t>
-            </a:r>
-          </a:p>
-        </p:txBody>
-      </p:sp>
-      <p:sp>
-        <p:nvSpPr>
-          <p:cNvPr id="19" name="Rounded Rectangle 18"/>
-          <p:cNvSpPr/>
-          <p:nvPr/>
-        </p:nvSpPr>
-        <p:spPr>
-          <a:xfrm>
-            <a:off x="4206240" y="4654296"/>
-            <a:ext cx="3657600" cy="384048"/>
-          </a:xfrm>
-          <a:prstGeom prst="roundRect">
-            <a:avLst/>
-          </a:prstGeom>
-          <a:solidFill>
-            <a:srgbClr val="003C6E"/>
-          </a:solidFill>
-          <a:ln>
-            <a:noFill/>
-          </a:ln>
-          <a:effectLst/>
-        </p:spPr>
-        <p:style>
-          <a:lnRef idx="1">
-            <a:schemeClr val="accent1"/>
-          </a:lnRef>
-          <a:fillRef idx="3">
-            <a:schemeClr val="accent1"/>
-          </a:fillRef>
-          <a:effectRef idx="2">
-            <a:schemeClr val="accent1"/>
-          </a:effectRef>
-          <a:fontRef idx="minor">
-            <a:schemeClr val="lt1"/>
-          </a:fontRef>
-        </p:style>
-        <p:txBody>
-          <a:bodyPr rtlCol="0" anchor="ctr" wrap="square"/>
-          <a:lstStyle/>
-          <a:p>
             <a:pPr algn="l"/>
             <a:r>
-              <a:rPr sz="1200" b="1">
-                <a:solidFill>
-                  <a:srgbClr val="FFFFFF"/>
-                </a:solidFill>
-              </a:rPr>
-              <a:t>🧠 ML &amp; Cost</a:t>
-            </a:r>
-          </a:p>
-        </p:txBody>
-      </p:sp>
-      <p:sp>
-        <p:nvSpPr>
-          <p:cNvPr id="20" name="TextBox 19"/>
+              <a:rPr sz="1300" b="1">
+                <a:solidFill>
+                  <a:srgbClr val="003C6E"/>
+                </a:solidFill>
+              </a:rPr>
+              <a:t>🏗️  DBT Models</a:t>
+            </a:r>
+          </a:p>
+        </p:txBody>
+      </p:sp>
+      <p:sp>
+        <p:nvSpPr>
+          <p:cNvPr id="16" name="TextBox 15"/>
           <p:cNvSpPr txBox="1"/>
           <p:nvPr/>
         </p:nvSpPr>
         <p:spPr>
           <a:xfrm>
-            <a:off x="4279392" y="5056632"/>
-            <a:ext cx="3511296" cy="1133856"/>
+            <a:off x="438912" y="4480560"/>
+            <a:ext cx="2651760" cy="320040"/>
           </a:xfrm>
           <a:prstGeom prst="rect">
             <a:avLst/>
@@ -6402,144 +5714,72 @@
           </a:bodyPr>
           <a:lstStyle/>
           <a:p>
-            <a:pPr>
-              <a:spcAft>
-                <a:spcPts val="200"/>
-              </a:spcAft>
-            </a:pPr>
-            <a:r>
-              <a:rPr sz="1000">
-                <a:solidFill>
-                  <a:srgbClr val="2C3E50"/>
-                </a:solidFill>
-              </a:rPr>
-              <a:t>▸  Feature Store notebooks</a:t>
-            </a:r>
-          </a:p>
-          <a:p>
-            <a:pPr>
-              <a:spcAft>
-                <a:spcPts val="200"/>
-              </a:spcAft>
-            </a:pPr>
-            <a:r>
-              <a:rPr sz="1000">
-                <a:solidFill>
-                  <a:srgbClr val="2C3E50"/>
-                </a:solidFill>
-              </a:rPr>
-              <a:t>▸  MLflow experiment tracking</a:t>
-            </a:r>
-          </a:p>
-          <a:p>
-            <a:pPr>
-              <a:spcAft>
-                <a:spcPts val="200"/>
-              </a:spcAft>
-            </a:pPr>
-            <a:r>
-              <a:rPr sz="1000">
-                <a:solidFill>
-                  <a:srgbClr val="2C3E50"/>
-                </a:solidFill>
-              </a:rPr>
-              <a:t>▸  Batch scoring pipelines</a:t>
-            </a:r>
-          </a:p>
-          <a:p>
-            <a:pPr>
-              <a:spcAft>
-                <a:spcPts val="200"/>
-              </a:spcAft>
-            </a:pPr>
-            <a:r>
-              <a:rPr sz="1000">
-                <a:solidFill>
-                  <a:srgbClr val="2C3E50"/>
-                </a:solidFill>
-              </a:rPr>
-              <a:t>▸  TCO / DBU cost estimator</a:t>
-            </a:r>
-          </a:p>
-          <a:p>
-            <a:pPr>
-              <a:spcAft>
-                <a:spcPts val="200"/>
-              </a:spcAft>
-            </a:pPr>
-            <a:r>
-              <a:rPr sz="1000">
-                <a:solidFill>
-                  <a:srgbClr val="2C3E50"/>
-                </a:solidFill>
-              </a:rPr>
-              <a:t>▸  Cost optimization advisor</a:t>
-            </a:r>
-          </a:p>
-        </p:txBody>
-      </p:sp>
-      <p:sp>
-        <p:nvSpPr>
-          <p:cNvPr id="21" name="Rounded Rectangle 20"/>
-          <p:cNvSpPr/>
-          <p:nvPr/>
-        </p:nvSpPr>
-        <p:spPr>
-          <a:xfrm>
-            <a:off x="8092440" y="4654296"/>
-            <a:ext cx="3657600" cy="384048"/>
-          </a:xfrm>
-          <a:prstGeom prst="roundRect">
-            <a:avLst/>
-          </a:prstGeom>
-          <a:solidFill>
-            <a:srgbClr val="FF4500"/>
-          </a:solidFill>
-          <a:ln>
-            <a:noFill/>
-          </a:ln>
-          <a:effectLst/>
-        </p:spPr>
-        <p:style>
-          <a:lnRef idx="1">
-            <a:schemeClr val="accent1"/>
-          </a:lnRef>
-          <a:fillRef idx="3">
-            <a:schemeClr val="accent1"/>
-          </a:fillRef>
-          <a:effectRef idx="2">
-            <a:schemeClr val="accent1"/>
-          </a:effectRef>
-          <a:fontRef idx="minor">
-            <a:schemeClr val="lt1"/>
-          </a:fontRef>
-        </p:style>
-        <p:txBody>
-          <a:bodyPr rtlCol="0" anchor="ctr" wrap="square"/>
-          <a:lstStyle/>
-          <a:p>
             <a:pPr algn="l"/>
             <a:r>
-              <a:rPr sz="1200" b="1">
-                <a:solidFill>
-                  <a:srgbClr val="FFFFFF"/>
-                </a:solidFill>
-              </a:rPr>
-              <a:t>🔌 Extensibility</a:t>
-            </a:r>
-          </a:p>
-        </p:txBody>
-      </p:sp>
-      <p:sp>
-        <p:nvSpPr>
-          <p:cNvPr id="22" name="TextBox 21"/>
+              <a:rPr sz="1100" b="0">
+                <a:solidFill>
+                  <a:srgbClr val="2C3E50"/>
+                </a:solidFill>
+              </a:rPr>
+              <a:t>staging / int / marts</a:t>
+            </a:r>
+          </a:p>
+        </p:txBody>
+      </p:sp>
+      <p:sp>
+        <p:nvSpPr>
+          <p:cNvPr id="17" name="Rounded Rectangle 16"/>
+          <p:cNvSpPr/>
+          <p:nvPr/>
+        </p:nvSpPr>
+        <p:spPr>
+          <a:xfrm>
+            <a:off x="274320" y="5074920"/>
+            <a:ext cx="109728" cy="640080"/>
+          </a:xfrm>
+          <a:prstGeom prst="roundRect">
+            <a:avLst/>
+          </a:prstGeom>
+          <a:solidFill>
+            <a:srgbClr val="1ABC9C"/>
+          </a:solidFill>
+          <a:ln>
+            <a:noFill/>
+          </a:ln>
+          <a:effectLst/>
+        </p:spPr>
+        <p:style>
+          <a:lnRef idx="1">
+            <a:schemeClr val="accent1"/>
+          </a:lnRef>
+          <a:fillRef idx="3">
+            <a:schemeClr val="accent1"/>
+          </a:fillRef>
+          <a:effectRef idx="2">
+            <a:schemeClr val="accent1"/>
+          </a:effectRef>
+          <a:fontRef idx="minor">
+            <a:schemeClr val="lt1"/>
+          </a:fontRef>
+        </p:style>
+        <p:txBody>
+          <a:bodyPr rtlCol="0" anchor="ctr"/>
+          <a:lstStyle/>
+          <a:p>
+            <a:pPr algn="ctr"/>
+          </a:p>
+        </p:txBody>
+      </p:sp>
+      <p:sp>
+        <p:nvSpPr>
+          <p:cNvPr id="18" name="TextBox 17"/>
           <p:cNvSpPr txBox="1"/>
           <p:nvPr/>
         </p:nvSpPr>
         <p:spPr>
           <a:xfrm>
-            <a:off x="8165592" y="5056632"/>
-            <a:ext cx="3511296" cy="1133856"/>
+            <a:off x="438912" y="5074920"/>
+            <a:ext cx="2651760" cy="347472"/>
           </a:xfrm>
           <a:prstGeom prst="rect">
             <a:avLst/>
@@ -6552,78 +5792,1762 @@
           </a:bodyPr>
           <a:lstStyle/>
           <a:p>
-            <a:pPr>
-              <a:spcAft>
-                <a:spcPts val="200"/>
-              </a:spcAft>
-            </a:pPr>
-            <a:r>
-              <a:rPr sz="1000">
-                <a:solidFill>
-                  <a:srgbClr val="2C3E50"/>
-                </a:solidFill>
-              </a:rPr>
-              <a:t>▸  Plugin system (decorators)</a:t>
-            </a:r>
-          </a:p>
-          <a:p>
-            <a:pPr>
-              <a:spcAft>
-                <a:spcPts val="200"/>
-              </a:spcAft>
-            </a:pPr>
-            <a:r>
-              <a:rPr sz="1000">
-                <a:solidFill>
-                  <a:srgbClr val="2C3E50"/>
-                </a:solidFill>
-              </a:rPr>
-              <a:t>▸  Python SDK + REST API</a:t>
-            </a:r>
-          </a:p>
-          <a:p>
-            <a:pPr>
-              <a:spcAft>
-                <a:spcPts val="200"/>
-              </a:spcAft>
-            </a:pPr>
-            <a:r>
-              <a:rPr sz="1000">
-                <a:solidFill>
-                  <a:srgbClr val="2C3E50"/>
-                </a:solidFill>
-              </a:rPr>
-              <a:t>▸  YAML/JSON rule engine</a:t>
-            </a:r>
-          </a:p>
-          <a:p>
-            <a:pPr>
-              <a:spcAft>
-                <a:spcPts val="200"/>
-              </a:spcAft>
-            </a:pPr>
-            <a:r>
-              <a:rPr sz="1000">
-                <a:solidFill>
-                  <a:srgbClr val="2C3E50"/>
-                </a:solidFill>
-              </a:rPr>
-              <a:t>▸  Purview / Unity Catalog</a:t>
-            </a:r>
-          </a:p>
-          <a:p>
-            <a:pPr>
-              <a:spcAft>
-                <a:spcPts val="200"/>
-              </a:spcAft>
-            </a:pPr>
-            <a:r>
-              <a:rPr sz="1000">
-                <a:solidFill>
-                  <a:srgbClr val="2C3E50"/>
-                </a:solidFill>
-              </a:rPr>
-              <a:t>▸  Visual lineage explorer</a:t>
+            <a:pPr algn="l"/>
+            <a:r>
+              <a:rPr sz="1300" b="1">
+                <a:solidFill>
+                  <a:srgbClr val="003C6E"/>
+                </a:solidFill>
+              </a:rPr>
+              <a:t>📐  Delta Lake DDL</a:t>
+            </a:r>
+          </a:p>
+        </p:txBody>
+      </p:sp>
+      <p:sp>
+        <p:nvSpPr>
+          <p:cNvPr id="19" name="TextBox 18"/>
+          <p:cNvSpPr txBox="1"/>
+          <p:nvPr/>
+        </p:nvSpPr>
+        <p:spPr>
+          <a:xfrm>
+            <a:off x="438912" y="5394960"/>
+            <a:ext cx="2651760" cy="320040"/>
+          </a:xfrm>
+          <a:prstGeom prst="rect">
+            <a:avLst/>
+          </a:prstGeom>
+          <a:noFill/>
+        </p:spPr>
+        <p:txBody>
+          <a:bodyPr wrap="square">
+            <a:spAutoFit/>
+          </a:bodyPr>
+          <a:lstStyle/>
+          <a:p>
+            <a:pPr algn="l"/>
+            <a:r>
+              <a:rPr sz="1100" b="0">
+                <a:solidFill>
+                  <a:srgbClr val="2C3E50"/>
+                </a:solidFill>
+              </a:rPr>
+              <a:t>CREATE TABLE + partitions</a:t>
+            </a:r>
+          </a:p>
+        </p:txBody>
+      </p:sp>
+      <p:sp>
+        <p:nvSpPr>
+          <p:cNvPr id="20" name="Rounded Rectangle 19"/>
+          <p:cNvSpPr/>
+          <p:nvPr/>
+        </p:nvSpPr>
+        <p:spPr>
+          <a:xfrm>
+            <a:off x="3200400" y="1417320"/>
+            <a:ext cx="109728" cy="640080"/>
+          </a:xfrm>
+          <a:prstGeom prst="roundRect">
+            <a:avLst/>
+          </a:prstGeom>
+          <a:solidFill>
+            <a:srgbClr val="FF4500"/>
+          </a:solidFill>
+          <a:ln>
+            <a:noFill/>
+          </a:ln>
+          <a:effectLst/>
+        </p:spPr>
+        <p:style>
+          <a:lnRef idx="1">
+            <a:schemeClr val="accent1"/>
+          </a:lnRef>
+          <a:fillRef idx="3">
+            <a:schemeClr val="accent1"/>
+          </a:fillRef>
+          <a:effectRef idx="2">
+            <a:schemeClr val="accent1"/>
+          </a:effectRef>
+          <a:fontRef idx="minor">
+            <a:schemeClr val="lt1"/>
+          </a:fontRef>
+        </p:style>
+        <p:txBody>
+          <a:bodyPr rtlCol="0" anchor="ctr"/>
+          <a:lstStyle/>
+          <a:p>
+            <a:pPr algn="ctr"/>
+          </a:p>
+        </p:txBody>
+      </p:sp>
+      <p:sp>
+        <p:nvSpPr>
+          <p:cNvPr id="21" name="TextBox 20"/>
+          <p:cNvSpPr txBox="1"/>
+          <p:nvPr/>
+        </p:nvSpPr>
+        <p:spPr>
+          <a:xfrm>
+            <a:off x="3364992" y="1417320"/>
+            <a:ext cx="2651760" cy="347472"/>
+          </a:xfrm>
+          <a:prstGeom prst="rect">
+            <a:avLst/>
+          </a:prstGeom>
+          <a:noFill/>
+        </p:spPr>
+        <p:txBody>
+          <a:bodyPr wrap="square">
+            <a:spAutoFit/>
+          </a:bodyPr>
+          <a:lstStyle/>
+          <a:p>
+            <a:pPr algn="l"/>
+            <a:r>
+              <a:rPr sz="1300" b="1">
+                <a:solidFill>
+                  <a:srgbClr val="003C6E"/>
+                </a:solidFill>
+              </a:rPr>
+              <a:t>⏰  AutoSys Pipelines</a:t>
+            </a:r>
+          </a:p>
+        </p:txBody>
+      </p:sp>
+      <p:sp>
+        <p:nvSpPr>
+          <p:cNvPr id="22" name="TextBox 21"/>
+          <p:cNvSpPr txBox="1"/>
+          <p:nvPr/>
+        </p:nvSpPr>
+        <p:spPr>
+          <a:xfrm>
+            <a:off x="3364992" y="1737360"/>
+            <a:ext cx="2651760" cy="320040"/>
+          </a:xfrm>
+          <a:prstGeom prst="rect">
+            <a:avLst/>
+          </a:prstGeom>
+          <a:noFill/>
+        </p:spPr>
+        <p:txBody>
+          <a:bodyPr wrap="square">
+            <a:spAutoFit/>
+          </a:bodyPr>
+          <a:lstStyle/>
+          <a:p>
+            <a:pPr algn="l"/>
+            <a:r>
+              <a:rPr sz="1100" b="0">
+                <a:solidFill>
+                  <a:srgbClr val="2C3E50"/>
+                </a:solidFill>
+              </a:rPr>
+              <a:t>JIL → Pipeline JSON</a:t>
+            </a:r>
+          </a:p>
+        </p:txBody>
+      </p:sp>
+      <p:sp>
+        <p:nvSpPr>
+          <p:cNvPr id="23" name="Rounded Rectangle 22"/>
+          <p:cNvSpPr/>
+          <p:nvPr/>
+        </p:nvSpPr>
+        <p:spPr>
+          <a:xfrm>
+            <a:off x="3200400" y="2331720"/>
+            <a:ext cx="109728" cy="640080"/>
+          </a:xfrm>
+          <a:prstGeom prst="roundRect">
+            <a:avLst/>
+          </a:prstGeom>
+          <a:solidFill>
+            <a:srgbClr val="E74C3C"/>
+          </a:solidFill>
+          <a:ln>
+            <a:noFill/>
+          </a:ln>
+          <a:effectLst/>
+        </p:spPr>
+        <p:style>
+          <a:lnRef idx="1">
+            <a:schemeClr val="accent1"/>
+          </a:lnRef>
+          <a:fillRef idx="3">
+            <a:schemeClr val="accent1"/>
+          </a:fillRef>
+          <a:effectRef idx="2">
+            <a:schemeClr val="accent1"/>
+          </a:effectRef>
+          <a:fontRef idx="minor">
+            <a:schemeClr val="lt1"/>
+          </a:fontRef>
+        </p:style>
+        <p:txBody>
+          <a:bodyPr rtlCol="0" anchor="ctr"/>
+          <a:lstStyle/>
+          <a:p>
+            <a:pPr algn="ctr"/>
+          </a:p>
+        </p:txBody>
+      </p:sp>
+      <p:sp>
+        <p:nvSpPr>
+          <p:cNvPr id="24" name="TextBox 23"/>
+          <p:cNvSpPr txBox="1"/>
+          <p:nvPr/>
+        </p:nvSpPr>
+        <p:spPr>
+          <a:xfrm>
+            <a:off x="3364992" y="2331720"/>
+            <a:ext cx="2651760" cy="347472"/>
+          </a:xfrm>
+          <a:prstGeom prst="rect">
+            <a:avLst/>
+          </a:prstGeom>
+          <a:noFill/>
+        </p:spPr>
+        <p:txBody>
+          <a:bodyPr wrap="square">
+            <a:spAutoFit/>
+          </a:bodyPr>
+          <a:lstStyle/>
+          <a:p>
+            <a:pPr algn="l"/>
+            <a:r>
+              <a:rPr sz="1300" b="1">
+                <a:solidFill>
+                  <a:srgbClr val="003C6E"/>
+                </a:solidFill>
+              </a:rPr>
+              <a:t>🌊  Streaming Notebooks</a:t>
+            </a:r>
+          </a:p>
+        </p:txBody>
+      </p:sp>
+      <p:sp>
+        <p:nvSpPr>
+          <p:cNvPr id="25" name="TextBox 24"/>
+          <p:cNvSpPr txBox="1"/>
+          <p:nvPr/>
+        </p:nvSpPr>
+        <p:spPr>
+          <a:xfrm>
+            <a:off x="3364992" y="2651760"/>
+            <a:ext cx="2651760" cy="320040"/>
+          </a:xfrm>
+          <a:prstGeom prst="rect">
+            <a:avLst/>
+          </a:prstGeom>
+          <a:noFill/>
+        </p:spPr>
+        <p:txBody>
+          <a:bodyPr wrap="square">
+            <a:spAutoFit/>
+          </a:bodyPr>
+          <a:lstStyle/>
+          <a:p>
+            <a:pPr algn="l"/>
+            <a:r>
+              <a:rPr sz="1100" b="0">
+                <a:solidFill>
+                  <a:srgbClr val="2C3E50"/>
+                </a:solidFill>
+              </a:rPr>
+              <a:t>CDC / MERGE INTO</a:t>
+            </a:r>
+          </a:p>
+        </p:txBody>
+      </p:sp>
+      <p:sp>
+        <p:nvSpPr>
+          <p:cNvPr id="26" name="Rounded Rectangle 25"/>
+          <p:cNvSpPr/>
+          <p:nvPr/>
+        </p:nvSpPr>
+        <p:spPr>
+          <a:xfrm>
+            <a:off x="3200400" y="3246120"/>
+            <a:ext cx="109728" cy="640080"/>
+          </a:xfrm>
+          <a:prstGeom prst="roundRect">
+            <a:avLst/>
+          </a:prstGeom>
+          <a:solidFill>
+            <a:srgbClr val="E74C3C"/>
+          </a:solidFill>
+          <a:ln>
+            <a:noFill/>
+          </a:ln>
+          <a:effectLst/>
+        </p:spPr>
+        <p:style>
+          <a:lnRef idx="1">
+            <a:schemeClr val="accent1"/>
+          </a:lnRef>
+          <a:fillRef idx="3">
+            <a:schemeClr val="accent1"/>
+          </a:fillRef>
+          <a:effectRef idx="2">
+            <a:schemeClr val="accent1"/>
+          </a:effectRef>
+          <a:fontRef idx="minor">
+            <a:schemeClr val="lt1"/>
+          </a:fontRef>
+        </p:style>
+        <p:txBody>
+          <a:bodyPr rtlCol="0" anchor="ctr"/>
+          <a:lstStyle/>
+          <a:p>
+            <a:pPr algn="ctr"/>
+          </a:p>
+        </p:txBody>
+      </p:sp>
+      <p:sp>
+        <p:nvSpPr>
+          <p:cNvPr id="27" name="TextBox 26"/>
+          <p:cNvSpPr txBox="1"/>
+          <p:nvPr/>
+        </p:nvSpPr>
+        <p:spPr>
+          <a:xfrm>
+            <a:off x="3364992" y="3246120"/>
+            <a:ext cx="2651760" cy="347472"/>
+          </a:xfrm>
+          <a:prstGeom prst="rect">
+            <a:avLst/>
+          </a:prstGeom>
+          <a:noFill/>
+        </p:spPr>
+        <p:txBody>
+          <a:bodyPr wrap="square">
+            <a:spAutoFit/>
+          </a:bodyPr>
+          <a:lstStyle/>
+          <a:p>
+            <a:pPr algn="l"/>
+            <a:r>
+              <a:rPr sz="1300" b="1">
+                <a:solidFill>
+                  <a:srgbClr val="003C6E"/>
+                </a:solidFill>
+              </a:rPr>
+              <a:t>⚙️  Azure Functions</a:t>
+            </a:r>
+          </a:p>
+        </p:txBody>
+      </p:sp>
+      <p:sp>
+        <p:nvSpPr>
+          <p:cNvPr id="28" name="TextBox 27"/>
+          <p:cNvSpPr txBox="1"/>
+          <p:nvPr/>
+        </p:nvSpPr>
+        <p:spPr>
+          <a:xfrm>
+            <a:off x="3364992" y="3566160"/>
+            <a:ext cx="2651760" cy="320040"/>
+          </a:xfrm>
+          <a:prstGeom prst="rect">
+            <a:avLst/>
+          </a:prstGeom>
+          <a:noFill/>
+        </p:spPr>
+        <p:txBody>
+          <a:bodyPr wrap="square">
+            <a:spAutoFit/>
+          </a:bodyPr>
+          <a:lstStyle/>
+          <a:p>
+            <a:pPr algn="l"/>
+            <a:r>
+              <a:rPr sz="1100" b="0">
+                <a:solidFill>
+                  <a:srgbClr val="2C3E50"/>
+                </a:solidFill>
+              </a:rPr>
+              <a:t>7 trigger types</a:t>
+            </a:r>
+          </a:p>
+        </p:txBody>
+      </p:sp>
+      <p:sp>
+        <p:nvSpPr>
+          <p:cNvPr id="29" name="Rounded Rectangle 28"/>
+          <p:cNvSpPr/>
+          <p:nvPr/>
+        </p:nvSpPr>
+        <p:spPr>
+          <a:xfrm>
+            <a:off x="3200400" y="4160520"/>
+            <a:ext cx="109728" cy="640080"/>
+          </a:xfrm>
+          <a:prstGeom prst="roundRect">
+            <a:avLst/>
+          </a:prstGeom>
+          <a:solidFill>
+            <a:srgbClr val="C0392B"/>
+          </a:solidFill>
+          <a:ln>
+            <a:noFill/>
+          </a:ln>
+          <a:effectLst/>
+        </p:spPr>
+        <p:style>
+          <a:lnRef idx="1">
+            <a:schemeClr val="accent1"/>
+          </a:lnRef>
+          <a:fillRef idx="3">
+            <a:schemeClr val="accent1"/>
+          </a:fillRef>
+          <a:effectRef idx="2">
+            <a:schemeClr val="accent1"/>
+          </a:effectRef>
+          <a:fontRef idx="minor">
+            <a:schemeClr val="lt1"/>
+          </a:fontRef>
+        </p:style>
+        <p:txBody>
+          <a:bodyPr rtlCol="0" anchor="ctr"/>
+          <a:lstStyle/>
+          <a:p>
+            <a:pPr algn="ctr"/>
+          </a:p>
+        </p:txBody>
+      </p:sp>
+      <p:sp>
+        <p:nvSpPr>
+          <p:cNvPr id="30" name="TextBox 29"/>
+          <p:cNvSpPr txBox="1"/>
+          <p:nvPr/>
+        </p:nvSpPr>
+        <p:spPr>
+          <a:xfrm>
+            <a:off x="3364992" y="4160520"/>
+            <a:ext cx="2651760" cy="347472"/>
+          </a:xfrm>
+          <a:prstGeom prst="rect">
+            <a:avLst/>
+          </a:prstGeom>
+          <a:noFill/>
+        </p:spPr>
+        <p:txBody>
+          <a:bodyPr wrap="square">
+            <a:spAutoFit/>
+          </a:bodyPr>
+          <a:lstStyle/>
+          <a:p>
+            <a:pPr algn="l"/>
+            <a:r>
+              <a:rPr sz="1300" b="1">
+                <a:solidFill>
+                  <a:srgbClr val="003C6E"/>
+                </a:solidFill>
+              </a:rPr>
+              <a:t>📡  Eventstream Defs</a:t>
+            </a:r>
+          </a:p>
+        </p:txBody>
+      </p:sp>
+      <p:sp>
+        <p:nvSpPr>
+          <p:cNvPr id="31" name="TextBox 30"/>
+          <p:cNvSpPr txBox="1"/>
+          <p:nvPr/>
+        </p:nvSpPr>
+        <p:spPr>
+          <a:xfrm>
+            <a:off x="3364992" y="4480560"/>
+            <a:ext cx="2651760" cy="320040"/>
+          </a:xfrm>
+          <a:prstGeom prst="rect">
+            <a:avLst/>
+          </a:prstGeom>
+          <a:noFill/>
+        </p:spPr>
+        <p:txBody>
+          <a:bodyPr wrap="square">
+            <a:spAutoFit/>
+          </a:bodyPr>
+          <a:lstStyle/>
+          <a:p>
+            <a:pPr algn="l"/>
+            <a:r>
+              <a:rPr sz="1100" b="0">
+                <a:solidFill>
+                  <a:srgbClr val="2C3E50"/>
+                </a:solidFill>
+              </a:rPr>
+              <a:t>Kafka / Event Hub</a:t>
+            </a:r>
+          </a:p>
+        </p:txBody>
+      </p:sp>
+      <p:sp>
+        <p:nvSpPr>
+          <p:cNvPr id="32" name="Rounded Rectangle 31"/>
+          <p:cNvSpPr/>
+          <p:nvPr/>
+        </p:nvSpPr>
+        <p:spPr>
+          <a:xfrm>
+            <a:off x="3200400" y="5074920"/>
+            <a:ext cx="109728" cy="640080"/>
+          </a:xfrm>
+          <a:prstGeom prst="roundRect">
+            <a:avLst/>
+          </a:prstGeom>
+          <a:solidFill>
+            <a:srgbClr val="632CA6"/>
+          </a:solidFill>
+          <a:ln>
+            <a:noFill/>
+          </a:ln>
+          <a:effectLst/>
+        </p:spPr>
+        <p:style>
+          <a:lnRef idx="1">
+            <a:schemeClr val="accent1"/>
+          </a:lnRef>
+          <a:fillRef idx="3">
+            <a:schemeClr val="accent1"/>
+          </a:fillRef>
+          <a:effectRef idx="2">
+            <a:schemeClr val="accent1"/>
+          </a:effectRef>
+          <a:fontRef idx="minor">
+            <a:schemeClr val="lt1"/>
+          </a:fontRef>
+        </p:style>
+        <p:txBody>
+          <a:bodyPr rtlCol="0" anchor="ctr"/>
+          <a:lstStyle/>
+          <a:p>
+            <a:pPr algn="ctr"/>
+          </a:p>
+        </p:txBody>
+      </p:sp>
+      <p:sp>
+        <p:nvSpPr>
+          <p:cNvPr id="33" name="TextBox 32"/>
+          <p:cNvSpPr txBox="1"/>
+          <p:nvPr/>
+        </p:nvSpPr>
+        <p:spPr>
+          <a:xfrm>
+            <a:off x="3364992" y="5074920"/>
+            <a:ext cx="2651760" cy="347472"/>
+          </a:xfrm>
+          <a:prstGeom prst="rect">
+            <a:avLst/>
+          </a:prstGeom>
+          <a:noFill/>
+        </p:spPr>
+        <p:txBody>
+          <a:bodyPr wrap="square">
+            <a:spAutoFit/>
+          </a:bodyPr>
+          <a:lstStyle/>
+          <a:p>
+            <a:pPr algn="l"/>
+            <a:r>
+              <a:rPr sz="1300" b="1">
+                <a:solidFill>
+                  <a:srgbClr val="003C6E"/>
+                </a:solidFill>
+              </a:rPr>
+              <a:t>🔗  Deployment Blueprints</a:t>
+            </a:r>
+          </a:p>
+        </p:txBody>
+      </p:sp>
+      <p:sp>
+        <p:nvSpPr>
+          <p:cNvPr id="34" name="TextBox 33"/>
+          <p:cNvSpPr txBox="1"/>
+          <p:nvPr/>
+        </p:nvSpPr>
+        <p:spPr>
+          <a:xfrm>
+            <a:off x="3364992" y="5394960"/>
+            <a:ext cx="2651760" cy="320040"/>
+          </a:xfrm>
+          <a:prstGeom prst="rect">
+            <a:avLst/>
+          </a:prstGeom>
+          <a:noFill/>
+        </p:spPr>
+        <p:txBody>
+          <a:bodyPr wrap="square">
+            <a:spAutoFit/>
+          </a:bodyPr>
+          <a:lstStyle/>
+          <a:p>
+            <a:pPr algn="l"/>
+            <a:r>
+              <a:rPr sz="1100" b="0">
+                <a:solidFill>
+                  <a:srgbClr val="2C3E50"/>
+                </a:solidFill>
+              </a:rPr>
+              <a:t>Bicep / Terraform</a:t>
+            </a:r>
+          </a:p>
+        </p:txBody>
+      </p:sp>
+      <p:sp>
+        <p:nvSpPr>
+          <p:cNvPr id="35" name="Rounded Rectangle 34"/>
+          <p:cNvSpPr/>
+          <p:nvPr/>
+        </p:nvSpPr>
+        <p:spPr>
+          <a:xfrm>
+            <a:off x="6126480" y="1417320"/>
+            <a:ext cx="109728" cy="640080"/>
+          </a:xfrm>
+          <a:prstGeom prst="roundRect">
+            <a:avLst/>
+          </a:prstGeom>
+          <a:solidFill>
+            <a:srgbClr val="27AE60"/>
+          </a:solidFill>
+          <a:ln>
+            <a:noFill/>
+          </a:ln>
+          <a:effectLst/>
+        </p:spPr>
+        <p:style>
+          <a:lnRef idx="1">
+            <a:schemeClr val="accent1"/>
+          </a:lnRef>
+          <a:fillRef idx="3">
+            <a:schemeClr val="accent1"/>
+          </a:fillRef>
+          <a:effectRef idx="2">
+            <a:schemeClr val="accent1"/>
+          </a:effectRef>
+          <a:fontRef idx="minor">
+            <a:schemeClr val="lt1"/>
+          </a:fontRef>
+        </p:style>
+        <p:txBody>
+          <a:bodyPr rtlCol="0" anchor="ctr"/>
+          <a:lstStyle/>
+          <a:p>
+            <a:pPr algn="ctr"/>
+          </a:p>
+        </p:txBody>
+      </p:sp>
+      <p:sp>
+        <p:nvSpPr>
+          <p:cNvPr id="36" name="TextBox 35"/>
+          <p:cNvSpPr txBox="1"/>
+          <p:nvPr/>
+        </p:nvSpPr>
+        <p:spPr>
+          <a:xfrm>
+            <a:off x="6291072" y="1417320"/>
+            <a:ext cx="2651760" cy="347472"/>
+          </a:xfrm>
+          <a:prstGeom prst="rect">
+            <a:avLst/>
+          </a:prstGeom>
+          <a:noFill/>
+        </p:spPr>
+        <p:txBody>
+          <a:bodyPr wrap="square">
+            <a:spAutoFit/>
+          </a:bodyPr>
+          <a:lstStyle/>
+          <a:p>
+            <a:pPr algn="l"/>
+            <a:r>
+              <a:rPr sz="1300" b="1">
+                <a:solidFill>
+                  <a:srgbClr val="003C6E"/>
+                </a:solidFill>
+              </a:rPr>
+              <a:t>✅  Validation Scripts</a:t>
+            </a:r>
+          </a:p>
+        </p:txBody>
+      </p:sp>
+      <p:sp>
+        <p:nvSpPr>
+          <p:cNvPr id="37" name="TextBox 36"/>
+          <p:cNvSpPr txBox="1"/>
+          <p:nvPr/>
+        </p:nvSpPr>
+        <p:spPr>
+          <a:xfrm>
+            <a:off x="6291072" y="1737360"/>
+            <a:ext cx="2651760" cy="320040"/>
+          </a:xfrm>
+          <a:prstGeom prst="rect">
+            <a:avLst/>
+          </a:prstGeom>
+          <a:noFill/>
+        </p:spPr>
+        <p:txBody>
+          <a:bodyPr wrap="square">
+            <a:spAutoFit/>
+          </a:bodyPr>
+          <a:lstStyle/>
+          <a:p>
+            <a:pPr algn="l"/>
+            <a:r>
+              <a:rPr sz="1100" b="0">
+                <a:solidFill>
+                  <a:srgbClr val="2C3E50"/>
+                </a:solidFill>
+              </a:rPr>
+              <a:t>VAL_*.py (6 levels)</a:t>
+            </a:r>
+          </a:p>
+        </p:txBody>
+      </p:sp>
+      <p:sp>
+        <p:nvSpPr>
+          <p:cNvPr id="38" name="Rounded Rectangle 37"/>
+          <p:cNvSpPr/>
+          <p:nvPr/>
+        </p:nvSpPr>
+        <p:spPr>
+          <a:xfrm>
+            <a:off x="6126480" y="2331720"/>
+            <a:ext cx="109728" cy="640080"/>
+          </a:xfrm>
+          <a:prstGeom prst="roundRect">
+            <a:avLst/>
+          </a:prstGeom>
+          <a:solidFill>
+            <a:srgbClr val="0078D4"/>
+          </a:solidFill>
+          <a:ln>
+            <a:noFill/>
+          </a:ln>
+          <a:effectLst/>
+        </p:spPr>
+        <p:style>
+          <a:lnRef idx="1">
+            <a:schemeClr val="accent1"/>
+          </a:lnRef>
+          <a:fillRef idx="3">
+            <a:schemeClr val="accent1"/>
+          </a:fillRef>
+          <a:effectRef idx="2">
+            <a:schemeClr val="accent1"/>
+          </a:effectRef>
+          <a:fontRef idx="minor">
+            <a:schemeClr val="lt1"/>
+          </a:fontRef>
+        </p:style>
+        <p:txBody>
+          <a:bodyPr rtlCol="0" anchor="ctr"/>
+          <a:lstStyle/>
+          <a:p>
+            <a:pPr algn="ctr"/>
+          </a:p>
+        </p:txBody>
+      </p:sp>
+      <p:sp>
+        <p:nvSpPr>
+          <p:cNvPr id="39" name="TextBox 38"/>
+          <p:cNvSpPr txBox="1"/>
+          <p:nvPr/>
+        </p:nvSpPr>
+        <p:spPr>
+          <a:xfrm>
+            <a:off x="6291072" y="2331720"/>
+            <a:ext cx="2651760" cy="347472"/>
+          </a:xfrm>
+          <a:prstGeom prst="rect">
+            <a:avLst/>
+          </a:prstGeom>
+          <a:noFill/>
+        </p:spPr>
+        <p:txBody>
+          <a:bodyPr wrap="square">
+            <a:spAutoFit/>
+          </a:bodyPr>
+          <a:lstStyle/>
+          <a:p>
+            <a:pPr algn="l"/>
+            <a:r>
+              <a:rPr sz="1300" b="1">
+                <a:solidFill>
+                  <a:srgbClr val="003C6E"/>
+                </a:solidFill>
+              </a:rPr>
+              <a:t>📊  Inventory &amp; Reports</a:t>
+            </a:r>
+          </a:p>
+        </p:txBody>
+      </p:sp>
+      <p:sp>
+        <p:nvSpPr>
+          <p:cNvPr id="40" name="TextBox 39"/>
+          <p:cNvSpPr txBox="1"/>
+          <p:nvPr/>
+        </p:nvSpPr>
+        <p:spPr>
+          <a:xfrm>
+            <a:off x="6291072" y="2651760"/>
+            <a:ext cx="2651760" cy="320040"/>
+          </a:xfrm>
+          <a:prstGeom prst="rect">
+            <a:avLst/>
+          </a:prstGeom>
+          <a:noFill/>
+        </p:spPr>
+        <p:txBody>
+          <a:bodyPr wrap="square">
+            <a:spAutoFit/>
+          </a:bodyPr>
+          <a:lstStyle/>
+          <a:p>
+            <a:pPr algn="l"/>
+            <a:r>
+              <a:rPr sz="1100" b="0">
+                <a:solidFill>
+                  <a:srgbClr val="2C3E50"/>
+                </a:solidFill>
+              </a:rPr>
+              <a:t>JSON + HTML + SVG</a:t>
+            </a:r>
+          </a:p>
+        </p:txBody>
+      </p:sp>
+      <p:sp>
+        <p:nvSpPr>
+          <p:cNvPr id="41" name="Rounded Rectangle 40"/>
+          <p:cNvSpPr/>
+          <p:nvPr/>
+        </p:nvSpPr>
+        <p:spPr>
+          <a:xfrm>
+            <a:off x="6126480" y="3246120"/>
+            <a:ext cx="109728" cy="640080"/>
+          </a:xfrm>
+          <a:prstGeom prst="roundRect">
+            <a:avLst/>
+          </a:prstGeom>
+          <a:solidFill>
+            <a:srgbClr val="F39C12"/>
+          </a:solidFill>
+          <a:ln>
+            <a:noFill/>
+          </a:ln>
+          <a:effectLst/>
+        </p:spPr>
+        <p:style>
+          <a:lnRef idx="1">
+            <a:schemeClr val="accent1"/>
+          </a:lnRef>
+          <a:fillRef idx="3">
+            <a:schemeClr val="accent1"/>
+          </a:fillRef>
+          <a:effectRef idx="2">
+            <a:schemeClr val="accent1"/>
+          </a:effectRef>
+          <a:fontRef idx="minor">
+            <a:schemeClr val="lt1"/>
+          </a:fontRef>
+        </p:style>
+        <p:txBody>
+          <a:bodyPr rtlCol="0" anchor="ctr"/>
+          <a:lstStyle/>
+          <a:p>
+            <a:pPr algn="ctr"/>
+          </a:p>
+        </p:txBody>
+      </p:sp>
+      <p:sp>
+        <p:nvSpPr>
+          <p:cNvPr id="42" name="TextBox 41"/>
+          <p:cNvSpPr txBox="1"/>
+          <p:nvPr/>
+        </p:nvSpPr>
+        <p:spPr>
+          <a:xfrm>
+            <a:off x="6291072" y="3246120"/>
+            <a:ext cx="2651760" cy="347472"/>
+          </a:xfrm>
+          <a:prstGeom prst="rect">
+            <a:avLst/>
+          </a:prstGeom>
+          <a:noFill/>
+        </p:spPr>
+        <p:txBody>
+          <a:bodyPr wrap="square">
+            <a:spAutoFit/>
+          </a:bodyPr>
+          <a:lstStyle/>
+          <a:p>
+            <a:pPr algn="l"/>
+            <a:r>
+              <a:rPr sz="1300" b="1">
+                <a:solidFill>
+                  <a:srgbClr val="003C6E"/>
+                </a:solidFill>
+              </a:rPr>
+              <a:t>🔒  Security Policies</a:t>
+            </a:r>
+          </a:p>
+        </p:txBody>
+      </p:sp>
+      <p:sp>
+        <p:nvSpPr>
+          <p:cNvPr id="43" name="TextBox 42"/>
+          <p:cNvSpPr txBox="1"/>
+          <p:nvPr/>
+        </p:nvSpPr>
+        <p:spPr>
+          <a:xfrm>
+            <a:off x="6291072" y="3566160"/>
+            <a:ext cx="2651760" cy="320040"/>
+          </a:xfrm>
+          <a:prstGeom prst="rect">
+            <a:avLst/>
+          </a:prstGeom>
+          <a:noFill/>
+        </p:spPr>
+        <p:txBody>
+          <a:bodyPr wrap="square">
+            <a:spAutoFit/>
+          </a:bodyPr>
+          <a:lstStyle/>
+          <a:p>
+            <a:pPr algn="l"/>
+            <a:r>
+              <a:rPr sz="1100" b="0">
+                <a:solidFill>
+                  <a:srgbClr val="2C3E50"/>
+                </a:solidFill>
+              </a:rPr>
+              <a:t>RLS / column masking</a:t>
+            </a:r>
+          </a:p>
+        </p:txBody>
+      </p:sp>
+      <p:sp>
+        <p:nvSpPr>
+          <p:cNvPr id="44" name="Rounded Rectangle 43"/>
+          <p:cNvSpPr/>
+          <p:nvPr/>
+        </p:nvSpPr>
+        <p:spPr>
+          <a:xfrm>
+            <a:off x="6126480" y="4160520"/>
+            <a:ext cx="109728" cy="640080"/>
+          </a:xfrm>
+          <a:prstGeom prst="roundRect">
+            <a:avLst/>
+          </a:prstGeom>
+          <a:solidFill>
+            <a:srgbClr val="F39C12"/>
+          </a:solidFill>
+          <a:ln>
+            <a:noFill/>
+          </a:ln>
+          <a:effectLst/>
+        </p:spPr>
+        <p:style>
+          <a:lnRef idx="1">
+            <a:schemeClr val="accent1"/>
+          </a:lnRef>
+          <a:fillRef idx="3">
+            <a:schemeClr val="accent1"/>
+          </a:fillRef>
+          <a:effectRef idx="2">
+            <a:schemeClr val="accent1"/>
+          </a:effectRef>
+          <a:fontRef idx="minor">
+            <a:schemeClr val="lt1"/>
+          </a:fontRef>
+        </p:style>
+        <p:txBody>
+          <a:bodyPr rtlCol="0" anchor="ctr"/>
+          <a:lstStyle/>
+          <a:p>
+            <a:pPr algn="ctr"/>
+          </a:p>
+        </p:txBody>
+      </p:sp>
+      <p:sp>
+        <p:nvSpPr>
+          <p:cNvPr id="45" name="TextBox 44"/>
+          <p:cNvSpPr txBox="1"/>
+          <p:nvPr/>
+        </p:nvSpPr>
+        <p:spPr>
+          <a:xfrm>
+            <a:off x="6291072" y="4160520"/>
+            <a:ext cx="2651760" cy="347472"/>
+          </a:xfrm>
+          <a:prstGeom prst="rect">
+            <a:avLst/>
+          </a:prstGeom>
+          <a:noFill/>
+        </p:spPr>
+        <p:txBody>
+          <a:bodyPr wrap="square">
+            <a:spAutoFit/>
+          </a:bodyPr>
+          <a:lstStyle/>
+          <a:p>
+            <a:pPr algn="l"/>
+            <a:r>
+              <a:rPr sz="1300" b="1">
+                <a:solidFill>
+                  <a:srgbClr val="003C6E"/>
+                </a:solidFill>
+              </a:rPr>
+              <a:t>📋  Compliance Docs</a:t>
+            </a:r>
+          </a:p>
+        </p:txBody>
+      </p:sp>
+      <p:sp>
+        <p:nvSpPr>
+          <p:cNvPr id="46" name="TextBox 45"/>
+          <p:cNvSpPr txBox="1"/>
+          <p:nvPr/>
+        </p:nvSpPr>
+        <p:spPr>
+          <a:xfrm>
+            <a:off x="6291072" y="4480560"/>
+            <a:ext cx="2651760" cy="320040"/>
+          </a:xfrm>
+          <a:prstGeom prst="rect">
+            <a:avLst/>
+          </a:prstGeom>
+          <a:noFill/>
+        </p:spPr>
+        <p:txBody>
+          <a:bodyPr wrap="square">
+            <a:spAutoFit/>
+          </a:bodyPr>
+          <a:lstStyle/>
+          <a:p>
+            <a:pPr algn="l"/>
+            <a:r>
+              <a:rPr sz="1100" b="0">
+                <a:solidFill>
+                  <a:srgbClr val="2C3E50"/>
+                </a:solidFill>
+              </a:rPr>
+              <a:t>GDPR / CCPA / PII</a:t>
+            </a:r>
+          </a:p>
+        </p:txBody>
+      </p:sp>
+      <p:sp>
+        <p:nvSpPr>
+          <p:cNvPr id="47" name="Rounded Rectangle 46"/>
+          <p:cNvSpPr/>
+          <p:nvPr/>
+        </p:nvSpPr>
+        <p:spPr>
+          <a:xfrm>
+            <a:off x="6126480" y="5074920"/>
+            <a:ext cx="109728" cy="640080"/>
+          </a:xfrm>
+          <a:prstGeom prst="roundRect">
+            <a:avLst/>
+          </a:prstGeom>
+          <a:solidFill>
+            <a:srgbClr val="003C6E"/>
+          </a:solidFill>
+          <a:ln>
+            <a:noFill/>
+          </a:ln>
+          <a:effectLst/>
+        </p:spPr>
+        <p:style>
+          <a:lnRef idx="1">
+            <a:schemeClr val="accent1"/>
+          </a:lnRef>
+          <a:fillRef idx="3">
+            <a:schemeClr val="accent1"/>
+          </a:fillRef>
+          <a:effectRef idx="2">
+            <a:schemeClr val="accent1"/>
+          </a:effectRef>
+          <a:fontRef idx="minor">
+            <a:schemeClr val="lt1"/>
+          </a:fontRef>
+        </p:style>
+        <p:txBody>
+          <a:bodyPr rtlCol="0" anchor="ctr"/>
+          <a:lstStyle/>
+          <a:p>
+            <a:pPr algn="ctr"/>
+          </a:p>
+        </p:txBody>
+      </p:sp>
+      <p:sp>
+        <p:nvSpPr>
+          <p:cNvPr id="48" name="TextBox 47"/>
+          <p:cNvSpPr txBox="1"/>
+          <p:nvPr/>
+        </p:nvSpPr>
+        <p:spPr>
+          <a:xfrm>
+            <a:off x="6291072" y="5074920"/>
+            <a:ext cx="2651760" cy="347472"/>
+          </a:xfrm>
+          <a:prstGeom prst="rect">
+            <a:avLst/>
+          </a:prstGeom>
+          <a:noFill/>
+        </p:spPr>
+        <p:txBody>
+          <a:bodyPr wrap="square">
+            <a:spAutoFit/>
+          </a:bodyPr>
+          <a:lstStyle/>
+          <a:p>
+            <a:pPr algn="l"/>
+            <a:r>
+              <a:rPr sz="1300" b="1">
+                <a:solidFill>
+                  <a:srgbClr val="003C6E"/>
+                </a:solidFill>
+              </a:rPr>
+              <a:t>🏷️  Catalog Metadata</a:t>
+            </a:r>
+          </a:p>
+        </p:txBody>
+      </p:sp>
+      <p:sp>
+        <p:nvSpPr>
+          <p:cNvPr id="49" name="TextBox 48"/>
+          <p:cNvSpPr txBox="1"/>
+          <p:nvPr/>
+        </p:nvSpPr>
+        <p:spPr>
+          <a:xfrm>
+            <a:off x="6291072" y="5394960"/>
+            <a:ext cx="2651760" cy="320040"/>
+          </a:xfrm>
+          <a:prstGeom prst="rect">
+            <a:avLst/>
+          </a:prstGeom>
+          <a:noFill/>
+        </p:spPr>
+        <p:txBody>
+          <a:bodyPr wrap="square">
+            <a:spAutoFit/>
+          </a:bodyPr>
+          <a:lstStyle/>
+          <a:p>
+            <a:pPr algn="l"/>
+            <a:r>
+              <a:rPr sz="1100" b="0">
+                <a:solidFill>
+                  <a:srgbClr val="2C3E50"/>
+                </a:solidFill>
+              </a:rPr>
+              <a:t>Purview / Unity Catalog</a:t>
+            </a:r>
+          </a:p>
+        </p:txBody>
+      </p:sp>
+      <p:sp>
+        <p:nvSpPr>
+          <p:cNvPr id="50" name="Rounded Rectangle 49"/>
+          <p:cNvSpPr/>
+          <p:nvPr/>
+        </p:nvSpPr>
+        <p:spPr>
+          <a:xfrm>
+            <a:off x="9052560" y="1417320"/>
+            <a:ext cx="109728" cy="640080"/>
+          </a:xfrm>
+          <a:prstGeom prst="roundRect">
+            <a:avLst/>
+          </a:prstGeom>
+          <a:solidFill>
+            <a:srgbClr val="1ABC9C"/>
+          </a:solidFill>
+          <a:ln>
+            <a:noFill/>
+          </a:ln>
+          <a:effectLst/>
+        </p:spPr>
+        <p:style>
+          <a:lnRef idx="1">
+            <a:schemeClr val="accent1"/>
+          </a:lnRef>
+          <a:fillRef idx="3">
+            <a:schemeClr val="accent1"/>
+          </a:fillRef>
+          <a:effectRef idx="2">
+            <a:schemeClr val="accent1"/>
+          </a:effectRef>
+          <a:fontRef idx="minor">
+            <a:schemeClr val="lt1"/>
+          </a:fontRef>
+        </p:style>
+        <p:txBody>
+          <a:bodyPr rtlCol="0" anchor="ctr"/>
+          <a:lstStyle/>
+          <a:p>
+            <a:pPr algn="ctr"/>
+          </a:p>
+        </p:txBody>
+      </p:sp>
+      <p:sp>
+        <p:nvSpPr>
+          <p:cNvPr id="51" name="TextBox 50"/>
+          <p:cNvSpPr txBox="1"/>
+          <p:nvPr/>
+        </p:nvSpPr>
+        <p:spPr>
+          <a:xfrm>
+            <a:off x="9217152" y="1417320"/>
+            <a:ext cx="2651760" cy="347472"/>
+          </a:xfrm>
+          <a:prstGeom prst="rect">
+            <a:avLst/>
+          </a:prstGeom>
+          <a:noFill/>
+        </p:spPr>
+        <p:txBody>
+          <a:bodyPr wrap="square">
+            <a:spAutoFit/>
+          </a:bodyPr>
+          <a:lstStyle/>
+          <a:p>
+            <a:pPr algn="l"/>
+            <a:r>
+              <a:rPr sz="1300" b="1">
+                <a:solidFill>
+                  <a:srgbClr val="003C6E"/>
+                </a:solidFill>
+              </a:rPr>
+              <a:t>🏗️  IaC Templates</a:t>
+            </a:r>
+          </a:p>
+        </p:txBody>
+      </p:sp>
+      <p:sp>
+        <p:nvSpPr>
+          <p:cNvPr id="52" name="TextBox 51"/>
+          <p:cNvSpPr txBox="1"/>
+          <p:nvPr/>
+        </p:nvSpPr>
+        <p:spPr>
+          <a:xfrm>
+            <a:off x="9217152" y="1737360"/>
+            <a:ext cx="2651760" cy="320040"/>
+          </a:xfrm>
+          <a:prstGeom prst="rect">
+            <a:avLst/>
+          </a:prstGeom>
+          <a:noFill/>
+        </p:spPr>
+        <p:txBody>
+          <a:bodyPr wrap="square">
+            <a:spAutoFit/>
+          </a:bodyPr>
+          <a:lstStyle/>
+          <a:p>
+            <a:pPr algn="l"/>
+            <a:r>
+              <a:rPr sz="1100" b="0">
+                <a:solidFill>
+                  <a:srgbClr val="2C3E50"/>
+                </a:solidFill>
+              </a:rPr>
+              <a:t>Terraform HCL + Bicep</a:t>
+            </a:r>
+          </a:p>
+        </p:txBody>
+      </p:sp>
+      <p:sp>
+        <p:nvSpPr>
+          <p:cNvPr id="53" name="Rounded Rectangle 52"/>
+          <p:cNvSpPr/>
+          <p:nvPr/>
+        </p:nvSpPr>
+        <p:spPr>
+          <a:xfrm>
+            <a:off x="9052560" y="2331720"/>
+            <a:ext cx="109728" cy="640080"/>
+          </a:xfrm>
+          <a:prstGeom prst="roundRect">
+            <a:avLst/>
+          </a:prstGeom>
+          <a:solidFill>
+            <a:srgbClr val="27AE60"/>
+          </a:solidFill>
+          <a:ln>
+            <a:noFill/>
+          </a:ln>
+          <a:effectLst/>
+        </p:spPr>
+        <p:style>
+          <a:lnRef idx="1">
+            <a:schemeClr val="accent1"/>
+          </a:lnRef>
+          <a:fillRef idx="3">
+            <a:schemeClr val="accent1"/>
+          </a:fillRef>
+          <a:effectRef idx="2">
+            <a:schemeClr val="accent1"/>
+          </a:effectRef>
+          <a:fontRef idx="minor">
+            <a:schemeClr val="lt1"/>
+          </a:fontRef>
+        </p:style>
+        <p:txBody>
+          <a:bodyPr rtlCol="0" anchor="ctr"/>
+          <a:lstStyle/>
+          <a:p>
+            <a:pPr algn="ctr"/>
+          </a:p>
+        </p:txBody>
+      </p:sp>
+      <p:sp>
+        <p:nvSpPr>
+          <p:cNvPr id="54" name="TextBox 53"/>
+          <p:cNvSpPr txBox="1"/>
+          <p:nvPr/>
+        </p:nvSpPr>
+        <p:spPr>
+          <a:xfrm>
+            <a:off x="9217152" y="2331720"/>
+            <a:ext cx="2651760" cy="347472"/>
+          </a:xfrm>
+          <a:prstGeom prst="rect">
+            <a:avLst/>
+          </a:prstGeom>
+          <a:noFill/>
+        </p:spPr>
+        <p:txBody>
+          <a:bodyPr wrap="square">
+            <a:spAutoFit/>
+          </a:bodyPr>
+          <a:lstStyle/>
+          <a:p>
+            <a:pPr algn="l"/>
+            <a:r>
+              <a:rPr sz="1300" b="1">
+                <a:solidFill>
+                  <a:srgbClr val="003C6E"/>
+                </a:solidFill>
+              </a:rPr>
+              <a:t>🔄  CI/CD Pipelines</a:t>
+            </a:r>
+          </a:p>
+        </p:txBody>
+      </p:sp>
+      <p:sp>
+        <p:nvSpPr>
+          <p:cNvPr id="55" name="TextBox 54"/>
+          <p:cNvSpPr txBox="1"/>
+          <p:nvPr/>
+        </p:nvSpPr>
+        <p:spPr>
+          <a:xfrm>
+            <a:off x="9217152" y="2651760"/>
+            <a:ext cx="2651760" cy="320040"/>
+          </a:xfrm>
+          <a:prstGeom prst="rect">
+            <a:avLst/>
+          </a:prstGeom>
+          <a:noFill/>
+        </p:spPr>
+        <p:txBody>
+          <a:bodyPr wrap="square">
+            <a:spAutoFit/>
+          </a:bodyPr>
+          <a:lstStyle/>
+          <a:p>
+            <a:pPr algn="l"/>
+            <a:r>
+              <a:rPr sz="1100" b="0">
+                <a:solidFill>
+                  <a:srgbClr val="2C3E50"/>
+                </a:solidFill>
+              </a:rPr>
+              <a:t>GitHub Actions / ADO</a:t>
+            </a:r>
+          </a:p>
+        </p:txBody>
+      </p:sp>
+      <p:sp>
+        <p:nvSpPr>
+          <p:cNvPr id="56" name="Rounded Rectangle 55"/>
+          <p:cNvSpPr/>
+          <p:nvPr/>
+        </p:nvSpPr>
+        <p:spPr>
+          <a:xfrm>
+            <a:off x="9052560" y="3246120"/>
+            <a:ext cx="109728" cy="640080"/>
+          </a:xfrm>
+          <a:prstGeom prst="roundRect">
+            <a:avLst/>
+          </a:prstGeom>
+          <a:solidFill>
+            <a:srgbClr val="0078D4"/>
+          </a:solidFill>
+          <a:ln>
+            <a:noFill/>
+          </a:ln>
+          <a:effectLst/>
+        </p:spPr>
+        <p:style>
+          <a:lnRef idx="1">
+            <a:schemeClr val="accent1"/>
+          </a:lnRef>
+          <a:fillRef idx="3">
+            <a:schemeClr val="accent1"/>
+          </a:fillRef>
+          <a:effectRef idx="2">
+            <a:schemeClr val="accent1"/>
+          </a:effectRef>
+          <a:fontRef idx="minor">
+            <a:schemeClr val="lt1"/>
+          </a:fontRef>
+        </p:style>
+        <p:txBody>
+          <a:bodyPr rtlCol="0" anchor="ctr"/>
+          <a:lstStyle/>
+          <a:p>
+            <a:pPr algn="ctr"/>
+          </a:p>
+        </p:txBody>
+      </p:sp>
+      <p:sp>
+        <p:nvSpPr>
+          <p:cNvPr id="57" name="TextBox 56"/>
+          <p:cNvSpPr txBox="1"/>
+          <p:nvPr/>
+        </p:nvSpPr>
+        <p:spPr>
+          <a:xfrm>
+            <a:off x="9217152" y="3246120"/>
+            <a:ext cx="2651760" cy="347472"/>
+          </a:xfrm>
+          <a:prstGeom prst="rect">
+            <a:avLst/>
+          </a:prstGeom>
+          <a:noFill/>
+        </p:spPr>
+        <p:txBody>
+          <a:bodyPr wrap="square">
+            <a:spAutoFit/>
+          </a:bodyPr>
+          <a:lstStyle/>
+          <a:p>
+            <a:pPr algn="l"/>
+            <a:r>
+              <a:rPr sz="1300" b="1">
+                <a:solidFill>
+                  <a:srgbClr val="003C6E"/>
+                </a:solidFill>
+              </a:rPr>
+              <a:t>🐳  Container Configs</a:t>
+            </a:r>
+          </a:p>
+        </p:txBody>
+      </p:sp>
+      <p:sp>
+        <p:nvSpPr>
+          <p:cNvPr id="58" name="TextBox 57"/>
+          <p:cNvSpPr txBox="1"/>
+          <p:nvPr/>
+        </p:nvSpPr>
+        <p:spPr>
+          <a:xfrm>
+            <a:off x="9217152" y="3566160"/>
+            <a:ext cx="2651760" cy="320040"/>
+          </a:xfrm>
+          <a:prstGeom prst="rect">
+            <a:avLst/>
+          </a:prstGeom>
+          <a:noFill/>
+        </p:spPr>
+        <p:txBody>
+          <a:bodyPr wrap="square">
+            <a:spAutoFit/>
+          </a:bodyPr>
+          <a:lstStyle/>
+          <a:p>
+            <a:pPr algn="l"/>
+            <a:r>
+              <a:rPr sz="1100" b="0">
+                <a:solidFill>
+                  <a:srgbClr val="2C3E50"/>
+                </a:solidFill>
+              </a:rPr>
+              <a:t>Docker / K8s / Helm</a:t>
+            </a:r>
+          </a:p>
+        </p:txBody>
+      </p:sp>
+      <p:sp>
+        <p:nvSpPr>
+          <p:cNvPr id="59" name="Rounded Rectangle 58"/>
+          <p:cNvSpPr/>
+          <p:nvPr/>
+        </p:nvSpPr>
+        <p:spPr>
+          <a:xfrm>
+            <a:off x="9052560" y="4160520"/>
+            <a:ext cx="109728" cy="640080"/>
+          </a:xfrm>
+          <a:prstGeom prst="roundRect">
+            <a:avLst/>
+          </a:prstGeom>
+          <a:solidFill>
+            <a:srgbClr val="003C6E"/>
+          </a:solidFill>
+          <a:ln>
+            <a:noFill/>
+          </a:ln>
+          <a:effectLst/>
+        </p:spPr>
+        <p:style>
+          <a:lnRef idx="1">
+            <a:schemeClr val="accent1"/>
+          </a:lnRef>
+          <a:fillRef idx="3">
+            <a:schemeClr val="accent1"/>
+          </a:fillRef>
+          <a:effectRef idx="2">
+            <a:schemeClr val="accent1"/>
+          </a:effectRef>
+          <a:fontRef idx="minor">
+            <a:schemeClr val="lt1"/>
+          </a:fontRef>
+        </p:style>
+        <p:txBody>
+          <a:bodyPr rtlCol="0" anchor="ctr"/>
+          <a:lstStyle/>
+          <a:p>
+            <a:pPr algn="ctr"/>
+          </a:p>
+        </p:txBody>
+      </p:sp>
+      <p:sp>
+        <p:nvSpPr>
+          <p:cNvPr id="60" name="TextBox 59"/>
+          <p:cNvSpPr txBox="1"/>
+          <p:nvPr/>
+        </p:nvSpPr>
+        <p:spPr>
+          <a:xfrm>
+            <a:off x="9217152" y="4160520"/>
+            <a:ext cx="2651760" cy="347472"/>
+          </a:xfrm>
+          <a:prstGeom prst="rect">
+            <a:avLst/>
+          </a:prstGeom>
+          <a:noFill/>
+        </p:spPr>
+        <p:txBody>
+          <a:bodyPr wrap="square">
+            <a:spAutoFit/>
+          </a:bodyPr>
+          <a:lstStyle/>
+          <a:p>
+            <a:pPr algn="l"/>
+            <a:r>
+              <a:rPr sz="1300" b="1">
+                <a:solidFill>
+                  <a:srgbClr val="003C6E"/>
+                </a:solidFill>
+              </a:rPr>
+              <a:t>🧠  ML Pipelines</a:t>
+            </a:r>
+          </a:p>
+        </p:txBody>
+      </p:sp>
+      <p:sp>
+        <p:nvSpPr>
+          <p:cNvPr id="61" name="TextBox 60"/>
+          <p:cNvSpPr txBox="1"/>
+          <p:nvPr/>
+        </p:nvSpPr>
+        <p:spPr>
+          <a:xfrm>
+            <a:off x="9217152" y="4480560"/>
+            <a:ext cx="2651760" cy="320040"/>
+          </a:xfrm>
+          <a:prstGeom prst="rect">
+            <a:avLst/>
+          </a:prstGeom>
+          <a:noFill/>
+        </p:spPr>
+        <p:txBody>
+          <a:bodyPr wrap="square">
+            <a:spAutoFit/>
+          </a:bodyPr>
+          <a:lstStyle/>
+          <a:p>
+            <a:pPr algn="l"/>
+            <a:r>
+              <a:rPr sz="1100" b="0">
+                <a:solidFill>
+                  <a:srgbClr val="2C3E50"/>
+                </a:solidFill>
+              </a:rPr>
+              <a:t>Feature Store / MLflow</a:t>
+            </a:r>
+          </a:p>
+        </p:txBody>
+      </p:sp>
+      <p:sp>
+        <p:nvSpPr>
+          <p:cNvPr id="62" name="Rounded Rectangle 61"/>
+          <p:cNvSpPr/>
+          <p:nvPr/>
+        </p:nvSpPr>
+        <p:spPr>
+          <a:xfrm>
+            <a:off x="9052560" y="5074920"/>
+            <a:ext cx="109728" cy="640080"/>
+          </a:xfrm>
+          <a:prstGeom prst="roundRect">
+            <a:avLst/>
+          </a:prstGeom>
+          <a:solidFill>
+            <a:srgbClr val="FF4500"/>
+          </a:solidFill>
+          <a:ln>
+            <a:noFill/>
+          </a:ln>
+          <a:effectLst/>
+        </p:spPr>
+        <p:style>
+          <a:lnRef idx="1">
+            <a:schemeClr val="accent1"/>
+          </a:lnRef>
+          <a:fillRef idx="3">
+            <a:schemeClr val="accent1"/>
+          </a:fillRef>
+          <a:effectRef idx="2">
+            <a:schemeClr val="accent1"/>
+          </a:effectRef>
+          <a:fontRef idx="minor">
+            <a:schemeClr val="lt1"/>
+          </a:fontRef>
+        </p:style>
+        <p:txBody>
+          <a:bodyPr rtlCol="0" anchor="ctr"/>
+          <a:lstStyle/>
+          <a:p>
+            <a:pPr algn="ctr"/>
+          </a:p>
+        </p:txBody>
+      </p:sp>
+      <p:sp>
+        <p:nvSpPr>
+          <p:cNvPr id="63" name="TextBox 62"/>
+          <p:cNvSpPr txBox="1"/>
+          <p:nvPr/>
+        </p:nvSpPr>
+        <p:spPr>
+          <a:xfrm>
+            <a:off x="9217152" y="5074920"/>
+            <a:ext cx="2651760" cy="347472"/>
+          </a:xfrm>
+          <a:prstGeom prst="rect">
+            <a:avLst/>
+          </a:prstGeom>
+          <a:noFill/>
+        </p:spPr>
+        <p:txBody>
+          <a:bodyPr wrap="square">
+            <a:spAutoFit/>
+          </a:bodyPr>
+          <a:lstStyle/>
+          <a:p>
+            <a:pPr algn="l"/>
+            <a:r>
+              <a:rPr sz="1300" b="1">
+                <a:solidFill>
+                  <a:srgbClr val="003C6E"/>
+                </a:solidFill>
+              </a:rPr>
+              <a:t>💰  Cost Reports</a:t>
+            </a:r>
+          </a:p>
+        </p:txBody>
+      </p:sp>
+      <p:sp>
+        <p:nvSpPr>
+          <p:cNvPr id="64" name="TextBox 63"/>
+          <p:cNvSpPr txBox="1"/>
+          <p:nvPr/>
+        </p:nvSpPr>
+        <p:spPr>
+          <a:xfrm>
+            <a:off x="9217152" y="5394960"/>
+            <a:ext cx="2651760" cy="320040"/>
+          </a:xfrm>
+          <a:prstGeom prst="rect">
+            <a:avLst/>
+          </a:prstGeom>
+          <a:noFill/>
+        </p:spPr>
+        <p:txBody>
+          <a:bodyPr wrap="square">
+            <a:spAutoFit/>
+          </a:bodyPr>
+          <a:lstStyle/>
+          <a:p>
+            <a:pPr algn="l"/>
+            <a:r>
+              <a:rPr sz="1100" b="0">
+                <a:solidFill>
+                  <a:srgbClr val="2C3E50"/>
+                </a:solidFill>
+              </a:rPr>
+              <a:t>TCO / DBU estimates</a:t>
+            </a:r>
+          </a:p>
+        </p:txBody>
+      </p:sp>
+      <p:sp>
+        <p:nvSpPr>
+          <p:cNvPr id="65" name="TextBox 64"/>
+          <p:cNvSpPr txBox="1"/>
+          <p:nvPr/>
+        </p:nvSpPr>
+        <p:spPr>
+          <a:xfrm>
+            <a:off x="274320" y="6126480"/>
+            <a:ext cx="11430000" cy="457200"/>
+          </a:xfrm>
+          <a:prstGeom prst="rect">
+            <a:avLst/>
+          </a:prstGeom>
+          <a:noFill/>
+        </p:spPr>
+        <p:txBody>
+          <a:bodyPr wrap="square">
+            <a:spAutoFit/>
+          </a:bodyPr>
+          <a:lstStyle/>
+          <a:p>
+            <a:pPr algn="ctr"/>
+            <a:r>
+              <a:rPr sz="1200" b="0">
+                <a:solidFill>
+                  <a:srgbClr val="95A5A6"/>
+                </a:solidFill>
+              </a:rPr>
+              <a:t>CLI:  informatica-to-fabric --target fabric | databricks | dbt | auto    •    Python SDK:  MigrationSDK.migrate()    •    REST API:  POST /migrate</a:t>
             </a:r>
           </a:p>
         </p:txBody>
